--- a/Lecture slides/AMOS B02 - Scrum and AMOS.pptx
+++ b/Lecture slides/AMOS B02 - Scrum and AMOS.pptx
@@ -2,56 +2,57 @@
 <file path=ppt/presentation.xml><?xml version="1.0" encoding="utf-8"?>
 <p:presentation xmlns:a="http://schemas.openxmlformats.org/drawingml/2006/main" xmlns:r="http://schemas.openxmlformats.org/officeDocument/2006/relationships" xmlns:mc="http://schemas.openxmlformats.org/markup-compatibility/2006" xmlns:mv="urn:schemas-microsoft-com:mac:vml" xmlns:p="http://schemas.openxmlformats.org/presentationml/2006/main" xmlns:c="http://schemas.openxmlformats.org/drawingml/2006/chart" xmlns:dgm="http://schemas.openxmlformats.org/drawingml/2006/diagram" xmlns:o="urn:schemas-microsoft-com:office:office" xmlns:v="urn:schemas-microsoft-com:vml" xmlns:pvml="urn:schemas-microsoft-com:office:powerpoint" xmlns:com="http://schemas.openxmlformats.org/drawingml/2006/compatibility" xmlns:p14="http://schemas.microsoft.com/office/powerpoint/2010/main" xmlns:p15="http://schemas.microsoft.com/office/powerpoint/2012/main" xmlns:ahyp="http://schemas.microsoft.com/office/drawing/2018/hyperlinkcolor" autoCompressPictures="0" strictFirstAndLastChars="0" saveSubsetFonts="1" showSpecialPlsOnTitleSld="0">
   <p:sldMasterIdLst>
-    <p:sldMasterId id="2147483654" r:id="rId5"/>
+    <p:sldMasterId id="2147483660" r:id="rId5"/>
+    <p:sldMasterId id="2147483661" r:id="rId6"/>
   </p:sldMasterIdLst>
   <p:notesMasterIdLst>
-    <p:notesMasterId r:id="rId6"/>
+    <p:notesMasterId r:id="rId7"/>
   </p:notesMasterIdLst>
   <p:sldIdLst>
-    <p:sldId id="256" r:id="rId7"/>
-    <p:sldId id="257" r:id="rId8"/>
-    <p:sldId id="258" r:id="rId9"/>
-    <p:sldId id="259" r:id="rId10"/>
-    <p:sldId id="260" r:id="rId11"/>
-    <p:sldId id="261" r:id="rId12"/>
-    <p:sldId id="262" r:id="rId13"/>
-    <p:sldId id="263" r:id="rId14"/>
-    <p:sldId id="264" r:id="rId15"/>
-    <p:sldId id="265" r:id="rId16"/>
-    <p:sldId id="266" r:id="rId17"/>
-    <p:sldId id="267" r:id="rId18"/>
-    <p:sldId id="268" r:id="rId19"/>
-    <p:sldId id="269" r:id="rId20"/>
-    <p:sldId id="270" r:id="rId21"/>
-    <p:sldId id="271" r:id="rId22"/>
-    <p:sldId id="272" r:id="rId23"/>
-    <p:sldId id="273" r:id="rId24"/>
-    <p:sldId id="274" r:id="rId25"/>
-    <p:sldId id="275" r:id="rId26"/>
-    <p:sldId id="276" r:id="rId27"/>
-    <p:sldId id="277" r:id="rId28"/>
-    <p:sldId id="278" r:id="rId29"/>
-    <p:sldId id="279" r:id="rId30"/>
-    <p:sldId id="280" r:id="rId31"/>
-    <p:sldId id="281" r:id="rId32"/>
-    <p:sldId id="282" r:id="rId33"/>
-    <p:sldId id="283" r:id="rId34"/>
-    <p:sldId id="284" r:id="rId35"/>
-    <p:sldId id="285" r:id="rId36"/>
-    <p:sldId id="286" r:id="rId37"/>
-    <p:sldId id="287" r:id="rId38"/>
-    <p:sldId id="288" r:id="rId39"/>
-    <p:sldId id="289" r:id="rId40"/>
-    <p:sldId id="290" r:id="rId41"/>
-    <p:sldId id="291" r:id="rId42"/>
-    <p:sldId id="292" r:id="rId43"/>
-    <p:sldId id="293" r:id="rId44"/>
-    <p:sldId id="294" r:id="rId45"/>
-    <p:sldId id="295" r:id="rId46"/>
-    <p:sldId id="296" r:id="rId47"/>
-    <p:sldId id="297" r:id="rId48"/>
-    <p:sldId id="298" r:id="rId49"/>
-    <p:sldId id="299" r:id="rId50"/>
+    <p:sldId id="256" r:id="rId8"/>
+    <p:sldId id="257" r:id="rId9"/>
+    <p:sldId id="258" r:id="rId10"/>
+    <p:sldId id="259" r:id="rId11"/>
+    <p:sldId id="260" r:id="rId12"/>
+    <p:sldId id="261" r:id="rId13"/>
+    <p:sldId id="262" r:id="rId14"/>
+    <p:sldId id="263" r:id="rId15"/>
+    <p:sldId id="264" r:id="rId16"/>
+    <p:sldId id="265" r:id="rId17"/>
+    <p:sldId id="266" r:id="rId18"/>
+    <p:sldId id="267" r:id="rId19"/>
+    <p:sldId id="268" r:id="rId20"/>
+    <p:sldId id="269" r:id="rId21"/>
+    <p:sldId id="270" r:id="rId22"/>
+    <p:sldId id="271" r:id="rId23"/>
+    <p:sldId id="272" r:id="rId24"/>
+    <p:sldId id="273" r:id="rId25"/>
+    <p:sldId id="274" r:id="rId26"/>
+    <p:sldId id="275" r:id="rId27"/>
+    <p:sldId id="276" r:id="rId28"/>
+    <p:sldId id="277" r:id="rId29"/>
+    <p:sldId id="278" r:id="rId30"/>
+    <p:sldId id="279" r:id="rId31"/>
+    <p:sldId id="280" r:id="rId32"/>
+    <p:sldId id="281" r:id="rId33"/>
+    <p:sldId id="282" r:id="rId34"/>
+    <p:sldId id="283" r:id="rId35"/>
+    <p:sldId id="284" r:id="rId36"/>
+    <p:sldId id="285" r:id="rId37"/>
+    <p:sldId id="286" r:id="rId38"/>
+    <p:sldId id="287" r:id="rId39"/>
+    <p:sldId id="288" r:id="rId40"/>
+    <p:sldId id="289" r:id="rId41"/>
+    <p:sldId id="290" r:id="rId42"/>
+    <p:sldId id="291" r:id="rId43"/>
+    <p:sldId id="292" r:id="rId44"/>
+    <p:sldId id="293" r:id="rId45"/>
+    <p:sldId id="294" r:id="rId46"/>
+    <p:sldId id="295" r:id="rId47"/>
+    <p:sldId id="296" r:id="rId48"/>
+    <p:sldId id="297" r:id="rId49"/>
+    <p:sldId id="298" r:id="rId50"/>
+    <p:sldId id="299" r:id="rId51"/>
   </p:sldIdLst>
   <p:sldSz cy="5143500" cx="9144000"/>
   <p:notesSz cx="6858000" cy="9144000"/>
@@ -734,7 +735,7 @@
   <p:cSld>
     <p:spTree>
       <p:nvGrpSpPr>
-        <p:cNvPr id="47" name="Shape 47"/>
+        <p:cNvPr id="89" name="Shape 89"/>
         <p:cNvGrpSpPr/>
         <p:nvPr/>
       </p:nvGrpSpPr>
@@ -748,7 +749,7 @@
       </p:grpSpPr>
       <p:sp>
         <p:nvSpPr>
-          <p:cNvPr id="48" name="Google Shape;48;g2cd8fcfcbb8_0_122:notes"/>
+          <p:cNvPr id="90" name="Google Shape;90;g2cd8fcfcbb8_0_122:notes"/>
           <p:cNvSpPr/>
           <p:nvPr>
             <p:ph idx="2" type="sldImg"/>
@@ -783,7 +784,7 @@
       </p:sp>
       <p:sp>
         <p:nvSpPr>
-          <p:cNvPr id="49" name="Google Shape;49;g2cd8fcfcbb8_0_122:notes"/>
+          <p:cNvPr id="91" name="Google Shape;91;g2cd8fcfcbb8_0_122:notes"/>
           <p:cNvSpPr txBox="1"/>
           <p:nvPr>
             <p:ph idx="1" type="body"/>
@@ -833,7 +834,7 @@
   <p:cSld>
     <p:spTree>
       <p:nvGrpSpPr>
-        <p:cNvPr id="107" name="Shape 107"/>
+        <p:cNvPr id="149" name="Shape 149"/>
         <p:cNvGrpSpPr/>
         <p:nvPr/>
       </p:nvGrpSpPr>
@@ -847,7 +848,7 @@
       </p:grpSpPr>
       <p:sp>
         <p:nvSpPr>
-          <p:cNvPr id="108" name="Google Shape;108;g22c6355d619_0_199:notes"/>
+          <p:cNvPr id="150" name="Google Shape;150;g22c6355d619_0_199:notes"/>
           <p:cNvSpPr/>
           <p:nvPr>
             <p:ph idx="2" type="sldImg"/>
@@ -882,7 +883,7 @@
       </p:sp>
       <p:sp>
         <p:nvSpPr>
-          <p:cNvPr id="109" name="Google Shape;109;g22c6355d619_0_199:notes"/>
+          <p:cNvPr id="151" name="Google Shape;151;g22c6355d619_0_199:notes"/>
           <p:cNvSpPr txBox="1"/>
           <p:nvPr>
             <p:ph idx="1" type="body"/>
@@ -932,7 +933,7 @@
   <p:cSld>
     <p:spTree>
       <p:nvGrpSpPr>
-        <p:cNvPr id="114" name="Shape 114"/>
+        <p:cNvPr id="156" name="Shape 156"/>
         <p:cNvGrpSpPr/>
         <p:nvPr/>
       </p:nvGrpSpPr>
@@ -946,7 +947,7 @@
       </p:grpSpPr>
       <p:sp>
         <p:nvSpPr>
-          <p:cNvPr id="115" name="Google Shape;115;g22c6355d619_0_91:notes"/>
+          <p:cNvPr id="157" name="Google Shape;157;g22c6355d619_0_91:notes"/>
           <p:cNvSpPr/>
           <p:nvPr>
             <p:ph idx="2" type="sldImg"/>
@@ -981,7 +982,7 @@
       </p:sp>
       <p:sp>
         <p:nvSpPr>
-          <p:cNvPr id="116" name="Google Shape;116;g22c6355d619_0_91:notes"/>
+          <p:cNvPr id="158" name="Google Shape;158;g22c6355d619_0_91:notes"/>
           <p:cNvSpPr txBox="1"/>
           <p:nvPr>
             <p:ph idx="1" type="body"/>
@@ -1031,7 +1032,7 @@
   <p:cSld>
     <p:spTree>
       <p:nvGrpSpPr>
-        <p:cNvPr id="121" name="Shape 121"/>
+        <p:cNvPr id="163" name="Shape 163"/>
         <p:cNvGrpSpPr/>
         <p:nvPr/>
       </p:nvGrpSpPr>
@@ -1045,7 +1046,7 @@
       </p:grpSpPr>
       <p:sp>
         <p:nvSpPr>
-          <p:cNvPr id="122" name="Google Shape;122;g2cf0d554a2e_0_0:notes"/>
+          <p:cNvPr id="164" name="Google Shape;164;g2cf0d554a2e_0_0:notes"/>
           <p:cNvSpPr/>
           <p:nvPr>
             <p:ph idx="2" type="sldImg"/>
@@ -1080,7 +1081,7 @@
       </p:sp>
       <p:sp>
         <p:nvSpPr>
-          <p:cNvPr id="123" name="Google Shape;123;g2cf0d554a2e_0_0:notes"/>
+          <p:cNvPr id="165" name="Google Shape;165;g2cf0d554a2e_0_0:notes"/>
           <p:cNvSpPr txBox="1"/>
           <p:nvPr>
             <p:ph idx="1" type="body"/>
@@ -1130,7 +1131,7 @@
   <p:cSld>
     <p:spTree>
       <p:nvGrpSpPr>
-        <p:cNvPr id="128" name="Shape 128"/>
+        <p:cNvPr id="170" name="Shape 170"/>
         <p:cNvGrpSpPr/>
         <p:nvPr/>
       </p:nvGrpSpPr>
@@ -1144,7 +1145,7 @@
       </p:grpSpPr>
       <p:sp>
         <p:nvSpPr>
-          <p:cNvPr id="129" name="Google Shape;129;g22c6355d619_0_97:notes"/>
+          <p:cNvPr id="171" name="Google Shape;171;g22c6355d619_0_97:notes"/>
           <p:cNvSpPr/>
           <p:nvPr>
             <p:ph idx="2" type="sldImg"/>
@@ -1179,7 +1180,7 @@
       </p:sp>
       <p:sp>
         <p:nvSpPr>
-          <p:cNvPr id="130" name="Google Shape;130;g22c6355d619_0_97:notes"/>
+          <p:cNvPr id="172" name="Google Shape;172;g22c6355d619_0_97:notes"/>
           <p:cNvSpPr txBox="1"/>
           <p:nvPr>
             <p:ph idx="1" type="body"/>
@@ -1229,7 +1230,7 @@
   <p:cSld>
     <p:spTree>
       <p:nvGrpSpPr>
-        <p:cNvPr id="137" name="Shape 137"/>
+        <p:cNvPr id="179" name="Shape 179"/>
         <p:cNvGrpSpPr/>
         <p:nvPr/>
       </p:nvGrpSpPr>
@@ -1243,7 +1244,7 @@
       </p:grpSpPr>
       <p:sp>
         <p:nvSpPr>
-          <p:cNvPr id="138" name="Google Shape;138;g267a91423c4_1_0:notes"/>
+          <p:cNvPr id="180" name="Google Shape;180;g267a91423c4_1_0:notes"/>
           <p:cNvSpPr/>
           <p:nvPr>
             <p:ph idx="2" type="sldImg"/>
@@ -1278,7 +1279,7 @@
       </p:sp>
       <p:sp>
         <p:nvSpPr>
-          <p:cNvPr id="139" name="Google Shape;139;g267a91423c4_1_0:notes"/>
+          <p:cNvPr id="181" name="Google Shape;181;g267a91423c4_1_0:notes"/>
           <p:cNvSpPr txBox="1"/>
           <p:nvPr>
             <p:ph idx="1" type="body"/>
@@ -1328,7 +1329,7 @@
   <p:cSld>
     <p:spTree>
       <p:nvGrpSpPr>
-        <p:cNvPr id="144" name="Shape 144"/>
+        <p:cNvPr id="186" name="Shape 186"/>
         <p:cNvGrpSpPr/>
         <p:nvPr/>
       </p:nvGrpSpPr>
@@ -1342,7 +1343,7 @@
       </p:grpSpPr>
       <p:sp>
         <p:nvSpPr>
-          <p:cNvPr id="145" name="Google Shape;145;g22c6355d619_0_103:notes"/>
+          <p:cNvPr id="187" name="Google Shape;187;g22c6355d619_0_103:notes"/>
           <p:cNvSpPr/>
           <p:nvPr>
             <p:ph idx="2" type="sldImg"/>
@@ -1377,7 +1378,7 @@
       </p:sp>
       <p:sp>
         <p:nvSpPr>
-          <p:cNvPr id="146" name="Google Shape;146;g22c6355d619_0_103:notes"/>
+          <p:cNvPr id="188" name="Google Shape;188;g22c6355d619_0_103:notes"/>
           <p:cNvSpPr txBox="1"/>
           <p:nvPr>
             <p:ph idx="1" type="body"/>
@@ -1427,7 +1428,7 @@
   <p:cSld>
     <p:spTree>
       <p:nvGrpSpPr>
-        <p:cNvPr id="157" name="Shape 157"/>
+        <p:cNvPr id="199" name="Shape 199"/>
         <p:cNvGrpSpPr/>
         <p:nvPr/>
       </p:nvGrpSpPr>
@@ -1441,7 +1442,7 @@
       </p:grpSpPr>
       <p:sp>
         <p:nvSpPr>
-          <p:cNvPr id="158" name="Google Shape;158;g22c6355d619_0_115:notes"/>
+          <p:cNvPr id="200" name="Google Shape;200;g22c6355d619_0_115:notes"/>
           <p:cNvSpPr/>
           <p:nvPr>
             <p:ph idx="2" type="sldImg"/>
@@ -1476,7 +1477,7 @@
       </p:sp>
       <p:sp>
         <p:nvSpPr>
-          <p:cNvPr id="159" name="Google Shape;159;g22c6355d619_0_115:notes"/>
+          <p:cNvPr id="201" name="Google Shape;201;g22c6355d619_0_115:notes"/>
           <p:cNvSpPr txBox="1"/>
           <p:nvPr>
             <p:ph idx="1" type="body"/>
@@ -1526,7 +1527,7 @@
   <p:cSld>
     <p:spTree>
       <p:nvGrpSpPr>
-        <p:cNvPr id="165" name="Shape 165"/>
+        <p:cNvPr id="207" name="Shape 207"/>
         <p:cNvGrpSpPr/>
         <p:nvPr/>
       </p:nvGrpSpPr>
@@ -1540,7 +1541,7 @@
       </p:grpSpPr>
       <p:sp>
         <p:nvSpPr>
-          <p:cNvPr id="166" name="Google Shape;166;g2cf0d554a2e_0_7:notes"/>
+          <p:cNvPr id="208" name="Google Shape;208;g2cf0d554a2e_0_7:notes"/>
           <p:cNvSpPr/>
           <p:nvPr>
             <p:ph idx="2" type="sldImg"/>
@@ -1575,7 +1576,7 @@
       </p:sp>
       <p:sp>
         <p:nvSpPr>
-          <p:cNvPr id="167" name="Google Shape;167;g2cf0d554a2e_0_7:notes"/>
+          <p:cNvPr id="209" name="Google Shape;209;g2cf0d554a2e_0_7:notes"/>
           <p:cNvSpPr txBox="1"/>
           <p:nvPr>
             <p:ph idx="1" type="body"/>
@@ -1625,7 +1626,7 @@
   <p:cSld>
     <p:spTree>
       <p:nvGrpSpPr>
-        <p:cNvPr id="172" name="Shape 172"/>
+        <p:cNvPr id="214" name="Shape 214"/>
         <p:cNvGrpSpPr/>
         <p:nvPr/>
       </p:nvGrpSpPr>
@@ -1639,7 +1640,7 @@
       </p:grpSpPr>
       <p:sp>
         <p:nvSpPr>
-          <p:cNvPr id="173" name="Google Shape;173;g22c6355d619_0_121:notes"/>
+          <p:cNvPr id="215" name="Google Shape;215;g22c6355d619_0_121:notes"/>
           <p:cNvSpPr/>
           <p:nvPr>
             <p:ph idx="2" type="sldImg"/>
@@ -1674,7 +1675,7 @@
       </p:sp>
       <p:sp>
         <p:nvSpPr>
-          <p:cNvPr id="174" name="Google Shape;174;g22c6355d619_0_121:notes"/>
+          <p:cNvPr id="216" name="Google Shape;216;g22c6355d619_0_121:notes"/>
           <p:cNvSpPr txBox="1"/>
           <p:nvPr>
             <p:ph idx="1" type="body"/>
@@ -1724,7 +1725,7 @@
   <p:cSld>
     <p:spTree>
       <p:nvGrpSpPr>
-        <p:cNvPr id="180" name="Shape 180"/>
+        <p:cNvPr id="222" name="Shape 222"/>
         <p:cNvGrpSpPr/>
         <p:nvPr/>
       </p:nvGrpSpPr>
@@ -1738,7 +1739,7 @@
       </p:grpSpPr>
       <p:sp>
         <p:nvSpPr>
-          <p:cNvPr id="181" name="Google Shape;181;g22c6355d619_0_207:notes"/>
+          <p:cNvPr id="223" name="Google Shape;223;g22c6355d619_0_207:notes"/>
           <p:cNvSpPr/>
           <p:nvPr>
             <p:ph idx="2" type="sldImg"/>
@@ -1773,7 +1774,7 @@
       </p:sp>
       <p:sp>
         <p:nvSpPr>
-          <p:cNvPr id="182" name="Google Shape;182;g22c6355d619_0_207:notes"/>
+          <p:cNvPr id="224" name="Google Shape;224;g22c6355d619_0_207:notes"/>
           <p:cNvSpPr txBox="1"/>
           <p:nvPr>
             <p:ph idx="1" type="body"/>
@@ -1823,7 +1824,7 @@
   <p:cSld>
     <p:spTree>
       <p:nvGrpSpPr>
-        <p:cNvPr id="53" name="Shape 53"/>
+        <p:cNvPr id="95" name="Shape 95"/>
         <p:cNvGrpSpPr/>
         <p:nvPr/>
       </p:nvGrpSpPr>
@@ -1837,7 +1838,7 @@
       </p:grpSpPr>
       <p:sp>
         <p:nvSpPr>
-          <p:cNvPr id="54" name="Google Shape;54;gf17014c61d_0_0:notes"/>
+          <p:cNvPr id="96" name="Google Shape;96;gf17014c61d_0_0:notes"/>
           <p:cNvSpPr/>
           <p:nvPr>
             <p:ph idx="2" type="sldImg"/>
@@ -1872,7 +1873,7 @@
       </p:sp>
       <p:sp>
         <p:nvSpPr>
-          <p:cNvPr id="55" name="Google Shape;55;gf17014c61d_0_0:notes"/>
+          <p:cNvPr id="97" name="Google Shape;97;gf17014c61d_0_0:notes"/>
           <p:cNvSpPr txBox="1"/>
           <p:nvPr>
             <p:ph idx="1" type="body"/>
@@ -1922,7 +1923,7 @@
   <p:cSld>
     <p:spTree>
       <p:nvGrpSpPr>
-        <p:cNvPr id="187" name="Shape 187"/>
+        <p:cNvPr id="229" name="Shape 229"/>
         <p:cNvGrpSpPr/>
         <p:nvPr/>
       </p:nvGrpSpPr>
@@ -1936,7 +1937,7 @@
       </p:grpSpPr>
       <p:sp>
         <p:nvSpPr>
-          <p:cNvPr id="188" name="Google Shape;188;g22c6355d619_0_127:notes"/>
+          <p:cNvPr id="230" name="Google Shape;230;g22c6355d619_0_127:notes"/>
           <p:cNvSpPr/>
           <p:nvPr>
             <p:ph idx="2" type="sldImg"/>
@@ -1971,7 +1972,7 @@
       </p:sp>
       <p:sp>
         <p:nvSpPr>
-          <p:cNvPr id="189" name="Google Shape;189;g22c6355d619_0_127:notes"/>
+          <p:cNvPr id="231" name="Google Shape;231;g22c6355d619_0_127:notes"/>
           <p:cNvSpPr txBox="1"/>
           <p:nvPr>
             <p:ph idx="1" type="body"/>
@@ -2021,7 +2022,7 @@
   <p:cSld>
     <p:spTree>
       <p:nvGrpSpPr>
-        <p:cNvPr id="195" name="Shape 195"/>
+        <p:cNvPr id="237" name="Shape 237"/>
         <p:cNvGrpSpPr/>
         <p:nvPr/>
       </p:nvGrpSpPr>
@@ -2035,7 +2036,7 @@
       </p:grpSpPr>
       <p:sp>
         <p:nvSpPr>
-          <p:cNvPr id="196" name="Google Shape;196;g22c6355d619_0_213:notes"/>
+          <p:cNvPr id="238" name="Google Shape;238;g22c6355d619_0_213:notes"/>
           <p:cNvSpPr/>
           <p:nvPr>
             <p:ph idx="2" type="sldImg"/>
@@ -2070,7 +2071,7 @@
       </p:sp>
       <p:sp>
         <p:nvSpPr>
-          <p:cNvPr id="197" name="Google Shape;197;g22c6355d619_0_213:notes"/>
+          <p:cNvPr id="239" name="Google Shape;239;g22c6355d619_0_213:notes"/>
           <p:cNvSpPr txBox="1"/>
           <p:nvPr>
             <p:ph idx="1" type="body"/>
@@ -2120,7 +2121,7 @@
   <p:cSld>
     <p:spTree>
       <p:nvGrpSpPr>
-        <p:cNvPr id="202" name="Shape 202"/>
+        <p:cNvPr id="244" name="Shape 244"/>
         <p:cNvGrpSpPr/>
         <p:nvPr/>
       </p:nvGrpSpPr>
@@ -2134,7 +2135,7 @@
       </p:grpSpPr>
       <p:sp>
         <p:nvSpPr>
-          <p:cNvPr id="203" name="Google Shape;203;g22c6355d619_0_133:notes"/>
+          <p:cNvPr id="245" name="Google Shape;245;g22c6355d619_0_133:notes"/>
           <p:cNvSpPr/>
           <p:nvPr>
             <p:ph idx="2" type="sldImg"/>
@@ -2169,7 +2170,7 @@
       </p:sp>
       <p:sp>
         <p:nvSpPr>
-          <p:cNvPr id="204" name="Google Shape;204;g22c6355d619_0_133:notes"/>
+          <p:cNvPr id="246" name="Google Shape;246;g22c6355d619_0_133:notes"/>
           <p:cNvSpPr txBox="1"/>
           <p:nvPr>
             <p:ph idx="1" type="body"/>
@@ -2219,7 +2220,7 @@
   <p:cSld>
     <p:spTree>
       <p:nvGrpSpPr>
-        <p:cNvPr id="210" name="Shape 210"/>
+        <p:cNvPr id="252" name="Shape 252"/>
         <p:cNvGrpSpPr/>
         <p:nvPr/>
       </p:nvGrpSpPr>
@@ -2233,7 +2234,7 @@
       </p:grpSpPr>
       <p:sp>
         <p:nvSpPr>
-          <p:cNvPr id="211" name="Google Shape;211;g22c6355d619_0_219:notes"/>
+          <p:cNvPr id="253" name="Google Shape;253;g22c6355d619_0_219:notes"/>
           <p:cNvSpPr/>
           <p:nvPr>
             <p:ph idx="2" type="sldImg"/>
@@ -2268,7 +2269,7 @@
       </p:sp>
       <p:sp>
         <p:nvSpPr>
-          <p:cNvPr id="212" name="Google Shape;212;g22c6355d619_0_219:notes"/>
+          <p:cNvPr id="254" name="Google Shape;254;g22c6355d619_0_219:notes"/>
           <p:cNvSpPr txBox="1"/>
           <p:nvPr>
             <p:ph idx="1" type="body"/>
@@ -2318,7 +2319,7 @@
   <p:cSld>
     <p:spTree>
       <p:nvGrpSpPr>
-        <p:cNvPr id="217" name="Shape 217"/>
+        <p:cNvPr id="259" name="Shape 259"/>
         <p:cNvGrpSpPr/>
         <p:nvPr/>
       </p:nvGrpSpPr>
@@ -2332,7 +2333,7 @@
       </p:grpSpPr>
       <p:sp>
         <p:nvSpPr>
-          <p:cNvPr id="218" name="Google Shape;218;g22c6355d619_0_139:notes"/>
+          <p:cNvPr id="260" name="Google Shape;260;g22c6355d619_0_139:notes"/>
           <p:cNvSpPr/>
           <p:nvPr>
             <p:ph idx="2" type="sldImg"/>
@@ -2367,7 +2368,7 @@
       </p:sp>
       <p:sp>
         <p:nvSpPr>
-          <p:cNvPr id="219" name="Google Shape;219;g22c6355d619_0_139:notes"/>
+          <p:cNvPr id="261" name="Google Shape;261;g22c6355d619_0_139:notes"/>
           <p:cNvSpPr txBox="1"/>
           <p:nvPr>
             <p:ph idx="1" type="body"/>
@@ -2417,7 +2418,7 @@
   <p:cSld>
     <p:spTree>
       <p:nvGrpSpPr>
-        <p:cNvPr id="225" name="Shape 225"/>
+        <p:cNvPr id="267" name="Shape 267"/>
         <p:cNvGrpSpPr/>
         <p:nvPr/>
       </p:nvGrpSpPr>
@@ -2431,7 +2432,7 @@
       </p:grpSpPr>
       <p:sp>
         <p:nvSpPr>
-          <p:cNvPr id="226" name="Google Shape;226;g22c6355d619_0_252:notes"/>
+          <p:cNvPr id="268" name="Google Shape;268;g22c6355d619_0_252:notes"/>
           <p:cNvSpPr/>
           <p:nvPr>
             <p:ph idx="2" type="sldImg"/>
@@ -2466,7 +2467,7 @@
       </p:sp>
       <p:sp>
         <p:nvSpPr>
-          <p:cNvPr id="227" name="Google Shape;227;g22c6355d619_0_252:notes"/>
+          <p:cNvPr id="269" name="Google Shape;269;g22c6355d619_0_252:notes"/>
           <p:cNvSpPr txBox="1"/>
           <p:nvPr>
             <p:ph idx="1" type="body"/>
@@ -2516,7 +2517,7 @@
   <p:cSld>
     <p:spTree>
       <p:nvGrpSpPr>
-        <p:cNvPr id="232" name="Shape 232"/>
+        <p:cNvPr id="274" name="Shape 274"/>
         <p:cNvGrpSpPr/>
         <p:nvPr/>
       </p:nvGrpSpPr>
@@ -2530,7 +2531,7 @@
       </p:grpSpPr>
       <p:sp>
         <p:nvSpPr>
-          <p:cNvPr id="233" name="Google Shape;233;g22c6355d619_0_145:notes"/>
+          <p:cNvPr id="275" name="Google Shape;275;g22c6355d619_0_145:notes"/>
           <p:cNvSpPr/>
           <p:nvPr>
             <p:ph idx="2" type="sldImg"/>
@@ -2565,7 +2566,7 @@
       </p:sp>
       <p:sp>
         <p:nvSpPr>
-          <p:cNvPr id="234" name="Google Shape;234;g22c6355d619_0_145:notes"/>
+          <p:cNvPr id="276" name="Google Shape;276;g22c6355d619_0_145:notes"/>
           <p:cNvSpPr txBox="1"/>
           <p:nvPr>
             <p:ph idx="1" type="body"/>
@@ -2615,7 +2616,7 @@
   <p:cSld>
     <p:spTree>
       <p:nvGrpSpPr>
-        <p:cNvPr id="240" name="Shape 240"/>
+        <p:cNvPr id="282" name="Shape 282"/>
         <p:cNvGrpSpPr/>
         <p:nvPr/>
       </p:nvGrpSpPr>
@@ -2629,7 +2630,7 @@
       </p:grpSpPr>
       <p:sp>
         <p:nvSpPr>
-          <p:cNvPr id="241" name="Google Shape;241;g22c6355d619_0_152:notes"/>
+          <p:cNvPr id="283" name="Google Shape;283;g22c6355d619_0_152:notes"/>
           <p:cNvSpPr/>
           <p:nvPr>
             <p:ph idx="2" type="sldImg"/>
@@ -2664,7 +2665,7 @@
       </p:sp>
       <p:sp>
         <p:nvSpPr>
-          <p:cNvPr id="242" name="Google Shape;242;g22c6355d619_0_152:notes"/>
+          <p:cNvPr id="284" name="Google Shape;284;g22c6355d619_0_152:notes"/>
           <p:cNvSpPr txBox="1"/>
           <p:nvPr>
             <p:ph idx="1" type="body"/>
@@ -2714,7 +2715,7 @@
   <p:cSld>
     <p:spTree>
       <p:nvGrpSpPr>
-        <p:cNvPr id="248" name="Shape 248"/>
+        <p:cNvPr id="290" name="Shape 290"/>
         <p:cNvGrpSpPr/>
         <p:nvPr/>
       </p:nvGrpSpPr>
@@ -2728,7 +2729,7 @@
       </p:grpSpPr>
       <p:sp>
         <p:nvSpPr>
-          <p:cNvPr id="249" name="Google Shape;249;g22c6355d619_0_159:notes"/>
+          <p:cNvPr id="291" name="Google Shape;291;g22c6355d619_0_159:notes"/>
           <p:cNvSpPr/>
           <p:nvPr>
             <p:ph idx="2" type="sldImg"/>
@@ -2763,7 +2764,7 @@
       </p:sp>
       <p:sp>
         <p:nvSpPr>
-          <p:cNvPr id="250" name="Google Shape;250;g22c6355d619_0_159:notes"/>
+          <p:cNvPr id="292" name="Google Shape;292;g22c6355d619_0_159:notes"/>
           <p:cNvSpPr txBox="1"/>
           <p:nvPr>
             <p:ph idx="1" type="body"/>
@@ -2813,7 +2814,7 @@
   <p:cSld>
     <p:spTree>
       <p:nvGrpSpPr>
-        <p:cNvPr id="256" name="Shape 256"/>
+        <p:cNvPr id="298" name="Shape 298"/>
         <p:cNvGrpSpPr/>
         <p:nvPr/>
       </p:nvGrpSpPr>
@@ -2827,7 +2828,7 @@
       </p:grpSpPr>
       <p:sp>
         <p:nvSpPr>
-          <p:cNvPr id="257" name="Google Shape;257;g22c6355d619_0_226:notes"/>
+          <p:cNvPr id="299" name="Google Shape;299;g22c6355d619_0_226:notes"/>
           <p:cNvSpPr/>
           <p:nvPr>
             <p:ph idx="2" type="sldImg"/>
@@ -2862,7 +2863,7 @@
       </p:sp>
       <p:sp>
         <p:nvSpPr>
-          <p:cNvPr id="258" name="Google Shape;258;g22c6355d619_0_226:notes"/>
+          <p:cNvPr id="300" name="Google Shape;300;g22c6355d619_0_226:notes"/>
           <p:cNvSpPr txBox="1"/>
           <p:nvPr>
             <p:ph idx="1" type="body"/>
@@ -2912,7 +2913,7 @@
   <p:cSld>
     <p:spTree>
       <p:nvGrpSpPr>
-        <p:cNvPr id="62" name="Shape 62"/>
+        <p:cNvPr id="104" name="Shape 104"/>
         <p:cNvGrpSpPr/>
         <p:nvPr/>
       </p:nvGrpSpPr>
@@ -2926,7 +2927,7 @@
       </p:grpSpPr>
       <p:sp>
         <p:nvSpPr>
-          <p:cNvPr id="63" name="Google Shape;63;g1e56beb4b30_0_0:notes"/>
+          <p:cNvPr id="105" name="Google Shape;105;g1e56beb4b30_0_0:notes"/>
           <p:cNvSpPr/>
           <p:nvPr>
             <p:ph idx="2" type="sldImg"/>
@@ -2961,7 +2962,7 @@
       </p:sp>
       <p:sp>
         <p:nvSpPr>
-          <p:cNvPr id="64" name="Google Shape;64;g1e56beb4b30_0_0:notes"/>
+          <p:cNvPr id="106" name="Google Shape;106;g1e56beb4b30_0_0:notes"/>
           <p:cNvSpPr txBox="1"/>
           <p:nvPr>
             <p:ph idx="1" type="body"/>
@@ -3011,7 +3012,7 @@
   <p:cSld>
     <p:spTree>
       <p:nvGrpSpPr>
-        <p:cNvPr id="263" name="Shape 263"/>
+        <p:cNvPr id="305" name="Shape 305"/>
         <p:cNvGrpSpPr/>
         <p:nvPr/>
       </p:nvGrpSpPr>
@@ -3025,7 +3026,7 @@
       </p:grpSpPr>
       <p:sp>
         <p:nvSpPr>
-          <p:cNvPr id="264" name="Google Shape;264;g22c6355d619_0_232:notes"/>
+          <p:cNvPr id="306" name="Google Shape;306;g22c6355d619_0_232:notes"/>
           <p:cNvSpPr/>
           <p:nvPr>
             <p:ph idx="2" type="sldImg"/>
@@ -3060,7 +3061,7 @@
       </p:sp>
       <p:sp>
         <p:nvSpPr>
-          <p:cNvPr id="265" name="Google Shape;265;g22c6355d619_0_232:notes"/>
+          <p:cNvPr id="307" name="Google Shape;307;g22c6355d619_0_232:notes"/>
           <p:cNvSpPr txBox="1"/>
           <p:nvPr>
             <p:ph idx="1" type="body"/>
@@ -3110,7 +3111,7 @@
   <p:cSld>
     <p:spTree>
       <p:nvGrpSpPr>
-        <p:cNvPr id="270" name="Shape 270"/>
+        <p:cNvPr id="312" name="Shape 312"/>
         <p:cNvGrpSpPr/>
         <p:nvPr/>
       </p:nvGrpSpPr>
@@ -3124,7 +3125,7 @@
       </p:grpSpPr>
       <p:sp>
         <p:nvSpPr>
-          <p:cNvPr id="271" name="Google Shape;271;g22c6355d619_0_165:notes"/>
+          <p:cNvPr id="313" name="Google Shape;313;g22c6355d619_0_165:notes"/>
           <p:cNvSpPr/>
           <p:nvPr>
             <p:ph idx="2" type="sldImg"/>
@@ -3159,7 +3160,7 @@
       </p:sp>
       <p:sp>
         <p:nvSpPr>
-          <p:cNvPr id="272" name="Google Shape;272;g22c6355d619_0_165:notes"/>
+          <p:cNvPr id="314" name="Google Shape;314;g22c6355d619_0_165:notes"/>
           <p:cNvSpPr txBox="1"/>
           <p:nvPr>
             <p:ph idx="1" type="body"/>
@@ -3209,7 +3210,7 @@
   <p:cSld>
     <p:spTree>
       <p:nvGrpSpPr>
-        <p:cNvPr id="277" name="Shape 277"/>
+        <p:cNvPr id="319" name="Shape 319"/>
         <p:cNvGrpSpPr/>
         <p:nvPr/>
       </p:nvGrpSpPr>
@@ -3223,7 +3224,7 @@
       </p:grpSpPr>
       <p:sp>
         <p:nvSpPr>
-          <p:cNvPr id="278" name="Google Shape;278;g22c6355d619_0_75:notes"/>
+          <p:cNvPr id="320" name="Google Shape;320;g22c6355d619_0_75:notes"/>
           <p:cNvSpPr/>
           <p:nvPr>
             <p:ph idx="2" type="sldImg"/>
@@ -3258,7 +3259,7 @@
       </p:sp>
       <p:sp>
         <p:nvSpPr>
-          <p:cNvPr id="279" name="Google Shape;279;g22c6355d619_0_75:notes"/>
+          <p:cNvPr id="321" name="Google Shape;321;g22c6355d619_0_75:notes"/>
           <p:cNvSpPr txBox="1"/>
           <p:nvPr>
             <p:ph idx="1" type="body"/>
@@ -3308,7 +3309,7 @@
   <p:cSld>
     <p:spTree>
       <p:nvGrpSpPr>
-        <p:cNvPr id="282" name="Shape 282"/>
+        <p:cNvPr id="324" name="Shape 324"/>
         <p:cNvGrpSpPr/>
         <p:nvPr/>
       </p:nvGrpSpPr>
@@ -3322,7 +3323,7 @@
       </p:grpSpPr>
       <p:sp>
         <p:nvSpPr>
-          <p:cNvPr id="283" name="Google Shape;283;g22c6355d619_0_238:notes"/>
+          <p:cNvPr id="325" name="Google Shape;325;g22c6355d619_0_238:notes"/>
           <p:cNvSpPr/>
           <p:nvPr>
             <p:ph idx="2" type="sldImg"/>
@@ -3357,7 +3358,7 @@
       </p:sp>
       <p:sp>
         <p:nvSpPr>
-          <p:cNvPr id="284" name="Google Shape;284;g22c6355d619_0_238:notes"/>
+          <p:cNvPr id="326" name="Google Shape;326;g22c6355d619_0_238:notes"/>
           <p:cNvSpPr txBox="1"/>
           <p:nvPr>
             <p:ph idx="1" type="body"/>
@@ -3407,7 +3408,7 @@
   <p:cSld>
     <p:spTree>
       <p:nvGrpSpPr>
-        <p:cNvPr id="290" name="Shape 290"/>
+        <p:cNvPr id="332" name="Shape 332"/>
         <p:cNvGrpSpPr/>
         <p:nvPr/>
       </p:nvGrpSpPr>
@@ -3421,7 +3422,7 @@
       </p:grpSpPr>
       <p:sp>
         <p:nvSpPr>
-          <p:cNvPr id="291" name="Google Shape;291;g152a3f74d0d_0_63:notes"/>
+          <p:cNvPr id="333" name="Google Shape;333;g152a3f74d0d_0_63:notes"/>
           <p:cNvSpPr/>
           <p:nvPr>
             <p:ph idx="2" type="sldImg"/>
@@ -3456,7 +3457,7 @@
       </p:sp>
       <p:sp>
         <p:nvSpPr>
-          <p:cNvPr id="292" name="Google Shape;292;g152a3f74d0d_0_63:notes"/>
+          <p:cNvPr id="334" name="Google Shape;334;g152a3f74d0d_0_63:notes"/>
           <p:cNvSpPr txBox="1"/>
           <p:nvPr>
             <p:ph idx="1" type="body"/>
@@ -3506,7 +3507,7 @@
   <p:cSld>
     <p:spTree>
       <p:nvGrpSpPr>
-        <p:cNvPr id="298" name="Shape 298"/>
+        <p:cNvPr id="340" name="Shape 340"/>
         <p:cNvGrpSpPr/>
         <p:nvPr/>
       </p:nvGrpSpPr>
@@ -3520,7 +3521,7 @@
       </p:grpSpPr>
       <p:sp>
         <p:nvSpPr>
-          <p:cNvPr id="299" name="Google Shape;299;g22c6355d619_0_244:notes"/>
+          <p:cNvPr id="341" name="Google Shape;341;g22c6355d619_0_244:notes"/>
           <p:cNvSpPr/>
           <p:nvPr>
             <p:ph idx="2" type="sldImg"/>
@@ -3555,7 +3556,7 @@
       </p:sp>
       <p:sp>
         <p:nvSpPr>
-          <p:cNvPr id="300" name="Google Shape;300;g22c6355d619_0_244:notes"/>
+          <p:cNvPr id="342" name="Google Shape;342;g22c6355d619_0_244:notes"/>
           <p:cNvSpPr txBox="1"/>
           <p:nvPr>
             <p:ph idx="1" type="body"/>
@@ -3605,7 +3606,7 @@
   <p:cSld>
     <p:spTree>
       <p:nvGrpSpPr>
-        <p:cNvPr id="305" name="Shape 305"/>
+        <p:cNvPr id="347" name="Shape 347"/>
         <p:cNvGrpSpPr/>
         <p:nvPr/>
       </p:nvGrpSpPr>
@@ -3619,7 +3620,7 @@
       </p:grpSpPr>
       <p:sp>
         <p:nvSpPr>
-          <p:cNvPr id="306" name="Google Shape;306;g152a3f74d0d_0_28:notes"/>
+          <p:cNvPr id="348" name="Google Shape;348;g152a3f74d0d_0_28:notes"/>
           <p:cNvSpPr/>
           <p:nvPr>
             <p:ph idx="2" type="sldImg"/>
@@ -3654,7 +3655,7 @@
       </p:sp>
       <p:sp>
         <p:nvSpPr>
-          <p:cNvPr id="307" name="Google Shape;307;g152a3f74d0d_0_28:notes"/>
+          <p:cNvPr id="349" name="Google Shape;349;g152a3f74d0d_0_28:notes"/>
           <p:cNvSpPr txBox="1"/>
           <p:nvPr>
             <p:ph idx="1" type="body"/>
@@ -3704,7 +3705,7 @@
   <p:cSld>
     <p:spTree>
       <p:nvGrpSpPr>
-        <p:cNvPr id="310" name="Shape 310"/>
+        <p:cNvPr id="352" name="Shape 352"/>
         <p:cNvGrpSpPr/>
         <p:nvPr/>
       </p:nvGrpSpPr>
@@ -3718,7 +3719,7 @@
       </p:grpSpPr>
       <p:sp>
         <p:nvSpPr>
-          <p:cNvPr id="311" name="Google Shape;311;g22c6355d619_0_0:notes"/>
+          <p:cNvPr id="353" name="Google Shape;353;g22c6355d619_0_0:notes"/>
           <p:cNvSpPr/>
           <p:nvPr>
             <p:ph idx="2" type="sldImg"/>
@@ -3753,7 +3754,7 @@
       </p:sp>
       <p:sp>
         <p:nvSpPr>
-          <p:cNvPr id="312" name="Google Shape;312;g22c6355d619_0_0:notes"/>
+          <p:cNvPr id="354" name="Google Shape;354;g22c6355d619_0_0:notes"/>
           <p:cNvSpPr txBox="1"/>
           <p:nvPr>
             <p:ph idx="1" type="body"/>
@@ -3803,7 +3804,7 @@
   <p:cSld>
     <p:spTree>
       <p:nvGrpSpPr>
-        <p:cNvPr id="317" name="Shape 317"/>
+        <p:cNvPr id="359" name="Shape 359"/>
         <p:cNvGrpSpPr/>
         <p:nvPr/>
       </p:nvGrpSpPr>
@@ -3817,7 +3818,7 @@
       </p:grpSpPr>
       <p:sp>
         <p:nvSpPr>
-          <p:cNvPr id="318" name="Google Shape;318;g31390bb5a5a_0_9:notes"/>
+          <p:cNvPr id="360" name="Google Shape;360;g31390bb5a5a_0_9:notes"/>
           <p:cNvSpPr/>
           <p:nvPr>
             <p:ph idx="2" type="sldImg"/>
@@ -3852,7 +3853,7 @@
       </p:sp>
       <p:sp>
         <p:nvSpPr>
-          <p:cNvPr id="319" name="Google Shape;319;g31390bb5a5a_0_9:notes"/>
+          <p:cNvPr id="361" name="Google Shape;361;g31390bb5a5a_0_9:notes"/>
           <p:cNvSpPr txBox="1"/>
           <p:nvPr>
             <p:ph idx="1" type="body"/>
@@ -3902,7 +3903,7 @@
   <p:cSld>
     <p:spTree>
       <p:nvGrpSpPr>
-        <p:cNvPr id="324" name="Shape 324"/>
+        <p:cNvPr id="366" name="Shape 366"/>
         <p:cNvGrpSpPr/>
         <p:nvPr/>
       </p:nvGrpSpPr>
@@ -3916,7 +3917,7 @@
       </p:grpSpPr>
       <p:sp>
         <p:nvSpPr>
-          <p:cNvPr id="325" name="Google Shape;325;g31390bb5a5a_0_15:notes"/>
+          <p:cNvPr id="367" name="Google Shape;367;g31390bb5a5a_0_15:notes"/>
           <p:cNvSpPr/>
           <p:nvPr>
             <p:ph idx="2" type="sldImg"/>
@@ -3951,7 +3952,7 @@
       </p:sp>
       <p:sp>
         <p:nvSpPr>
-          <p:cNvPr id="326" name="Google Shape;326;g31390bb5a5a_0_15:notes"/>
+          <p:cNvPr id="368" name="Google Shape;368;g31390bb5a5a_0_15:notes"/>
           <p:cNvSpPr txBox="1"/>
           <p:nvPr>
             <p:ph idx="1" type="body"/>
@@ -4001,7 +4002,7 @@
   <p:cSld>
     <p:spTree>
       <p:nvGrpSpPr>
-        <p:cNvPr id="69" name="Shape 69"/>
+        <p:cNvPr id="111" name="Shape 111"/>
         <p:cNvGrpSpPr/>
         <p:nvPr/>
       </p:nvGrpSpPr>
@@ -4015,7 +4016,7 @@
       </p:grpSpPr>
       <p:sp>
         <p:nvSpPr>
-          <p:cNvPr id="70" name="Google Shape;70;g152a3f74d0d_0_34:notes"/>
+          <p:cNvPr id="112" name="Google Shape;112;g152a3f74d0d_0_34:notes"/>
           <p:cNvSpPr/>
           <p:nvPr>
             <p:ph idx="2" type="sldImg"/>
@@ -4050,7 +4051,7 @@
       </p:sp>
       <p:sp>
         <p:nvSpPr>
-          <p:cNvPr id="71" name="Google Shape;71;g152a3f74d0d_0_34:notes"/>
+          <p:cNvPr id="113" name="Google Shape;113;g152a3f74d0d_0_34:notes"/>
           <p:cNvSpPr txBox="1"/>
           <p:nvPr>
             <p:ph idx="1" type="body"/>
@@ -4100,7 +4101,7 @@
   <p:cSld>
     <p:spTree>
       <p:nvGrpSpPr>
-        <p:cNvPr id="331" name="Shape 331"/>
+        <p:cNvPr id="373" name="Shape 373"/>
         <p:cNvGrpSpPr/>
         <p:nvPr/>
       </p:nvGrpSpPr>
@@ -4114,7 +4115,7 @@
       </p:grpSpPr>
       <p:sp>
         <p:nvSpPr>
-          <p:cNvPr id="332" name="Google Shape;332;g31390bb5a5a_0_21:notes"/>
+          <p:cNvPr id="374" name="Google Shape;374;g31390bb5a5a_0_21:notes"/>
           <p:cNvSpPr/>
           <p:nvPr>
             <p:ph idx="2" type="sldImg"/>
@@ -4149,7 +4150,7 @@
       </p:sp>
       <p:sp>
         <p:nvSpPr>
-          <p:cNvPr id="333" name="Google Shape;333;g31390bb5a5a_0_21:notes"/>
+          <p:cNvPr id="375" name="Google Shape;375;g31390bb5a5a_0_21:notes"/>
           <p:cNvSpPr txBox="1"/>
           <p:nvPr>
             <p:ph idx="1" type="body"/>
@@ -4199,7 +4200,7 @@
   <p:cSld>
     <p:spTree>
       <p:nvGrpSpPr>
-        <p:cNvPr id="338" name="Shape 338"/>
+        <p:cNvPr id="380" name="Shape 380"/>
         <p:cNvGrpSpPr/>
         <p:nvPr/>
       </p:nvGrpSpPr>
@@ -4213,7 +4214,7 @@
       </p:grpSpPr>
       <p:sp>
         <p:nvSpPr>
-          <p:cNvPr id="339" name="Google Shape;339;g152a3f74d0d_0_57:notes"/>
+          <p:cNvPr id="381" name="Google Shape;381;g152a3f74d0d_0_57:notes"/>
           <p:cNvSpPr/>
           <p:nvPr>
             <p:ph idx="2" type="sldImg"/>
@@ -4248,7 +4249,7 @@
       </p:sp>
       <p:sp>
         <p:nvSpPr>
-          <p:cNvPr id="340" name="Google Shape;340;g152a3f74d0d_0_57:notes"/>
+          <p:cNvPr id="382" name="Google Shape;382;g152a3f74d0d_0_57:notes"/>
           <p:cNvSpPr txBox="1"/>
           <p:nvPr>
             <p:ph idx="1" type="body"/>
@@ -4298,7 +4299,7 @@
   <p:cSld>
     <p:spTree>
       <p:nvGrpSpPr>
-        <p:cNvPr id="345" name="Shape 345"/>
+        <p:cNvPr id="387" name="Shape 387"/>
         <p:cNvGrpSpPr/>
         <p:nvPr/>
       </p:nvGrpSpPr>
@@ -4312,7 +4313,7 @@
       </p:grpSpPr>
       <p:sp>
         <p:nvSpPr>
-          <p:cNvPr id="346" name="Google Shape;346;g22d186861df_0_1:notes"/>
+          <p:cNvPr id="388" name="Google Shape;388;g22d186861df_0_1:notes"/>
           <p:cNvSpPr/>
           <p:nvPr>
             <p:ph idx="2" type="sldImg"/>
@@ -4347,7 +4348,7 @@
       </p:sp>
       <p:sp>
         <p:nvSpPr>
-          <p:cNvPr id="347" name="Google Shape;347;g22d186861df_0_1:notes"/>
+          <p:cNvPr id="389" name="Google Shape;389;g22d186861df_0_1:notes"/>
           <p:cNvSpPr txBox="1"/>
           <p:nvPr>
             <p:ph idx="1" type="body"/>
@@ -4397,7 +4398,7 @@
   <p:cSld>
     <p:spTree>
       <p:nvGrpSpPr>
-        <p:cNvPr id="352" name="Shape 352"/>
+        <p:cNvPr id="394" name="Shape 394"/>
         <p:cNvGrpSpPr/>
         <p:nvPr/>
       </p:nvGrpSpPr>
@@ -4411,7 +4412,7 @@
       </p:grpSpPr>
       <p:sp>
         <p:nvSpPr>
-          <p:cNvPr id="353" name="Google Shape;353;g2397cb0cd5f_0_38:notes"/>
+          <p:cNvPr id="395" name="Google Shape;395;g2397cb0cd5f_0_38:notes"/>
           <p:cNvSpPr/>
           <p:nvPr>
             <p:ph idx="2" type="sldImg"/>
@@ -4446,7 +4447,7 @@
       </p:sp>
       <p:sp>
         <p:nvSpPr>
-          <p:cNvPr id="354" name="Google Shape;354;g2397cb0cd5f_0_38:notes"/>
+          <p:cNvPr id="396" name="Google Shape;396;g2397cb0cd5f_0_38:notes"/>
           <p:cNvSpPr txBox="1"/>
           <p:nvPr>
             <p:ph idx="1" type="body"/>
@@ -4496,7 +4497,7 @@
   <p:cSld>
     <p:spTree>
       <p:nvGrpSpPr>
-        <p:cNvPr id="358" name="Shape 358"/>
+        <p:cNvPr id="400" name="Shape 400"/>
         <p:cNvGrpSpPr/>
         <p:nvPr/>
       </p:nvGrpSpPr>
@@ -4510,7 +4511,7 @@
       </p:grpSpPr>
       <p:sp>
         <p:nvSpPr>
-          <p:cNvPr id="359" name="Google Shape;359;g2397cb0cd5f_0_43:notes"/>
+          <p:cNvPr id="401" name="Google Shape;401;g2397cb0cd5f_0_43:notes"/>
           <p:cNvSpPr/>
           <p:nvPr>
             <p:ph idx="2" type="sldImg"/>
@@ -4545,7 +4546,7 @@
       </p:sp>
       <p:sp>
         <p:nvSpPr>
-          <p:cNvPr id="360" name="Google Shape;360;g2397cb0cd5f_0_43:notes"/>
+          <p:cNvPr id="402" name="Google Shape;402;g2397cb0cd5f_0_43:notes"/>
           <p:cNvSpPr txBox="1"/>
           <p:nvPr>
             <p:ph idx="1" type="body"/>
@@ -4595,7 +4596,7 @@
   <p:cSld>
     <p:spTree>
       <p:nvGrpSpPr>
-        <p:cNvPr id="74" name="Shape 74"/>
+        <p:cNvPr id="116" name="Shape 116"/>
         <p:cNvGrpSpPr/>
         <p:nvPr/>
       </p:nvGrpSpPr>
@@ -4609,7 +4610,7 @@
       </p:grpSpPr>
       <p:sp>
         <p:nvSpPr>
-          <p:cNvPr id="75" name="Google Shape;75;g22c6355d619_0_10:notes"/>
+          <p:cNvPr id="117" name="Google Shape;117;g22c6355d619_0_10:notes"/>
           <p:cNvSpPr/>
           <p:nvPr>
             <p:ph idx="2" type="sldImg"/>
@@ -4644,7 +4645,7 @@
       </p:sp>
       <p:sp>
         <p:nvSpPr>
-          <p:cNvPr id="76" name="Google Shape;76;g22c6355d619_0_10:notes"/>
+          <p:cNvPr id="118" name="Google Shape;118;g22c6355d619_0_10:notes"/>
           <p:cNvSpPr txBox="1"/>
           <p:nvPr>
             <p:ph idx="1" type="body"/>
@@ -4694,7 +4695,7 @@
   <p:cSld>
     <p:spTree>
       <p:nvGrpSpPr>
-        <p:cNvPr id="81" name="Shape 81"/>
+        <p:cNvPr id="123" name="Shape 123"/>
         <p:cNvGrpSpPr/>
         <p:nvPr/>
       </p:nvGrpSpPr>
@@ -4708,7 +4709,7 @@
       </p:grpSpPr>
       <p:sp>
         <p:nvSpPr>
-          <p:cNvPr id="82" name="Google Shape;82;g22c6355d619_0_28:notes"/>
+          <p:cNvPr id="124" name="Google Shape;124;g22c6355d619_0_28:notes"/>
           <p:cNvSpPr/>
           <p:nvPr>
             <p:ph idx="2" type="sldImg"/>
@@ -4743,7 +4744,7 @@
       </p:sp>
       <p:sp>
         <p:nvSpPr>
-          <p:cNvPr id="83" name="Google Shape;83;g22c6355d619_0_28:notes"/>
+          <p:cNvPr id="125" name="Google Shape;125;g22c6355d619_0_28:notes"/>
           <p:cNvSpPr txBox="1"/>
           <p:nvPr>
             <p:ph idx="1" type="body"/>
@@ -4793,7 +4794,7 @@
   <p:cSld>
     <p:spTree>
       <p:nvGrpSpPr>
-        <p:cNvPr id="88" name="Shape 88"/>
+        <p:cNvPr id="130" name="Shape 130"/>
         <p:cNvGrpSpPr/>
         <p:nvPr/>
       </p:nvGrpSpPr>
@@ -4807,7 +4808,7 @@
       </p:grpSpPr>
       <p:sp>
         <p:nvSpPr>
-          <p:cNvPr id="89" name="Google Shape;89;g22c6355d619_0_34:notes"/>
+          <p:cNvPr id="131" name="Google Shape;131;g22c6355d619_0_34:notes"/>
           <p:cNvSpPr/>
           <p:nvPr>
             <p:ph idx="2" type="sldImg"/>
@@ -4842,7 +4843,7 @@
       </p:sp>
       <p:sp>
         <p:nvSpPr>
-          <p:cNvPr id="90" name="Google Shape;90;g22c6355d619_0_34:notes"/>
+          <p:cNvPr id="132" name="Google Shape;132;g22c6355d619_0_34:notes"/>
           <p:cNvSpPr txBox="1"/>
           <p:nvPr>
             <p:ph idx="1" type="body"/>
@@ -4892,7 +4893,7 @@
   <p:cSld>
     <p:spTree>
       <p:nvGrpSpPr>
-        <p:cNvPr id="95" name="Shape 95"/>
+        <p:cNvPr id="137" name="Shape 137"/>
         <p:cNvGrpSpPr/>
         <p:nvPr/>
       </p:nvGrpSpPr>
@@ -4906,7 +4907,7 @@
       </p:grpSpPr>
       <p:sp>
         <p:nvSpPr>
-          <p:cNvPr id="96" name="Google Shape;96;g22c6355d619_0_40:notes"/>
+          <p:cNvPr id="138" name="Google Shape;138;g22c6355d619_0_40:notes"/>
           <p:cNvSpPr/>
           <p:nvPr>
             <p:ph idx="2" type="sldImg"/>
@@ -4941,7 +4942,7 @@
       </p:sp>
       <p:sp>
         <p:nvSpPr>
-          <p:cNvPr id="97" name="Google Shape;97;g22c6355d619_0_40:notes"/>
+          <p:cNvPr id="139" name="Google Shape;139;g22c6355d619_0_40:notes"/>
           <p:cNvSpPr txBox="1"/>
           <p:nvPr>
             <p:ph idx="1" type="body"/>
@@ -4991,7 +4992,7 @@
   <p:cSld>
     <p:spTree>
       <p:nvGrpSpPr>
-        <p:cNvPr id="102" name="Shape 102"/>
+        <p:cNvPr id="144" name="Shape 144"/>
         <p:cNvGrpSpPr/>
         <p:nvPr/>
       </p:nvGrpSpPr>
@@ -5005,7 +5006,7 @@
       </p:grpSpPr>
       <p:sp>
         <p:nvSpPr>
-          <p:cNvPr id="103" name="Google Shape;103;g22c6355d619_0_6:notes"/>
+          <p:cNvPr id="145" name="Google Shape;145;g22c6355d619_0_6:notes"/>
           <p:cNvSpPr/>
           <p:nvPr>
             <p:ph idx="2" type="sldImg"/>
@@ -5040,7 +5041,7 @@
       </p:sp>
       <p:sp>
         <p:nvSpPr>
-          <p:cNvPr id="104" name="Google Shape;104;g22c6355d619_0_6:notes"/>
+          <p:cNvPr id="146" name="Google Shape;146;g22c6355d619_0_6:notes"/>
           <p:cNvSpPr txBox="1"/>
           <p:nvPr>
             <p:ph idx="1" type="body"/>
@@ -5531,6 +5532,1169 @@
           </p:txBody>
         </p:sp>
       </p:grpSp>
+    </p:spTree>
+  </p:cSld>
+  <p:clrMapOvr>
+    <a:masterClrMapping/>
+  </p:clrMapOvr>
+</p:sldLayout>
+</file>
+
+<file path=ppt/slideLayouts/slideLayout10.xml><?xml version="1.0" encoding="utf-8"?>
+<p:sldLayout xmlns:a="http://schemas.openxmlformats.org/drawingml/2006/main" xmlns:r="http://schemas.openxmlformats.org/officeDocument/2006/relationships" xmlns:mc="http://schemas.openxmlformats.org/markup-compatibility/2006" xmlns:mv="urn:schemas-microsoft-com:mac:vml" xmlns:p="http://schemas.openxmlformats.org/presentationml/2006/main" xmlns:c="http://schemas.openxmlformats.org/drawingml/2006/chart" xmlns:dgm="http://schemas.openxmlformats.org/drawingml/2006/diagram" xmlns:o="urn:schemas-microsoft-com:office:office" xmlns:v="urn:schemas-microsoft-com:vml" xmlns:pvml="urn:schemas-microsoft-com:office:powerpoint" xmlns:com="http://schemas.openxmlformats.org/drawingml/2006/compatibility" xmlns:p14="http://schemas.microsoft.com/office/powerpoint/2010/main" xmlns:p15="http://schemas.microsoft.com/office/powerpoint/2012/main" xmlns:ahyp="http://schemas.microsoft.com/office/drawing/2018/hyperlinkcolor" matchingName="Title and two columns" type="twoColTx">
+  <p:cSld name="TITLE_AND_TWO_COLUMNS">
+    <p:spTree>
+      <p:nvGrpSpPr>
+        <p:cNvPr id="72" name="Shape 72"/>
+        <p:cNvGrpSpPr/>
+        <p:nvPr/>
+      </p:nvGrpSpPr>
+      <p:grpSpPr>
+        <a:xfrm>
+          <a:off x="0" y="0"/>
+          <a:ext cx="0" cy="0"/>
+          <a:chOff x="0" y="0"/>
+          <a:chExt cx="0" cy="0"/>
+        </a:xfrm>
+      </p:grpSpPr>
+      <p:sp>
+        <p:nvSpPr>
+          <p:cNvPr id="73" name="Google Shape;73;p12"/>
+          <p:cNvSpPr txBox="1"/>
+          <p:nvPr>
+            <p:ph type="title"/>
+          </p:nvPr>
+        </p:nvSpPr>
+        <p:spPr>
+          <a:xfrm>
+            <a:off x="0" y="0"/>
+            <a:ext cx="9144000" cy="685800"/>
+          </a:xfrm>
+          <a:prstGeom prst="rect">
+            <a:avLst/>
+          </a:prstGeom>
+          <a:ln>
+            <a:noFill/>
+          </a:ln>
+        </p:spPr>
+        <p:txBody>
+          <a:bodyPr anchorCtr="0" anchor="ctr" bIns="0" lIns="274300" spcFirstLastPara="1" rIns="0" wrap="square" tIns="0">
+            <a:noAutofit/>
+          </a:bodyPr>
+          <a:lstStyle>
+            <a:lvl1pPr lvl="0">
+              <a:spcBef>
+                <a:spcPts val="0"/>
+              </a:spcBef>
+              <a:spcAft>
+                <a:spcPts val="0"/>
+              </a:spcAft>
+              <a:buSzPts val="2400"/>
+              <a:buNone/>
+              <a:defRPr/>
+            </a:lvl1pPr>
+            <a:lvl2pPr lvl="1">
+              <a:spcBef>
+                <a:spcPts val="0"/>
+              </a:spcBef>
+              <a:spcAft>
+                <a:spcPts val="0"/>
+              </a:spcAft>
+              <a:buSzPts val="2800"/>
+              <a:buNone/>
+              <a:defRPr/>
+            </a:lvl2pPr>
+            <a:lvl3pPr lvl="2">
+              <a:spcBef>
+                <a:spcPts val="0"/>
+              </a:spcBef>
+              <a:spcAft>
+                <a:spcPts val="0"/>
+              </a:spcAft>
+              <a:buSzPts val="2800"/>
+              <a:buNone/>
+              <a:defRPr/>
+            </a:lvl3pPr>
+            <a:lvl4pPr lvl="3">
+              <a:spcBef>
+                <a:spcPts val="0"/>
+              </a:spcBef>
+              <a:spcAft>
+                <a:spcPts val="0"/>
+              </a:spcAft>
+              <a:buSzPts val="2800"/>
+              <a:buNone/>
+              <a:defRPr/>
+            </a:lvl4pPr>
+            <a:lvl5pPr lvl="4">
+              <a:spcBef>
+                <a:spcPts val="0"/>
+              </a:spcBef>
+              <a:spcAft>
+                <a:spcPts val="0"/>
+              </a:spcAft>
+              <a:buSzPts val="2800"/>
+              <a:buNone/>
+              <a:defRPr/>
+            </a:lvl5pPr>
+            <a:lvl6pPr lvl="5">
+              <a:spcBef>
+                <a:spcPts val="0"/>
+              </a:spcBef>
+              <a:spcAft>
+                <a:spcPts val="0"/>
+              </a:spcAft>
+              <a:buSzPts val="2800"/>
+              <a:buNone/>
+              <a:defRPr/>
+            </a:lvl6pPr>
+            <a:lvl7pPr lvl="6">
+              <a:spcBef>
+                <a:spcPts val="0"/>
+              </a:spcBef>
+              <a:spcAft>
+                <a:spcPts val="0"/>
+              </a:spcAft>
+              <a:buSzPts val="2800"/>
+              <a:buNone/>
+              <a:defRPr/>
+            </a:lvl7pPr>
+            <a:lvl8pPr lvl="7">
+              <a:spcBef>
+                <a:spcPts val="0"/>
+              </a:spcBef>
+              <a:spcAft>
+                <a:spcPts val="0"/>
+              </a:spcAft>
+              <a:buSzPts val="2800"/>
+              <a:buNone/>
+              <a:defRPr/>
+            </a:lvl8pPr>
+            <a:lvl9pPr lvl="8">
+              <a:spcBef>
+                <a:spcPts val="0"/>
+              </a:spcBef>
+              <a:spcAft>
+                <a:spcPts val="0"/>
+              </a:spcAft>
+              <a:buSzPts val="2800"/>
+              <a:buNone/>
+              <a:defRPr/>
+            </a:lvl9pPr>
+          </a:lstStyle>
+          <a:p/>
+        </p:txBody>
+      </p:sp>
+      <p:sp>
+        <p:nvSpPr>
+          <p:cNvPr id="74" name="Google Shape;74;p12"/>
+          <p:cNvSpPr txBox="1"/>
+          <p:nvPr>
+            <p:ph idx="1" type="body"/>
+          </p:nvPr>
+        </p:nvSpPr>
+        <p:spPr>
+          <a:xfrm>
+            <a:off x="274320" y="914400"/>
+            <a:ext cx="4114800" cy="4114800"/>
+          </a:xfrm>
+          <a:prstGeom prst="rect">
+            <a:avLst/>
+          </a:prstGeom>
+        </p:spPr>
+        <p:txBody>
+          <a:bodyPr anchorCtr="0" anchor="t" bIns="91425" lIns="0" spcFirstLastPara="1" rIns="91425" wrap="square" tIns="0">
+            <a:noAutofit/>
+          </a:bodyPr>
+          <a:lstStyle>
+            <a:lvl1pPr indent="-342900" lvl="0" marL="457200">
+              <a:spcBef>
+                <a:spcPts val="0"/>
+              </a:spcBef>
+              <a:spcAft>
+                <a:spcPts val="0"/>
+              </a:spcAft>
+              <a:buSzPts val="1800"/>
+              <a:buChar char="●"/>
+              <a:defRPr/>
+            </a:lvl1pPr>
+            <a:lvl2pPr indent="-317500" lvl="1" marL="914400">
+              <a:spcBef>
+                <a:spcPts val="0"/>
+              </a:spcBef>
+              <a:spcAft>
+                <a:spcPts val="0"/>
+              </a:spcAft>
+              <a:buSzPts val="1400"/>
+              <a:buChar char="○"/>
+              <a:defRPr/>
+            </a:lvl2pPr>
+            <a:lvl3pPr indent="-317500" lvl="2" marL="1371600">
+              <a:spcBef>
+                <a:spcPts val="0"/>
+              </a:spcBef>
+              <a:spcAft>
+                <a:spcPts val="0"/>
+              </a:spcAft>
+              <a:buSzPts val="1400"/>
+              <a:buChar char="■"/>
+              <a:defRPr/>
+            </a:lvl3pPr>
+            <a:lvl4pPr indent="-317500" lvl="3" marL="1828800">
+              <a:spcBef>
+                <a:spcPts val="0"/>
+              </a:spcBef>
+              <a:spcAft>
+                <a:spcPts val="0"/>
+              </a:spcAft>
+              <a:buSzPts val="1400"/>
+              <a:buChar char="●"/>
+              <a:defRPr/>
+            </a:lvl4pPr>
+            <a:lvl5pPr indent="-317500" lvl="4" marL="2286000">
+              <a:spcBef>
+                <a:spcPts val="0"/>
+              </a:spcBef>
+              <a:spcAft>
+                <a:spcPts val="0"/>
+              </a:spcAft>
+              <a:buSzPts val="1400"/>
+              <a:buChar char="○"/>
+              <a:defRPr/>
+            </a:lvl5pPr>
+            <a:lvl6pPr indent="-317500" lvl="5" marL="2743200">
+              <a:spcBef>
+                <a:spcPts val="0"/>
+              </a:spcBef>
+              <a:spcAft>
+                <a:spcPts val="0"/>
+              </a:spcAft>
+              <a:buSzPts val="1400"/>
+              <a:buChar char="■"/>
+              <a:defRPr/>
+            </a:lvl6pPr>
+            <a:lvl7pPr indent="-317500" lvl="6" marL="3200400">
+              <a:spcBef>
+                <a:spcPts val="0"/>
+              </a:spcBef>
+              <a:spcAft>
+                <a:spcPts val="0"/>
+              </a:spcAft>
+              <a:buSzPts val="1400"/>
+              <a:buChar char="●"/>
+              <a:defRPr/>
+            </a:lvl7pPr>
+            <a:lvl8pPr indent="-317500" lvl="7" marL="3657600">
+              <a:spcBef>
+                <a:spcPts val="0"/>
+              </a:spcBef>
+              <a:spcAft>
+                <a:spcPts val="0"/>
+              </a:spcAft>
+              <a:buSzPts val="1400"/>
+              <a:buChar char="○"/>
+              <a:defRPr/>
+            </a:lvl8pPr>
+            <a:lvl9pPr indent="-317500" lvl="8" marL="4114800">
+              <a:spcBef>
+                <a:spcPts val="0"/>
+              </a:spcBef>
+              <a:spcAft>
+                <a:spcPts val="0"/>
+              </a:spcAft>
+              <a:buSzPts val="1400"/>
+              <a:buChar char="■"/>
+              <a:defRPr/>
+            </a:lvl9pPr>
+          </a:lstStyle>
+          <a:p/>
+        </p:txBody>
+      </p:sp>
+      <p:sp>
+        <p:nvSpPr>
+          <p:cNvPr id="75" name="Google Shape;75;p12"/>
+          <p:cNvSpPr txBox="1"/>
+          <p:nvPr>
+            <p:ph idx="2" type="body"/>
+          </p:nvPr>
+        </p:nvSpPr>
+        <p:spPr>
+          <a:xfrm>
+            <a:off x="4846320" y="914400"/>
+            <a:ext cx="4114800" cy="4114800"/>
+          </a:xfrm>
+          <a:prstGeom prst="rect">
+            <a:avLst/>
+          </a:prstGeom>
+        </p:spPr>
+        <p:txBody>
+          <a:bodyPr anchorCtr="0" anchor="t" bIns="0" lIns="0" spcFirstLastPara="1" rIns="0" wrap="square" tIns="0">
+            <a:noAutofit/>
+          </a:bodyPr>
+          <a:lstStyle>
+            <a:lvl1pPr indent="-342900" lvl="0" marL="457200">
+              <a:spcBef>
+                <a:spcPts val="0"/>
+              </a:spcBef>
+              <a:spcAft>
+                <a:spcPts val="0"/>
+              </a:spcAft>
+              <a:buSzPts val="1800"/>
+              <a:buChar char="●"/>
+              <a:defRPr/>
+            </a:lvl1pPr>
+            <a:lvl2pPr indent="-317500" lvl="1" marL="914400">
+              <a:spcBef>
+                <a:spcPts val="0"/>
+              </a:spcBef>
+              <a:spcAft>
+                <a:spcPts val="0"/>
+              </a:spcAft>
+              <a:buSzPts val="1400"/>
+              <a:buChar char="○"/>
+              <a:defRPr/>
+            </a:lvl2pPr>
+            <a:lvl3pPr indent="-317500" lvl="2" marL="1371600">
+              <a:spcBef>
+                <a:spcPts val="0"/>
+              </a:spcBef>
+              <a:spcAft>
+                <a:spcPts val="0"/>
+              </a:spcAft>
+              <a:buSzPts val="1400"/>
+              <a:buChar char="■"/>
+              <a:defRPr/>
+            </a:lvl3pPr>
+            <a:lvl4pPr indent="-317500" lvl="3" marL="1828800">
+              <a:spcBef>
+                <a:spcPts val="0"/>
+              </a:spcBef>
+              <a:spcAft>
+                <a:spcPts val="0"/>
+              </a:spcAft>
+              <a:buSzPts val="1400"/>
+              <a:buChar char="●"/>
+              <a:defRPr/>
+            </a:lvl4pPr>
+            <a:lvl5pPr indent="-317500" lvl="4" marL="2286000">
+              <a:spcBef>
+                <a:spcPts val="0"/>
+              </a:spcBef>
+              <a:spcAft>
+                <a:spcPts val="0"/>
+              </a:spcAft>
+              <a:buSzPts val="1400"/>
+              <a:buChar char="○"/>
+              <a:defRPr/>
+            </a:lvl5pPr>
+            <a:lvl6pPr indent="-317500" lvl="5" marL="2743200">
+              <a:spcBef>
+                <a:spcPts val="0"/>
+              </a:spcBef>
+              <a:spcAft>
+                <a:spcPts val="0"/>
+              </a:spcAft>
+              <a:buSzPts val="1400"/>
+              <a:buChar char="■"/>
+              <a:defRPr/>
+            </a:lvl6pPr>
+            <a:lvl7pPr indent="-317500" lvl="6" marL="3200400">
+              <a:spcBef>
+                <a:spcPts val="0"/>
+              </a:spcBef>
+              <a:spcAft>
+                <a:spcPts val="0"/>
+              </a:spcAft>
+              <a:buSzPts val="1400"/>
+              <a:buChar char="●"/>
+              <a:defRPr/>
+            </a:lvl7pPr>
+            <a:lvl8pPr indent="-317500" lvl="7" marL="3657600">
+              <a:spcBef>
+                <a:spcPts val="0"/>
+              </a:spcBef>
+              <a:spcAft>
+                <a:spcPts val="0"/>
+              </a:spcAft>
+              <a:buSzPts val="1400"/>
+              <a:buChar char="○"/>
+              <a:defRPr/>
+            </a:lvl8pPr>
+            <a:lvl9pPr indent="-317500" lvl="8" marL="4114800">
+              <a:spcBef>
+                <a:spcPts val="0"/>
+              </a:spcBef>
+              <a:spcAft>
+                <a:spcPts val="0"/>
+              </a:spcAft>
+              <a:buSzPts val="1400"/>
+              <a:buChar char="■"/>
+              <a:defRPr/>
+            </a:lvl9pPr>
+          </a:lstStyle>
+          <a:p/>
+        </p:txBody>
+      </p:sp>
+      <p:sp>
+        <p:nvSpPr>
+          <p:cNvPr id="76" name="Google Shape;76;p12"/>
+          <p:cNvSpPr txBox="1"/>
+          <p:nvPr>
+            <p:ph idx="12" type="sldNum"/>
+          </p:nvPr>
+        </p:nvSpPr>
+        <p:spPr>
+          <a:xfrm>
+            <a:off x="7315202" y="4416550"/>
+            <a:ext cx="1828800" cy="731400"/>
+          </a:xfrm>
+          <a:prstGeom prst="rect">
+            <a:avLst/>
+          </a:prstGeom>
+        </p:spPr>
+        <p:txBody>
+          <a:bodyPr anchorCtr="0" anchor="b" bIns="91425" lIns="91425" spcFirstLastPara="1" rIns="91425" wrap="square" tIns="91425">
+            <a:noAutofit/>
+          </a:bodyPr>
+          <a:lstStyle>
+            <a:lvl1pPr lvl="0">
+              <a:buNone/>
+              <a:defRPr>
+                <a:solidFill>
+                  <a:schemeClr val="dk1"/>
+                </a:solidFill>
+              </a:defRPr>
+            </a:lvl1pPr>
+            <a:lvl2pPr lvl="1">
+              <a:buNone/>
+              <a:defRPr>
+                <a:solidFill>
+                  <a:schemeClr val="dk1"/>
+                </a:solidFill>
+              </a:defRPr>
+            </a:lvl2pPr>
+            <a:lvl3pPr lvl="2">
+              <a:buNone/>
+              <a:defRPr>
+                <a:solidFill>
+                  <a:schemeClr val="dk1"/>
+                </a:solidFill>
+              </a:defRPr>
+            </a:lvl3pPr>
+            <a:lvl4pPr lvl="3">
+              <a:buNone/>
+              <a:defRPr>
+                <a:solidFill>
+                  <a:schemeClr val="dk1"/>
+                </a:solidFill>
+              </a:defRPr>
+            </a:lvl4pPr>
+            <a:lvl5pPr lvl="4">
+              <a:buNone/>
+              <a:defRPr>
+                <a:solidFill>
+                  <a:schemeClr val="dk1"/>
+                </a:solidFill>
+              </a:defRPr>
+            </a:lvl5pPr>
+            <a:lvl6pPr lvl="5">
+              <a:buNone/>
+              <a:defRPr>
+                <a:solidFill>
+                  <a:schemeClr val="dk1"/>
+                </a:solidFill>
+              </a:defRPr>
+            </a:lvl6pPr>
+            <a:lvl7pPr lvl="6">
+              <a:buNone/>
+              <a:defRPr>
+                <a:solidFill>
+                  <a:schemeClr val="dk1"/>
+                </a:solidFill>
+              </a:defRPr>
+            </a:lvl7pPr>
+            <a:lvl8pPr lvl="7">
+              <a:buNone/>
+              <a:defRPr>
+                <a:solidFill>
+                  <a:schemeClr val="dk1"/>
+                </a:solidFill>
+              </a:defRPr>
+            </a:lvl8pPr>
+            <a:lvl9pPr lvl="8">
+              <a:buNone/>
+              <a:defRPr>
+                <a:solidFill>
+                  <a:schemeClr val="dk1"/>
+                </a:solidFill>
+              </a:defRPr>
+            </a:lvl9pPr>
+          </a:lstStyle>
+          <a:p>
+            <a:pPr indent="0" lvl="0" marL="0" rtl="0" algn="r">
+              <a:spcBef>
+                <a:spcPts val="0"/>
+              </a:spcBef>
+              <a:spcAft>
+                <a:spcPts val="0"/>
+              </a:spcAft>
+              <a:buNone/>
+            </a:pPr>
+            <a:fld id="{00000000-1234-1234-1234-123412341234}" type="slidenum">
+              <a:rPr lang="en"/>
+              <a:t>‹#›</a:t>
+            </a:fld>
+            <a:endParaRPr/>
+          </a:p>
+          <a:p>
+            <a:pPr indent="0" lvl="0" marL="0" rtl="0" algn="r">
+              <a:spcBef>
+                <a:spcPts val="0"/>
+              </a:spcBef>
+              <a:spcAft>
+                <a:spcPts val="0"/>
+              </a:spcAft>
+              <a:buClr>
+                <a:schemeClr val="dk1"/>
+              </a:buClr>
+              <a:buSzPts val="1100"/>
+              <a:buFont typeface="Arial"/>
+              <a:buNone/>
+            </a:pPr>
+            <a:r>
+              <a:rPr b="0" lang="en" sz="900" u="sng">
+                <a:solidFill>
+                  <a:schemeClr val="hlink"/>
+                </a:solidFill>
+                <a:hlinkClick r:id="rId2"/>
+              </a:rPr>
+              <a:t>https://uni1.de/amos</a:t>
+            </a:r>
+            <a:r>
+              <a:rPr b="0" lang="en" sz="900">
+                <a:solidFill>
+                  <a:schemeClr val="dk2"/>
+                </a:solidFill>
+              </a:rPr>
+              <a:t> </a:t>
+            </a:r>
+            <a:endParaRPr b="0" sz="900">
+              <a:solidFill>
+                <a:schemeClr val="dk2"/>
+              </a:solidFill>
+            </a:endParaRPr>
+          </a:p>
+        </p:txBody>
+      </p:sp>
+      <p:grpSp>
+        <p:nvGrpSpPr>
+          <p:cNvPr id="77" name="Google Shape;77;p12"/>
+          <p:cNvGrpSpPr/>
+          <p:nvPr/>
+        </p:nvGrpSpPr>
+        <p:grpSpPr>
+          <a:xfrm>
+            <a:off x="0" y="685800"/>
+            <a:ext cx="9144000" cy="91500"/>
+            <a:chOff x="0" y="2386584"/>
+            <a:chExt cx="9144000" cy="91500"/>
+          </a:xfrm>
+        </p:grpSpPr>
+        <p:sp>
+          <p:nvSpPr>
+            <p:cNvPr id="78" name="Google Shape;78;p12"/>
+            <p:cNvSpPr/>
+            <p:nvPr/>
+          </p:nvSpPr>
+          <p:spPr>
+            <a:xfrm>
+              <a:off x="0" y="2386584"/>
+              <a:ext cx="914400" cy="91500"/>
+            </a:xfrm>
+            <a:prstGeom prst="rect">
+              <a:avLst/>
+            </a:prstGeom>
+            <a:solidFill>
+              <a:schemeClr val="accent2"/>
+            </a:solidFill>
+            <a:ln>
+              <a:noFill/>
+            </a:ln>
+          </p:spPr>
+          <p:txBody>
+            <a:bodyPr anchorCtr="0" anchor="ctr" bIns="91425" lIns="91425" spcFirstLastPara="1" rIns="91425" wrap="square" tIns="91425">
+              <a:noAutofit/>
+            </a:bodyPr>
+            <a:lstStyle/>
+            <a:p>
+              <a:pPr indent="0" lvl="0" marL="0" rtl="0" algn="l">
+                <a:spcBef>
+                  <a:spcPts val="0"/>
+                </a:spcBef>
+                <a:spcAft>
+                  <a:spcPts val="0"/>
+                </a:spcAft>
+                <a:buNone/>
+              </a:pPr>
+              <a:r>
+                <a:t/>
+              </a:r>
+              <a:endParaRPr/>
+            </a:p>
+          </p:txBody>
+        </p:sp>
+        <p:sp>
+          <p:nvSpPr>
+            <p:cNvPr id="79" name="Google Shape;79;p12"/>
+            <p:cNvSpPr/>
+            <p:nvPr/>
+          </p:nvSpPr>
+          <p:spPr>
+            <a:xfrm>
+              <a:off x="914400" y="2386584"/>
+              <a:ext cx="1828800" cy="91500"/>
+            </a:xfrm>
+            <a:prstGeom prst="rect">
+              <a:avLst/>
+            </a:prstGeom>
+            <a:solidFill>
+              <a:schemeClr val="accent3"/>
+            </a:solidFill>
+            <a:ln>
+              <a:noFill/>
+            </a:ln>
+          </p:spPr>
+          <p:txBody>
+            <a:bodyPr anchorCtr="0" anchor="ctr" bIns="91425" lIns="91425" spcFirstLastPara="1" rIns="91425" wrap="square" tIns="91425">
+              <a:noAutofit/>
+            </a:bodyPr>
+            <a:lstStyle/>
+            <a:p>
+              <a:pPr indent="0" lvl="0" marL="0" rtl="0" algn="l">
+                <a:spcBef>
+                  <a:spcPts val="0"/>
+                </a:spcBef>
+                <a:spcAft>
+                  <a:spcPts val="0"/>
+                </a:spcAft>
+                <a:buNone/>
+              </a:pPr>
+              <a:r>
+                <a:t/>
+              </a:r>
+              <a:endParaRPr/>
+            </a:p>
+          </p:txBody>
+        </p:sp>
+        <p:sp>
+          <p:nvSpPr>
+            <p:cNvPr id="80" name="Google Shape;80;p12"/>
+            <p:cNvSpPr/>
+            <p:nvPr/>
+          </p:nvSpPr>
+          <p:spPr>
+            <a:xfrm>
+              <a:off x="2743200" y="2386584"/>
+              <a:ext cx="6400800" cy="91500"/>
+            </a:xfrm>
+            <a:prstGeom prst="rect">
+              <a:avLst/>
+            </a:prstGeom>
+            <a:solidFill>
+              <a:schemeClr val="accent4"/>
+            </a:solidFill>
+            <a:ln>
+              <a:noFill/>
+            </a:ln>
+          </p:spPr>
+          <p:txBody>
+            <a:bodyPr anchorCtr="0" anchor="ctr" bIns="91425" lIns="91425" spcFirstLastPara="1" rIns="91425" wrap="square" tIns="91425">
+              <a:noAutofit/>
+            </a:bodyPr>
+            <a:lstStyle/>
+            <a:p>
+              <a:pPr indent="0" lvl="0" marL="0" rtl="0" algn="l">
+                <a:spcBef>
+                  <a:spcPts val="0"/>
+                </a:spcBef>
+                <a:spcAft>
+                  <a:spcPts val="0"/>
+                </a:spcAft>
+                <a:buNone/>
+              </a:pPr>
+              <a:r>
+                <a:t/>
+              </a:r>
+              <a:endParaRPr/>
+            </a:p>
+          </p:txBody>
+        </p:sp>
+      </p:grpSp>
+    </p:spTree>
+  </p:cSld>
+  <p:clrMapOvr>
+    <a:masterClrMapping/>
+  </p:clrMapOvr>
+</p:sldLayout>
+</file>
+
+<file path=ppt/slideLayouts/slideLayout11.xml><?xml version="1.0" encoding="utf-8"?>
+<p:sldLayout xmlns:a="http://schemas.openxmlformats.org/drawingml/2006/main" xmlns:r="http://schemas.openxmlformats.org/officeDocument/2006/relationships" xmlns:mc="http://schemas.openxmlformats.org/markup-compatibility/2006" xmlns:mv="urn:schemas-microsoft-com:mac:vml" xmlns:p="http://schemas.openxmlformats.org/presentationml/2006/main" xmlns:c="http://schemas.openxmlformats.org/drawingml/2006/chart" xmlns:dgm="http://schemas.openxmlformats.org/drawingml/2006/diagram" xmlns:o="urn:schemas-microsoft-com:office:office" xmlns:v="urn:schemas-microsoft-com:vml" xmlns:pvml="urn:schemas-microsoft-com:office:powerpoint" xmlns:com="http://schemas.openxmlformats.org/drawingml/2006/compatibility" xmlns:p14="http://schemas.microsoft.com/office/powerpoint/2010/main" xmlns:p15="http://schemas.microsoft.com/office/powerpoint/2012/main" xmlns:ahyp="http://schemas.microsoft.com/office/drawing/2018/hyperlinkcolor" matchingName="Title only" type="titleOnly">
+  <p:cSld name="TITLE_ONLY">
+    <p:spTree>
+      <p:nvGrpSpPr>
+        <p:cNvPr id="81" name="Shape 81"/>
+        <p:cNvGrpSpPr/>
+        <p:nvPr/>
+      </p:nvGrpSpPr>
+      <p:grpSpPr>
+        <a:xfrm>
+          <a:off x="0" y="0"/>
+          <a:ext cx="0" cy="0"/>
+          <a:chOff x="0" y="0"/>
+          <a:chExt cx="0" cy="0"/>
+        </a:xfrm>
+      </p:grpSpPr>
+      <p:sp>
+        <p:nvSpPr>
+          <p:cNvPr id="82" name="Google Shape;82;p13"/>
+          <p:cNvSpPr txBox="1"/>
+          <p:nvPr>
+            <p:ph type="title"/>
+          </p:nvPr>
+        </p:nvSpPr>
+        <p:spPr>
+          <a:xfrm>
+            <a:off x="0" y="0"/>
+            <a:ext cx="9144000" cy="685800"/>
+          </a:xfrm>
+          <a:prstGeom prst="rect">
+            <a:avLst/>
+          </a:prstGeom>
+        </p:spPr>
+        <p:txBody>
+          <a:bodyPr anchorCtr="0" anchor="ctr" bIns="0" lIns="274300" spcFirstLastPara="1" rIns="0" wrap="square" tIns="0">
+            <a:noAutofit/>
+          </a:bodyPr>
+          <a:lstStyle>
+            <a:lvl1pPr lvl="0">
+              <a:spcBef>
+                <a:spcPts val="0"/>
+              </a:spcBef>
+              <a:spcAft>
+                <a:spcPts val="0"/>
+              </a:spcAft>
+              <a:buSzPts val="2400"/>
+              <a:buNone/>
+              <a:defRPr/>
+            </a:lvl1pPr>
+            <a:lvl2pPr lvl="1">
+              <a:spcBef>
+                <a:spcPts val="0"/>
+              </a:spcBef>
+              <a:spcAft>
+                <a:spcPts val="0"/>
+              </a:spcAft>
+              <a:buSzPts val="2800"/>
+              <a:buNone/>
+              <a:defRPr/>
+            </a:lvl2pPr>
+            <a:lvl3pPr lvl="2">
+              <a:spcBef>
+                <a:spcPts val="0"/>
+              </a:spcBef>
+              <a:spcAft>
+                <a:spcPts val="0"/>
+              </a:spcAft>
+              <a:buSzPts val="2800"/>
+              <a:buNone/>
+              <a:defRPr/>
+            </a:lvl3pPr>
+            <a:lvl4pPr lvl="3">
+              <a:spcBef>
+                <a:spcPts val="0"/>
+              </a:spcBef>
+              <a:spcAft>
+                <a:spcPts val="0"/>
+              </a:spcAft>
+              <a:buSzPts val="2800"/>
+              <a:buNone/>
+              <a:defRPr/>
+            </a:lvl4pPr>
+            <a:lvl5pPr lvl="4">
+              <a:spcBef>
+                <a:spcPts val="0"/>
+              </a:spcBef>
+              <a:spcAft>
+                <a:spcPts val="0"/>
+              </a:spcAft>
+              <a:buSzPts val="2800"/>
+              <a:buNone/>
+              <a:defRPr/>
+            </a:lvl5pPr>
+            <a:lvl6pPr lvl="5">
+              <a:spcBef>
+                <a:spcPts val="0"/>
+              </a:spcBef>
+              <a:spcAft>
+                <a:spcPts val="0"/>
+              </a:spcAft>
+              <a:buSzPts val="2800"/>
+              <a:buNone/>
+              <a:defRPr/>
+            </a:lvl6pPr>
+            <a:lvl7pPr lvl="6">
+              <a:spcBef>
+                <a:spcPts val="0"/>
+              </a:spcBef>
+              <a:spcAft>
+                <a:spcPts val="0"/>
+              </a:spcAft>
+              <a:buSzPts val="2800"/>
+              <a:buNone/>
+              <a:defRPr/>
+            </a:lvl7pPr>
+            <a:lvl8pPr lvl="7">
+              <a:spcBef>
+                <a:spcPts val="0"/>
+              </a:spcBef>
+              <a:spcAft>
+                <a:spcPts val="0"/>
+              </a:spcAft>
+              <a:buSzPts val="2800"/>
+              <a:buNone/>
+              <a:defRPr/>
+            </a:lvl8pPr>
+            <a:lvl9pPr lvl="8">
+              <a:spcBef>
+                <a:spcPts val="0"/>
+              </a:spcBef>
+              <a:spcAft>
+                <a:spcPts val="0"/>
+              </a:spcAft>
+              <a:buSzPts val="2800"/>
+              <a:buNone/>
+              <a:defRPr/>
+            </a:lvl9pPr>
+          </a:lstStyle>
+          <a:p/>
+        </p:txBody>
+      </p:sp>
+      <p:sp>
+        <p:nvSpPr>
+          <p:cNvPr id="83" name="Google Shape;83;p13"/>
+          <p:cNvSpPr txBox="1"/>
+          <p:nvPr>
+            <p:ph idx="12" type="sldNum"/>
+          </p:nvPr>
+        </p:nvSpPr>
+        <p:spPr>
+          <a:xfrm>
+            <a:off x="7315202" y="4416550"/>
+            <a:ext cx="1828800" cy="731400"/>
+          </a:xfrm>
+          <a:prstGeom prst="rect">
+            <a:avLst/>
+          </a:prstGeom>
+        </p:spPr>
+        <p:txBody>
+          <a:bodyPr anchorCtr="0" anchor="b" bIns="91425" lIns="91425" spcFirstLastPara="1" rIns="91425" wrap="square" tIns="91425">
+            <a:noAutofit/>
+          </a:bodyPr>
+          <a:lstStyle>
+            <a:lvl1pPr lvl="0" rtl="0">
+              <a:buNone/>
+              <a:defRPr>
+                <a:solidFill>
+                  <a:schemeClr val="dk1"/>
+                </a:solidFill>
+              </a:defRPr>
+            </a:lvl1pPr>
+            <a:lvl2pPr lvl="1" rtl="0">
+              <a:buNone/>
+              <a:defRPr>
+                <a:solidFill>
+                  <a:schemeClr val="dk1"/>
+                </a:solidFill>
+              </a:defRPr>
+            </a:lvl2pPr>
+            <a:lvl3pPr lvl="2" rtl="0">
+              <a:buNone/>
+              <a:defRPr>
+                <a:solidFill>
+                  <a:schemeClr val="dk1"/>
+                </a:solidFill>
+              </a:defRPr>
+            </a:lvl3pPr>
+            <a:lvl4pPr lvl="3" rtl="0">
+              <a:buNone/>
+              <a:defRPr>
+                <a:solidFill>
+                  <a:schemeClr val="dk1"/>
+                </a:solidFill>
+              </a:defRPr>
+            </a:lvl4pPr>
+            <a:lvl5pPr lvl="4" rtl="0">
+              <a:buNone/>
+              <a:defRPr>
+                <a:solidFill>
+                  <a:schemeClr val="dk1"/>
+                </a:solidFill>
+              </a:defRPr>
+            </a:lvl5pPr>
+            <a:lvl6pPr lvl="5" rtl="0">
+              <a:buNone/>
+              <a:defRPr>
+                <a:solidFill>
+                  <a:schemeClr val="dk1"/>
+                </a:solidFill>
+              </a:defRPr>
+            </a:lvl6pPr>
+            <a:lvl7pPr lvl="6" rtl="0">
+              <a:buNone/>
+              <a:defRPr>
+                <a:solidFill>
+                  <a:schemeClr val="dk1"/>
+                </a:solidFill>
+              </a:defRPr>
+            </a:lvl7pPr>
+            <a:lvl8pPr lvl="7" rtl="0">
+              <a:buNone/>
+              <a:defRPr>
+                <a:solidFill>
+                  <a:schemeClr val="dk1"/>
+                </a:solidFill>
+              </a:defRPr>
+            </a:lvl8pPr>
+            <a:lvl9pPr lvl="8" rtl="0">
+              <a:buNone/>
+              <a:defRPr>
+                <a:solidFill>
+                  <a:schemeClr val="dk1"/>
+                </a:solidFill>
+              </a:defRPr>
+            </a:lvl9pPr>
+          </a:lstStyle>
+          <a:p>
+            <a:pPr indent="0" lvl="0" marL="0" rtl="0" algn="r">
+              <a:spcBef>
+                <a:spcPts val="0"/>
+              </a:spcBef>
+              <a:spcAft>
+                <a:spcPts val="0"/>
+              </a:spcAft>
+              <a:buNone/>
+            </a:pPr>
+            <a:fld id="{00000000-1234-1234-1234-123412341234}" type="slidenum">
+              <a:rPr lang="en"/>
+              <a:t>‹#›</a:t>
+            </a:fld>
+            <a:endParaRPr/>
+          </a:p>
+          <a:p>
+            <a:pPr indent="0" lvl="0" marL="0" rtl="0" algn="r">
+              <a:spcBef>
+                <a:spcPts val="0"/>
+              </a:spcBef>
+              <a:spcAft>
+                <a:spcPts val="0"/>
+              </a:spcAft>
+              <a:buNone/>
+            </a:pPr>
+            <a:r>
+              <a:rPr b="0" lang="en" sz="900" u="sng">
+                <a:solidFill>
+                  <a:schemeClr val="hlink"/>
+                </a:solidFill>
+                <a:hlinkClick r:id="rId2"/>
+              </a:rPr>
+              <a:t>https://uni1.de/amos</a:t>
+            </a:r>
+            <a:r>
+              <a:rPr b="0" lang="en" sz="900">
+                <a:solidFill>
+                  <a:schemeClr val="dk2"/>
+                </a:solidFill>
+              </a:rPr>
+              <a:t> </a:t>
+            </a:r>
+            <a:endParaRPr>
+              <a:solidFill>
+                <a:schemeClr val="dk2"/>
+              </a:solidFill>
+            </a:endParaRPr>
+          </a:p>
+        </p:txBody>
+      </p:sp>
+      <p:grpSp>
+        <p:nvGrpSpPr>
+          <p:cNvPr id="84" name="Google Shape;84;p13"/>
+          <p:cNvGrpSpPr/>
+          <p:nvPr/>
+        </p:nvGrpSpPr>
+        <p:grpSpPr>
+          <a:xfrm>
+            <a:off x="0" y="685800"/>
+            <a:ext cx="9144000" cy="91500"/>
+            <a:chOff x="0" y="2386584"/>
+            <a:chExt cx="9144000" cy="91500"/>
+          </a:xfrm>
+        </p:grpSpPr>
+        <p:sp>
+          <p:nvSpPr>
+            <p:cNvPr id="85" name="Google Shape;85;p13"/>
+            <p:cNvSpPr/>
+            <p:nvPr/>
+          </p:nvSpPr>
+          <p:spPr>
+            <a:xfrm>
+              <a:off x="0" y="2386584"/>
+              <a:ext cx="914400" cy="91500"/>
+            </a:xfrm>
+            <a:prstGeom prst="rect">
+              <a:avLst/>
+            </a:prstGeom>
+            <a:solidFill>
+              <a:schemeClr val="accent2"/>
+            </a:solidFill>
+            <a:ln>
+              <a:noFill/>
+            </a:ln>
+          </p:spPr>
+          <p:txBody>
+            <a:bodyPr anchorCtr="0" anchor="ctr" bIns="91425" lIns="91425" spcFirstLastPara="1" rIns="91425" wrap="square" tIns="91425">
+              <a:noAutofit/>
+            </a:bodyPr>
+            <a:lstStyle/>
+            <a:p>
+              <a:pPr indent="0" lvl="0" marL="0" rtl="0" algn="l">
+                <a:spcBef>
+                  <a:spcPts val="0"/>
+                </a:spcBef>
+                <a:spcAft>
+                  <a:spcPts val="0"/>
+                </a:spcAft>
+                <a:buNone/>
+              </a:pPr>
+              <a:r>
+                <a:t/>
+              </a:r>
+              <a:endParaRPr/>
+            </a:p>
+          </p:txBody>
+        </p:sp>
+        <p:sp>
+          <p:nvSpPr>
+            <p:cNvPr id="86" name="Google Shape;86;p13"/>
+            <p:cNvSpPr/>
+            <p:nvPr/>
+          </p:nvSpPr>
+          <p:spPr>
+            <a:xfrm>
+              <a:off x="914400" y="2386584"/>
+              <a:ext cx="1828800" cy="91500"/>
+            </a:xfrm>
+            <a:prstGeom prst="rect">
+              <a:avLst/>
+            </a:prstGeom>
+            <a:solidFill>
+              <a:schemeClr val="accent3"/>
+            </a:solidFill>
+            <a:ln>
+              <a:noFill/>
+            </a:ln>
+          </p:spPr>
+          <p:txBody>
+            <a:bodyPr anchorCtr="0" anchor="ctr" bIns="91425" lIns="91425" spcFirstLastPara="1" rIns="91425" wrap="square" tIns="91425">
+              <a:noAutofit/>
+            </a:bodyPr>
+            <a:lstStyle/>
+            <a:p>
+              <a:pPr indent="0" lvl="0" marL="0" rtl="0" algn="l">
+                <a:spcBef>
+                  <a:spcPts val="0"/>
+                </a:spcBef>
+                <a:spcAft>
+                  <a:spcPts val="0"/>
+                </a:spcAft>
+                <a:buNone/>
+              </a:pPr>
+              <a:r>
+                <a:t/>
+              </a:r>
+              <a:endParaRPr/>
+            </a:p>
+          </p:txBody>
+        </p:sp>
+        <p:sp>
+          <p:nvSpPr>
+            <p:cNvPr id="87" name="Google Shape;87;p13"/>
+            <p:cNvSpPr/>
+            <p:nvPr/>
+          </p:nvSpPr>
+          <p:spPr>
+            <a:xfrm>
+              <a:off x="2743200" y="2386584"/>
+              <a:ext cx="6400800" cy="91500"/>
+            </a:xfrm>
+            <a:prstGeom prst="rect">
+              <a:avLst/>
+            </a:prstGeom>
+            <a:solidFill>
+              <a:schemeClr val="accent4"/>
+            </a:solidFill>
+            <a:ln>
+              <a:noFill/>
+            </a:ln>
+          </p:spPr>
+          <p:txBody>
+            <a:bodyPr anchorCtr="0" anchor="ctr" bIns="91425" lIns="91425" spcFirstLastPara="1" rIns="91425" wrap="square" tIns="91425">
+              <a:noAutofit/>
+            </a:bodyPr>
+            <a:lstStyle/>
+            <a:p>
+              <a:pPr indent="0" lvl="0" marL="0" rtl="0" algn="l">
+                <a:spcBef>
+                  <a:spcPts val="0"/>
+                </a:spcBef>
+                <a:spcAft>
+                  <a:spcPts val="0"/>
+                </a:spcAft>
+                <a:buNone/>
+              </a:pPr>
+              <a:r>
+                <a:t/>
+              </a:r>
+              <a:endParaRPr/>
+            </a:p>
+          </p:txBody>
+        </p:sp>
+      </p:grpSp>
+    </p:spTree>
+  </p:cSld>
+  <p:clrMapOvr>
+    <a:masterClrMapping/>
+  </p:clrMapOvr>
+</p:sldLayout>
+</file>
+
+<file path=ppt/slideLayouts/slideLayout12.xml><?xml version="1.0" encoding="utf-8"?>
+<p:sldLayout xmlns:a="http://schemas.openxmlformats.org/drawingml/2006/main" xmlns:r="http://schemas.openxmlformats.org/officeDocument/2006/relationships" xmlns:mc="http://schemas.openxmlformats.org/markup-compatibility/2006" xmlns:mv="urn:schemas-microsoft-com:mac:vml" xmlns:p="http://schemas.openxmlformats.org/presentationml/2006/main" xmlns:c="http://schemas.openxmlformats.org/drawingml/2006/chart" xmlns:dgm="http://schemas.openxmlformats.org/drawingml/2006/diagram" xmlns:o="urn:schemas-microsoft-com:office:office" xmlns:v="urn:schemas-microsoft-com:vml" xmlns:pvml="urn:schemas-microsoft-com:office:powerpoint" xmlns:com="http://schemas.openxmlformats.org/drawingml/2006/compatibility" xmlns:p14="http://schemas.microsoft.com/office/powerpoint/2010/main" xmlns:p15="http://schemas.microsoft.com/office/powerpoint/2012/main" xmlns:ahyp="http://schemas.microsoft.com/office/drawing/2018/hyperlinkcolor" matchingName="Blank" type="blank">
+  <p:cSld name="BLANK">
+    <p:spTree>
+      <p:nvGrpSpPr>
+        <p:cNvPr id="88" name="Shape 88"/>
+        <p:cNvGrpSpPr/>
+        <p:nvPr/>
+      </p:nvGrpSpPr>
+      <p:grpSpPr>
+        <a:xfrm>
+          <a:off x="0" y="0"/>
+          <a:ext cx="0" cy="0"/>
+          <a:chOff x="0" y="0"/>
+          <a:chExt cx="0" cy="0"/>
+        </a:xfrm>
+      </p:grpSpPr>
     </p:spTree>
   </p:cSld>
   <p:clrMapOvr>
@@ -7545,6 +8709,1319 @@
           <a:chExt cx="0" cy="0"/>
         </a:xfrm>
       </p:grpSpPr>
+    </p:spTree>
+  </p:cSld>
+  <p:clrMapOvr>
+    <a:masterClrMapping/>
+  </p:clrMapOvr>
+</p:sldLayout>
+</file>
+
+<file path=ppt/slideLayouts/slideLayout7.xml><?xml version="1.0" encoding="utf-8"?>
+<p:sldLayout xmlns:a="http://schemas.openxmlformats.org/drawingml/2006/main" xmlns:r="http://schemas.openxmlformats.org/officeDocument/2006/relationships" xmlns:mc="http://schemas.openxmlformats.org/markup-compatibility/2006" xmlns:mv="urn:schemas-microsoft-com:mac:vml" xmlns:p="http://schemas.openxmlformats.org/presentationml/2006/main" xmlns:c="http://schemas.openxmlformats.org/drawingml/2006/chart" xmlns:dgm="http://schemas.openxmlformats.org/drawingml/2006/diagram" xmlns:o="urn:schemas-microsoft-com:office:office" xmlns:v="urn:schemas-microsoft-com:vml" xmlns:pvml="urn:schemas-microsoft-com:office:powerpoint" xmlns:com="http://schemas.openxmlformats.org/drawingml/2006/compatibility" xmlns:p14="http://schemas.microsoft.com/office/powerpoint/2010/main" xmlns:p15="http://schemas.microsoft.com/office/powerpoint/2012/main" xmlns:ahyp="http://schemas.microsoft.com/office/drawing/2018/hyperlinkcolor" matchingName="Title slide" type="title">
+  <p:cSld name="TITLE">
+    <p:spTree>
+      <p:nvGrpSpPr>
+        <p:cNvPr id="51" name="Shape 51"/>
+        <p:cNvGrpSpPr/>
+        <p:nvPr/>
+      </p:nvGrpSpPr>
+      <p:grpSpPr>
+        <a:xfrm>
+          <a:off x="0" y="0"/>
+          <a:ext cx="0" cy="0"/>
+          <a:chOff x="0" y="0"/>
+          <a:chExt cx="0" cy="0"/>
+        </a:xfrm>
+      </p:grpSpPr>
+      <p:sp>
+        <p:nvSpPr>
+          <p:cNvPr id="52" name="Google Shape;52;p9"/>
+          <p:cNvSpPr txBox="1"/>
+          <p:nvPr>
+            <p:ph type="ctrTitle"/>
+          </p:nvPr>
+        </p:nvSpPr>
+        <p:spPr>
+          <a:xfrm>
+            <a:off x="0" y="0"/>
+            <a:ext cx="9144000" cy="2388900"/>
+          </a:xfrm>
+          <a:prstGeom prst="rect">
+            <a:avLst/>
+          </a:prstGeom>
+          <a:noFill/>
+        </p:spPr>
+        <p:txBody>
+          <a:bodyPr anchorCtr="0" anchor="b" bIns="274300" lIns="91425" spcFirstLastPara="1" rIns="91425" wrap="square" tIns="91425">
+            <a:noAutofit/>
+          </a:bodyPr>
+          <a:lstStyle>
+            <a:lvl1pPr lvl="0" algn="ctr">
+              <a:spcBef>
+                <a:spcPts val="0"/>
+              </a:spcBef>
+              <a:spcAft>
+                <a:spcPts val="0"/>
+              </a:spcAft>
+              <a:buClr>
+                <a:schemeClr val="dk1"/>
+              </a:buClr>
+              <a:buSzPts val="4200"/>
+              <a:buNone/>
+              <a:defRPr sz="4200">
+                <a:solidFill>
+                  <a:schemeClr val="dk1"/>
+                </a:solidFill>
+              </a:defRPr>
+            </a:lvl1pPr>
+            <a:lvl2pPr lvl="1" algn="ctr">
+              <a:spcBef>
+                <a:spcPts val="0"/>
+              </a:spcBef>
+              <a:spcAft>
+                <a:spcPts val="0"/>
+              </a:spcAft>
+              <a:buSzPts val="5200"/>
+              <a:buNone/>
+              <a:defRPr sz="5200"/>
+            </a:lvl2pPr>
+            <a:lvl3pPr lvl="2" algn="ctr">
+              <a:spcBef>
+                <a:spcPts val="0"/>
+              </a:spcBef>
+              <a:spcAft>
+                <a:spcPts val="0"/>
+              </a:spcAft>
+              <a:buSzPts val="5200"/>
+              <a:buNone/>
+              <a:defRPr sz="5200"/>
+            </a:lvl3pPr>
+            <a:lvl4pPr lvl="3" algn="ctr">
+              <a:spcBef>
+                <a:spcPts val="0"/>
+              </a:spcBef>
+              <a:spcAft>
+                <a:spcPts val="0"/>
+              </a:spcAft>
+              <a:buSzPts val="5200"/>
+              <a:buNone/>
+              <a:defRPr sz="5200"/>
+            </a:lvl4pPr>
+            <a:lvl5pPr lvl="4" algn="ctr">
+              <a:spcBef>
+                <a:spcPts val="0"/>
+              </a:spcBef>
+              <a:spcAft>
+                <a:spcPts val="0"/>
+              </a:spcAft>
+              <a:buSzPts val="5200"/>
+              <a:buNone/>
+              <a:defRPr sz="5200"/>
+            </a:lvl5pPr>
+            <a:lvl6pPr lvl="5" algn="ctr">
+              <a:spcBef>
+                <a:spcPts val="0"/>
+              </a:spcBef>
+              <a:spcAft>
+                <a:spcPts val="0"/>
+              </a:spcAft>
+              <a:buSzPts val="5200"/>
+              <a:buNone/>
+              <a:defRPr sz="5200"/>
+            </a:lvl6pPr>
+            <a:lvl7pPr lvl="6" algn="ctr">
+              <a:spcBef>
+                <a:spcPts val="0"/>
+              </a:spcBef>
+              <a:spcAft>
+                <a:spcPts val="0"/>
+              </a:spcAft>
+              <a:buSzPts val="5200"/>
+              <a:buNone/>
+              <a:defRPr sz="5200"/>
+            </a:lvl7pPr>
+            <a:lvl8pPr lvl="7" algn="ctr">
+              <a:spcBef>
+                <a:spcPts val="0"/>
+              </a:spcBef>
+              <a:spcAft>
+                <a:spcPts val="0"/>
+              </a:spcAft>
+              <a:buSzPts val="5200"/>
+              <a:buNone/>
+              <a:defRPr sz="5200"/>
+            </a:lvl8pPr>
+            <a:lvl9pPr lvl="8" algn="ctr">
+              <a:spcBef>
+                <a:spcPts val="0"/>
+              </a:spcBef>
+              <a:spcAft>
+                <a:spcPts val="0"/>
+              </a:spcAft>
+              <a:buSzPts val="5200"/>
+              <a:buNone/>
+              <a:defRPr sz="5200"/>
+            </a:lvl9pPr>
+          </a:lstStyle>
+          <a:p/>
+        </p:txBody>
+      </p:sp>
+      <p:sp>
+        <p:nvSpPr>
+          <p:cNvPr id="53" name="Google Shape;53;p9"/>
+          <p:cNvSpPr txBox="1"/>
+          <p:nvPr>
+            <p:ph idx="1" type="subTitle"/>
+          </p:nvPr>
+        </p:nvSpPr>
+        <p:spPr>
+          <a:xfrm>
+            <a:off x="0" y="2569475"/>
+            <a:ext cx="9144000" cy="2574000"/>
+          </a:xfrm>
+          <a:prstGeom prst="rect">
+            <a:avLst/>
+          </a:prstGeom>
+        </p:spPr>
+        <p:txBody>
+          <a:bodyPr anchorCtr="0" anchor="t" bIns="91425" lIns="91425" spcFirstLastPara="1" rIns="91425" wrap="square" tIns="274300">
+            <a:noAutofit/>
+          </a:bodyPr>
+          <a:lstStyle>
+            <a:lvl1pPr lvl="0" algn="ctr">
+              <a:lnSpc>
+                <a:spcPct val="115000"/>
+              </a:lnSpc>
+              <a:spcBef>
+                <a:spcPts val="0"/>
+              </a:spcBef>
+              <a:spcAft>
+                <a:spcPts val="0"/>
+              </a:spcAft>
+              <a:buSzPts val="3000"/>
+              <a:buNone/>
+              <a:defRPr sz="3000"/>
+            </a:lvl1pPr>
+            <a:lvl2pPr lvl="1" algn="ctr">
+              <a:lnSpc>
+                <a:spcPct val="115000"/>
+              </a:lnSpc>
+              <a:spcBef>
+                <a:spcPts val="0"/>
+              </a:spcBef>
+              <a:spcAft>
+                <a:spcPts val="0"/>
+              </a:spcAft>
+              <a:buSzPts val="3200"/>
+              <a:buNone/>
+              <a:defRPr sz="3200"/>
+            </a:lvl2pPr>
+            <a:lvl3pPr lvl="2" algn="ctr">
+              <a:lnSpc>
+                <a:spcPct val="115000"/>
+              </a:lnSpc>
+              <a:spcBef>
+                <a:spcPts val="0"/>
+              </a:spcBef>
+              <a:spcAft>
+                <a:spcPts val="0"/>
+              </a:spcAft>
+              <a:buSzPts val="3200"/>
+              <a:buNone/>
+              <a:defRPr sz="3200"/>
+            </a:lvl3pPr>
+            <a:lvl4pPr lvl="3" algn="ctr">
+              <a:lnSpc>
+                <a:spcPct val="115000"/>
+              </a:lnSpc>
+              <a:spcBef>
+                <a:spcPts val="0"/>
+              </a:spcBef>
+              <a:spcAft>
+                <a:spcPts val="0"/>
+              </a:spcAft>
+              <a:buSzPts val="3200"/>
+              <a:buNone/>
+              <a:defRPr sz="3200"/>
+            </a:lvl4pPr>
+            <a:lvl5pPr lvl="4" algn="ctr">
+              <a:lnSpc>
+                <a:spcPct val="115000"/>
+              </a:lnSpc>
+              <a:spcBef>
+                <a:spcPts val="0"/>
+              </a:spcBef>
+              <a:spcAft>
+                <a:spcPts val="0"/>
+              </a:spcAft>
+              <a:buSzPts val="3200"/>
+              <a:buNone/>
+              <a:defRPr sz="3200"/>
+            </a:lvl5pPr>
+            <a:lvl6pPr lvl="5" algn="ctr">
+              <a:lnSpc>
+                <a:spcPct val="115000"/>
+              </a:lnSpc>
+              <a:spcBef>
+                <a:spcPts val="0"/>
+              </a:spcBef>
+              <a:spcAft>
+                <a:spcPts val="0"/>
+              </a:spcAft>
+              <a:buSzPts val="3200"/>
+              <a:buNone/>
+              <a:defRPr sz="3200"/>
+            </a:lvl6pPr>
+            <a:lvl7pPr lvl="6" algn="ctr">
+              <a:lnSpc>
+                <a:spcPct val="115000"/>
+              </a:lnSpc>
+              <a:spcBef>
+                <a:spcPts val="0"/>
+              </a:spcBef>
+              <a:spcAft>
+                <a:spcPts val="0"/>
+              </a:spcAft>
+              <a:buSzPts val="3200"/>
+              <a:buNone/>
+              <a:defRPr sz="3200"/>
+            </a:lvl7pPr>
+            <a:lvl8pPr lvl="7" algn="ctr">
+              <a:lnSpc>
+                <a:spcPct val="115000"/>
+              </a:lnSpc>
+              <a:spcBef>
+                <a:spcPts val="0"/>
+              </a:spcBef>
+              <a:spcAft>
+                <a:spcPts val="0"/>
+              </a:spcAft>
+              <a:buSzPts val="3200"/>
+              <a:buNone/>
+              <a:defRPr sz="3200"/>
+            </a:lvl8pPr>
+            <a:lvl9pPr lvl="8" algn="ctr">
+              <a:lnSpc>
+                <a:spcPct val="115000"/>
+              </a:lnSpc>
+              <a:spcBef>
+                <a:spcPts val="0"/>
+              </a:spcBef>
+              <a:spcAft>
+                <a:spcPts val="0"/>
+              </a:spcAft>
+              <a:buSzPts val="3200"/>
+              <a:buNone/>
+              <a:defRPr sz="3200"/>
+            </a:lvl9pPr>
+          </a:lstStyle>
+          <a:p/>
+        </p:txBody>
+      </p:sp>
+      <p:grpSp>
+        <p:nvGrpSpPr>
+          <p:cNvPr id="54" name="Google Shape;54;p9"/>
+          <p:cNvGrpSpPr/>
+          <p:nvPr/>
+        </p:nvGrpSpPr>
+        <p:grpSpPr>
+          <a:xfrm>
+            <a:off x="0" y="2388810"/>
+            <a:ext cx="9144000" cy="183000"/>
+            <a:chOff x="0" y="2388810"/>
+            <a:chExt cx="9144000" cy="183000"/>
+          </a:xfrm>
+        </p:grpSpPr>
+        <p:sp>
+          <p:nvSpPr>
+            <p:cNvPr id="55" name="Google Shape;55;p9"/>
+            <p:cNvSpPr/>
+            <p:nvPr/>
+          </p:nvSpPr>
+          <p:spPr>
+            <a:xfrm>
+              <a:off x="0" y="2388810"/>
+              <a:ext cx="914400" cy="183000"/>
+            </a:xfrm>
+            <a:prstGeom prst="rect">
+              <a:avLst/>
+            </a:prstGeom>
+            <a:solidFill>
+              <a:schemeClr val="accent2"/>
+            </a:solidFill>
+            <a:ln>
+              <a:noFill/>
+            </a:ln>
+          </p:spPr>
+          <p:txBody>
+            <a:bodyPr anchorCtr="0" anchor="ctr" bIns="91425" lIns="91425" spcFirstLastPara="1" rIns="91425" wrap="square" tIns="91425">
+              <a:noAutofit/>
+            </a:bodyPr>
+            <a:lstStyle/>
+            <a:p>
+              <a:pPr indent="0" lvl="0" marL="0" rtl="0" algn="l">
+                <a:spcBef>
+                  <a:spcPts val="0"/>
+                </a:spcBef>
+                <a:spcAft>
+                  <a:spcPts val="0"/>
+                </a:spcAft>
+                <a:buNone/>
+              </a:pPr>
+              <a:r>
+                <a:t/>
+              </a:r>
+              <a:endParaRPr/>
+            </a:p>
+          </p:txBody>
+        </p:sp>
+        <p:sp>
+          <p:nvSpPr>
+            <p:cNvPr id="56" name="Google Shape;56;p9"/>
+            <p:cNvSpPr/>
+            <p:nvPr/>
+          </p:nvSpPr>
+          <p:spPr>
+            <a:xfrm>
+              <a:off x="914400" y="2388810"/>
+              <a:ext cx="1828800" cy="183000"/>
+            </a:xfrm>
+            <a:prstGeom prst="rect">
+              <a:avLst/>
+            </a:prstGeom>
+            <a:solidFill>
+              <a:schemeClr val="accent3"/>
+            </a:solidFill>
+            <a:ln>
+              <a:noFill/>
+            </a:ln>
+          </p:spPr>
+          <p:txBody>
+            <a:bodyPr anchorCtr="0" anchor="ctr" bIns="91425" lIns="91425" spcFirstLastPara="1" rIns="91425" wrap="square" tIns="91425">
+              <a:noAutofit/>
+            </a:bodyPr>
+            <a:lstStyle/>
+            <a:p>
+              <a:pPr indent="0" lvl="0" marL="0" rtl="0" algn="l">
+                <a:spcBef>
+                  <a:spcPts val="0"/>
+                </a:spcBef>
+                <a:spcAft>
+                  <a:spcPts val="0"/>
+                </a:spcAft>
+                <a:buNone/>
+              </a:pPr>
+              <a:r>
+                <a:t/>
+              </a:r>
+              <a:endParaRPr/>
+            </a:p>
+          </p:txBody>
+        </p:sp>
+        <p:sp>
+          <p:nvSpPr>
+            <p:cNvPr id="57" name="Google Shape;57;p9"/>
+            <p:cNvSpPr/>
+            <p:nvPr/>
+          </p:nvSpPr>
+          <p:spPr>
+            <a:xfrm>
+              <a:off x="2743200" y="2388810"/>
+              <a:ext cx="6400800" cy="183000"/>
+            </a:xfrm>
+            <a:prstGeom prst="rect">
+              <a:avLst/>
+            </a:prstGeom>
+            <a:solidFill>
+              <a:schemeClr val="accent4"/>
+            </a:solidFill>
+            <a:ln>
+              <a:noFill/>
+            </a:ln>
+          </p:spPr>
+          <p:txBody>
+            <a:bodyPr anchorCtr="0" anchor="ctr" bIns="91425" lIns="91425" spcFirstLastPara="1" rIns="91425" wrap="square" tIns="91425">
+              <a:noAutofit/>
+            </a:bodyPr>
+            <a:lstStyle/>
+            <a:p>
+              <a:pPr indent="0" lvl="0" marL="0" rtl="0" algn="l">
+                <a:spcBef>
+                  <a:spcPts val="0"/>
+                </a:spcBef>
+                <a:spcAft>
+                  <a:spcPts val="0"/>
+                </a:spcAft>
+                <a:buNone/>
+              </a:pPr>
+              <a:r>
+                <a:t/>
+              </a:r>
+              <a:endParaRPr/>
+            </a:p>
+          </p:txBody>
+        </p:sp>
+      </p:grpSp>
+    </p:spTree>
+  </p:cSld>
+  <p:clrMapOvr>
+    <a:masterClrMapping/>
+  </p:clrMapOvr>
+</p:sldLayout>
+</file>
+
+<file path=ppt/slideLayouts/slideLayout8.xml><?xml version="1.0" encoding="utf-8"?>
+<p:sldLayout xmlns:a="http://schemas.openxmlformats.org/drawingml/2006/main" xmlns:r="http://schemas.openxmlformats.org/officeDocument/2006/relationships" xmlns:mc="http://schemas.openxmlformats.org/markup-compatibility/2006" xmlns:mv="urn:schemas-microsoft-com:mac:vml" xmlns:p="http://schemas.openxmlformats.org/presentationml/2006/main" xmlns:c="http://schemas.openxmlformats.org/drawingml/2006/chart" xmlns:dgm="http://schemas.openxmlformats.org/drawingml/2006/diagram" xmlns:o="urn:schemas-microsoft-com:office:office" xmlns:v="urn:schemas-microsoft-com:vml" xmlns:pvml="urn:schemas-microsoft-com:office:powerpoint" xmlns:com="http://schemas.openxmlformats.org/drawingml/2006/compatibility" xmlns:p14="http://schemas.microsoft.com/office/powerpoint/2010/main" xmlns:p15="http://schemas.microsoft.com/office/powerpoint/2012/main" xmlns:ahyp="http://schemas.microsoft.com/office/drawing/2018/hyperlinkcolor" matchingName="Section header" type="secHead">
+  <p:cSld name="SECTION_HEADER">
+    <p:spTree>
+      <p:nvGrpSpPr>
+        <p:cNvPr id="58" name="Shape 58"/>
+        <p:cNvGrpSpPr/>
+        <p:nvPr/>
+      </p:nvGrpSpPr>
+      <p:grpSpPr>
+        <a:xfrm>
+          <a:off x="0" y="0"/>
+          <a:ext cx="0" cy="0"/>
+          <a:chOff x="0" y="0"/>
+          <a:chExt cx="0" cy="0"/>
+        </a:xfrm>
+      </p:grpSpPr>
+      <p:sp>
+        <p:nvSpPr>
+          <p:cNvPr id="59" name="Google Shape;59;p10"/>
+          <p:cNvSpPr txBox="1"/>
+          <p:nvPr>
+            <p:ph type="title"/>
+          </p:nvPr>
+        </p:nvSpPr>
+        <p:spPr>
+          <a:xfrm>
+            <a:off x="0" y="-7"/>
+            <a:ext cx="9144000" cy="2386500"/>
+          </a:xfrm>
+          <a:prstGeom prst="rect">
+            <a:avLst/>
+          </a:prstGeom>
+        </p:spPr>
+        <p:txBody>
+          <a:bodyPr anchorCtr="0" anchor="b" bIns="274300" lIns="91425" spcFirstLastPara="1" rIns="91425" wrap="square" tIns="91425">
+            <a:noAutofit/>
+          </a:bodyPr>
+          <a:lstStyle>
+            <a:lvl1pPr lvl="0" algn="ctr">
+              <a:spcBef>
+                <a:spcPts val="0"/>
+              </a:spcBef>
+              <a:spcAft>
+                <a:spcPts val="0"/>
+              </a:spcAft>
+              <a:buSzPts val="3000"/>
+              <a:buNone/>
+              <a:defRPr sz="3000"/>
+            </a:lvl1pPr>
+            <a:lvl2pPr lvl="1" algn="ctr">
+              <a:spcBef>
+                <a:spcPts val="0"/>
+              </a:spcBef>
+              <a:spcAft>
+                <a:spcPts val="0"/>
+              </a:spcAft>
+              <a:buSzPts val="3600"/>
+              <a:buNone/>
+              <a:defRPr sz="3600"/>
+            </a:lvl2pPr>
+            <a:lvl3pPr lvl="2" algn="ctr">
+              <a:spcBef>
+                <a:spcPts val="0"/>
+              </a:spcBef>
+              <a:spcAft>
+                <a:spcPts val="0"/>
+              </a:spcAft>
+              <a:buSzPts val="3600"/>
+              <a:buNone/>
+              <a:defRPr sz="3600"/>
+            </a:lvl3pPr>
+            <a:lvl4pPr lvl="3" algn="ctr">
+              <a:spcBef>
+                <a:spcPts val="0"/>
+              </a:spcBef>
+              <a:spcAft>
+                <a:spcPts val="0"/>
+              </a:spcAft>
+              <a:buSzPts val="3600"/>
+              <a:buNone/>
+              <a:defRPr sz="3600"/>
+            </a:lvl4pPr>
+            <a:lvl5pPr lvl="4" algn="ctr">
+              <a:spcBef>
+                <a:spcPts val="0"/>
+              </a:spcBef>
+              <a:spcAft>
+                <a:spcPts val="0"/>
+              </a:spcAft>
+              <a:buSzPts val="3600"/>
+              <a:buNone/>
+              <a:defRPr sz="3600"/>
+            </a:lvl5pPr>
+            <a:lvl6pPr lvl="5" algn="ctr">
+              <a:spcBef>
+                <a:spcPts val="0"/>
+              </a:spcBef>
+              <a:spcAft>
+                <a:spcPts val="0"/>
+              </a:spcAft>
+              <a:buSzPts val="3600"/>
+              <a:buNone/>
+              <a:defRPr sz="3600"/>
+            </a:lvl6pPr>
+            <a:lvl7pPr lvl="6" algn="ctr">
+              <a:spcBef>
+                <a:spcPts val="0"/>
+              </a:spcBef>
+              <a:spcAft>
+                <a:spcPts val="0"/>
+              </a:spcAft>
+              <a:buSzPts val="3600"/>
+              <a:buNone/>
+              <a:defRPr sz="3600"/>
+            </a:lvl7pPr>
+            <a:lvl8pPr lvl="7" algn="ctr">
+              <a:spcBef>
+                <a:spcPts val="0"/>
+              </a:spcBef>
+              <a:spcAft>
+                <a:spcPts val="0"/>
+              </a:spcAft>
+              <a:buSzPts val="3600"/>
+              <a:buNone/>
+              <a:defRPr sz="3600"/>
+            </a:lvl8pPr>
+            <a:lvl9pPr lvl="8" algn="ctr">
+              <a:spcBef>
+                <a:spcPts val="0"/>
+              </a:spcBef>
+              <a:spcAft>
+                <a:spcPts val="0"/>
+              </a:spcAft>
+              <a:buSzPts val="3600"/>
+              <a:buNone/>
+              <a:defRPr sz="3600"/>
+            </a:lvl9pPr>
+          </a:lstStyle>
+          <a:p/>
+        </p:txBody>
+      </p:sp>
+      <p:grpSp>
+        <p:nvGrpSpPr>
+          <p:cNvPr id="60" name="Google Shape;60;p10"/>
+          <p:cNvGrpSpPr/>
+          <p:nvPr/>
+        </p:nvGrpSpPr>
+        <p:grpSpPr>
+          <a:xfrm>
+            <a:off x="0" y="2432304"/>
+            <a:ext cx="9144000" cy="91500"/>
+            <a:chOff x="0" y="2386584"/>
+            <a:chExt cx="9144000" cy="91500"/>
+          </a:xfrm>
+        </p:grpSpPr>
+        <p:sp>
+          <p:nvSpPr>
+            <p:cNvPr id="61" name="Google Shape;61;p10"/>
+            <p:cNvSpPr/>
+            <p:nvPr/>
+          </p:nvSpPr>
+          <p:spPr>
+            <a:xfrm>
+              <a:off x="0" y="2386584"/>
+              <a:ext cx="914400" cy="91500"/>
+            </a:xfrm>
+            <a:prstGeom prst="rect">
+              <a:avLst/>
+            </a:prstGeom>
+            <a:solidFill>
+              <a:schemeClr val="accent2"/>
+            </a:solidFill>
+            <a:ln>
+              <a:noFill/>
+            </a:ln>
+          </p:spPr>
+          <p:txBody>
+            <a:bodyPr anchorCtr="0" anchor="ctr" bIns="91425" lIns="91425" spcFirstLastPara="1" rIns="91425" wrap="square" tIns="91425">
+              <a:noAutofit/>
+            </a:bodyPr>
+            <a:lstStyle/>
+            <a:p>
+              <a:pPr indent="0" lvl="0" marL="0" rtl="0" algn="l">
+                <a:spcBef>
+                  <a:spcPts val="0"/>
+                </a:spcBef>
+                <a:spcAft>
+                  <a:spcPts val="0"/>
+                </a:spcAft>
+                <a:buNone/>
+              </a:pPr>
+              <a:r>
+                <a:t/>
+              </a:r>
+              <a:endParaRPr/>
+            </a:p>
+          </p:txBody>
+        </p:sp>
+        <p:sp>
+          <p:nvSpPr>
+            <p:cNvPr id="62" name="Google Shape;62;p10"/>
+            <p:cNvSpPr/>
+            <p:nvPr/>
+          </p:nvSpPr>
+          <p:spPr>
+            <a:xfrm>
+              <a:off x="914400" y="2386584"/>
+              <a:ext cx="1828800" cy="91500"/>
+            </a:xfrm>
+            <a:prstGeom prst="rect">
+              <a:avLst/>
+            </a:prstGeom>
+            <a:solidFill>
+              <a:schemeClr val="accent3"/>
+            </a:solidFill>
+            <a:ln>
+              <a:noFill/>
+            </a:ln>
+          </p:spPr>
+          <p:txBody>
+            <a:bodyPr anchorCtr="0" anchor="ctr" bIns="91425" lIns="91425" spcFirstLastPara="1" rIns="91425" wrap="square" tIns="91425">
+              <a:noAutofit/>
+            </a:bodyPr>
+            <a:lstStyle/>
+            <a:p>
+              <a:pPr indent="0" lvl="0" marL="0" rtl="0" algn="l">
+                <a:spcBef>
+                  <a:spcPts val="0"/>
+                </a:spcBef>
+                <a:spcAft>
+                  <a:spcPts val="0"/>
+                </a:spcAft>
+                <a:buNone/>
+              </a:pPr>
+              <a:r>
+                <a:t/>
+              </a:r>
+              <a:endParaRPr/>
+            </a:p>
+          </p:txBody>
+        </p:sp>
+        <p:sp>
+          <p:nvSpPr>
+            <p:cNvPr id="63" name="Google Shape;63;p10"/>
+            <p:cNvSpPr/>
+            <p:nvPr/>
+          </p:nvSpPr>
+          <p:spPr>
+            <a:xfrm>
+              <a:off x="2743200" y="2386584"/>
+              <a:ext cx="6400800" cy="91500"/>
+            </a:xfrm>
+            <a:prstGeom prst="rect">
+              <a:avLst/>
+            </a:prstGeom>
+            <a:solidFill>
+              <a:schemeClr val="accent4"/>
+            </a:solidFill>
+            <a:ln>
+              <a:noFill/>
+            </a:ln>
+          </p:spPr>
+          <p:txBody>
+            <a:bodyPr anchorCtr="0" anchor="ctr" bIns="91425" lIns="91425" spcFirstLastPara="1" rIns="91425" wrap="square" tIns="91425">
+              <a:noAutofit/>
+            </a:bodyPr>
+            <a:lstStyle/>
+            <a:p>
+              <a:pPr indent="0" lvl="0" marL="0" rtl="0" algn="l">
+                <a:spcBef>
+                  <a:spcPts val="0"/>
+                </a:spcBef>
+                <a:spcAft>
+                  <a:spcPts val="0"/>
+                </a:spcAft>
+                <a:buNone/>
+              </a:pPr>
+              <a:r>
+                <a:t/>
+              </a:r>
+              <a:endParaRPr/>
+            </a:p>
+          </p:txBody>
+        </p:sp>
+      </p:grpSp>
+    </p:spTree>
+  </p:cSld>
+  <p:clrMapOvr>
+    <a:masterClrMapping/>
+  </p:clrMapOvr>
+</p:sldLayout>
+</file>
+
+<file path=ppt/slideLayouts/slideLayout9.xml><?xml version="1.0" encoding="utf-8"?>
+<p:sldLayout xmlns:a="http://schemas.openxmlformats.org/drawingml/2006/main" xmlns:r="http://schemas.openxmlformats.org/officeDocument/2006/relationships" xmlns:mc="http://schemas.openxmlformats.org/markup-compatibility/2006" xmlns:mv="urn:schemas-microsoft-com:mac:vml" xmlns:p="http://schemas.openxmlformats.org/presentationml/2006/main" xmlns:c="http://schemas.openxmlformats.org/drawingml/2006/chart" xmlns:dgm="http://schemas.openxmlformats.org/drawingml/2006/diagram" xmlns:o="urn:schemas-microsoft-com:office:office" xmlns:v="urn:schemas-microsoft-com:vml" xmlns:pvml="urn:schemas-microsoft-com:office:powerpoint" xmlns:com="http://schemas.openxmlformats.org/drawingml/2006/compatibility" xmlns:p14="http://schemas.microsoft.com/office/powerpoint/2010/main" xmlns:p15="http://schemas.microsoft.com/office/powerpoint/2012/main" xmlns:ahyp="http://schemas.microsoft.com/office/drawing/2018/hyperlinkcolor" matchingName="Title and body" type="tx">
+  <p:cSld name="TITLE_AND_BODY">
+    <p:spTree>
+      <p:nvGrpSpPr>
+        <p:cNvPr id="64" name="Shape 64"/>
+        <p:cNvGrpSpPr/>
+        <p:nvPr/>
+      </p:nvGrpSpPr>
+      <p:grpSpPr>
+        <a:xfrm>
+          <a:off x="0" y="0"/>
+          <a:ext cx="0" cy="0"/>
+          <a:chOff x="0" y="0"/>
+          <a:chExt cx="0" cy="0"/>
+        </a:xfrm>
+      </p:grpSpPr>
+      <p:sp>
+        <p:nvSpPr>
+          <p:cNvPr id="65" name="Google Shape;65;p11"/>
+          <p:cNvSpPr txBox="1"/>
+          <p:nvPr>
+            <p:ph type="title"/>
+          </p:nvPr>
+        </p:nvSpPr>
+        <p:spPr>
+          <a:xfrm>
+            <a:off x="0" y="0"/>
+            <a:ext cx="9144000" cy="685800"/>
+          </a:xfrm>
+          <a:prstGeom prst="rect">
+            <a:avLst/>
+          </a:prstGeom>
+        </p:spPr>
+        <p:txBody>
+          <a:bodyPr anchorCtr="0" anchor="ctr" bIns="91425" lIns="274300" spcFirstLastPara="1" rIns="91425" wrap="square" tIns="91425">
+            <a:noAutofit/>
+          </a:bodyPr>
+          <a:lstStyle>
+            <a:lvl1pPr lvl="0">
+              <a:spcBef>
+                <a:spcPts val="0"/>
+              </a:spcBef>
+              <a:spcAft>
+                <a:spcPts val="0"/>
+              </a:spcAft>
+              <a:buSzPts val="2400"/>
+              <a:buNone/>
+              <a:defRPr/>
+            </a:lvl1pPr>
+            <a:lvl2pPr lvl="1">
+              <a:spcBef>
+                <a:spcPts val="0"/>
+              </a:spcBef>
+              <a:spcAft>
+                <a:spcPts val="0"/>
+              </a:spcAft>
+              <a:buSzPts val="2800"/>
+              <a:buNone/>
+              <a:defRPr/>
+            </a:lvl2pPr>
+            <a:lvl3pPr lvl="2">
+              <a:spcBef>
+                <a:spcPts val="0"/>
+              </a:spcBef>
+              <a:spcAft>
+                <a:spcPts val="0"/>
+              </a:spcAft>
+              <a:buSzPts val="2800"/>
+              <a:buNone/>
+              <a:defRPr/>
+            </a:lvl3pPr>
+            <a:lvl4pPr lvl="3">
+              <a:spcBef>
+                <a:spcPts val="0"/>
+              </a:spcBef>
+              <a:spcAft>
+                <a:spcPts val="0"/>
+              </a:spcAft>
+              <a:buSzPts val="2800"/>
+              <a:buNone/>
+              <a:defRPr/>
+            </a:lvl4pPr>
+            <a:lvl5pPr lvl="4">
+              <a:spcBef>
+                <a:spcPts val="0"/>
+              </a:spcBef>
+              <a:spcAft>
+                <a:spcPts val="0"/>
+              </a:spcAft>
+              <a:buSzPts val="2800"/>
+              <a:buNone/>
+              <a:defRPr/>
+            </a:lvl5pPr>
+            <a:lvl6pPr lvl="5">
+              <a:spcBef>
+                <a:spcPts val="0"/>
+              </a:spcBef>
+              <a:spcAft>
+                <a:spcPts val="0"/>
+              </a:spcAft>
+              <a:buSzPts val="2800"/>
+              <a:buNone/>
+              <a:defRPr/>
+            </a:lvl6pPr>
+            <a:lvl7pPr lvl="6">
+              <a:spcBef>
+                <a:spcPts val="0"/>
+              </a:spcBef>
+              <a:spcAft>
+                <a:spcPts val="0"/>
+              </a:spcAft>
+              <a:buSzPts val="2800"/>
+              <a:buNone/>
+              <a:defRPr/>
+            </a:lvl7pPr>
+            <a:lvl8pPr lvl="7">
+              <a:spcBef>
+                <a:spcPts val="0"/>
+              </a:spcBef>
+              <a:spcAft>
+                <a:spcPts val="0"/>
+              </a:spcAft>
+              <a:buSzPts val="2800"/>
+              <a:buNone/>
+              <a:defRPr/>
+            </a:lvl8pPr>
+            <a:lvl9pPr lvl="8">
+              <a:spcBef>
+                <a:spcPts val="0"/>
+              </a:spcBef>
+              <a:spcAft>
+                <a:spcPts val="0"/>
+              </a:spcAft>
+              <a:buSzPts val="2800"/>
+              <a:buNone/>
+              <a:defRPr/>
+            </a:lvl9pPr>
+          </a:lstStyle>
+          <a:p/>
+        </p:txBody>
+      </p:sp>
+      <p:sp>
+        <p:nvSpPr>
+          <p:cNvPr id="66" name="Google Shape;66;p11"/>
+          <p:cNvSpPr txBox="1"/>
+          <p:nvPr>
+            <p:ph idx="1" type="body"/>
+          </p:nvPr>
+        </p:nvSpPr>
+        <p:spPr>
+          <a:xfrm>
+            <a:off x="274320" y="914400"/>
+            <a:ext cx="8595300" cy="4114800"/>
+          </a:xfrm>
+          <a:prstGeom prst="rect">
+            <a:avLst/>
+          </a:prstGeom>
+        </p:spPr>
+        <p:txBody>
+          <a:bodyPr anchorCtr="0" anchor="t" bIns="0" lIns="0" spcFirstLastPara="1" rIns="0" wrap="square" tIns="0">
+            <a:noAutofit/>
+          </a:bodyPr>
+          <a:lstStyle>
+            <a:lvl1pPr indent="-342900" lvl="0" marL="457200">
+              <a:spcBef>
+                <a:spcPts val="0"/>
+              </a:spcBef>
+              <a:spcAft>
+                <a:spcPts val="0"/>
+              </a:spcAft>
+              <a:buSzPts val="1800"/>
+              <a:buChar char="●"/>
+              <a:defRPr/>
+            </a:lvl1pPr>
+            <a:lvl2pPr indent="-317500" lvl="1" marL="914400">
+              <a:spcBef>
+                <a:spcPts val="0"/>
+              </a:spcBef>
+              <a:spcAft>
+                <a:spcPts val="0"/>
+              </a:spcAft>
+              <a:buSzPts val="1400"/>
+              <a:buChar char="○"/>
+              <a:defRPr/>
+            </a:lvl2pPr>
+            <a:lvl3pPr indent="-317500" lvl="2" marL="1371600">
+              <a:spcBef>
+                <a:spcPts val="0"/>
+              </a:spcBef>
+              <a:spcAft>
+                <a:spcPts val="0"/>
+              </a:spcAft>
+              <a:buSzPts val="1400"/>
+              <a:buChar char="■"/>
+              <a:defRPr/>
+            </a:lvl3pPr>
+            <a:lvl4pPr indent="-317500" lvl="3" marL="1828800">
+              <a:spcBef>
+                <a:spcPts val="0"/>
+              </a:spcBef>
+              <a:spcAft>
+                <a:spcPts val="0"/>
+              </a:spcAft>
+              <a:buSzPts val="1400"/>
+              <a:buChar char="●"/>
+              <a:defRPr/>
+            </a:lvl4pPr>
+            <a:lvl5pPr indent="-317500" lvl="4" marL="2286000">
+              <a:spcBef>
+                <a:spcPts val="0"/>
+              </a:spcBef>
+              <a:spcAft>
+                <a:spcPts val="0"/>
+              </a:spcAft>
+              <a:buSzPts val="1400"/>
+              <a:buChar char="○"/>
+              <a:defRPr/>
+            </a:lvl5pPr>
+            <a:lvl6pPr indent="-317500" lvl="5" marL="2743200">
+              <a:spcBef>
+                <a:spcPts val="0"/>
+              </a:spcBef>
+              <a:spcAft>
+                <a:spcPts val="0"/>
+              </a:spcAft>
+              <a:buSzPts val="1400"/>
+              <a:buChar char="■"/>
+              <a:defRPr/>
+            </a:lvl6pPr>
+            <a:lvl7pPr indent="-317500" lvl="6" marL="3200400">
+              <a:spcBef>
+                <a:spcPts val="0"/>
+              </a:spcBef>
+              <a:spcAft>
+                <a:spcPts val="0"/>
+              </a:spcAft>
+              <a:buSzPts val="1400"/>
+              <a:buChar char="●"/>
+              <a:defRPr/>
+            </a:lvl7pPr>
+            <a:lvl8pPr indent="-317500" lvl="7" marL="3657600">
+              <a:spcBef>
+                <a:spcPts val="0"/>
+              </a:spcBef>
+              <a:spcAft>
+                <a:spcPts val="0"/>
+              </a:spcAft>
+              <a:buSzPts val="1400"/>
+              <a:buChar char="○"/>
+              <a:defRPr/>
+            </a:lvl8pPr>
+            <a:lvl9pPr indent="-317500" lvl="8" marL="4114800">
+              <a:spcBef>
+                <a:spcPts val="0"/>
+              </a:spcBef>
+              <a:spcAft>
+                <a:spcPts val="0"/>
+              </a:spcAft>
+              <a:buSzPts val="1400"/>
+              <a:buChar char="■"/>
+              <a:defRPr/>
+            </a:lvl9pPr>
+          </a:lstStyle>
+          <a:p/>
+        </p:txBody>
+      </p:sp>
+      <p:sp>
+        <p:nvSpPr>
+          <p:cNvPr id="67" name="Google Shape;67;p11"/>
+          <p:cNvSpPr txBox="1"/>
+          <p:nvPr>
+            <p:ph idx="12" type="sldNum"/>
+          </p:nvPr>
+        </p:nvSpPr>
+        <p:spPr>
+          <a:xfrm>
+            <a:off x="7315202" y="4416550"/>
+            <a:ext cx="1828800" cy="731400"/>
+          </a:xfrm>
+          <a:prstGeom prst="rect">
+            <a:avLst/>
+          </a:prstGeom>
+        </p:spPr>
+        <p:txBody>
+          <a:bodyPr anchorCtr="0" anchor="b" bIns="91425" lIns="91425" spcFirstLastPara="1" rIns="91425" wrap="square" tIns="91425">
+            <a:noAutofit/>
+          </a:bodyPr>
+          <a:lstStyle>
+            <a:lvl1pPr lvl="0" rtl="0">
+              <a:buNone/>
+              <a:defRPr>
+                <a:solidFill>
+                  <a:schemeClr val="dk1"/>
+                </a:solidFill>
+              </a:defRPr>
+            </a:lvl1pPr>
+            <a:lvl2pPr lvl="1" rtl="0">
+              <a:buNone/>
+              <a:defRPr>
+                <a:solidFill>
+                  <a:schemeClr val="dk1"/>
+                </a:solidFill>
+              </a:defRPr>
+            </a:lvl2pPr>
+            <a:lvl3pPr lvl="2" rtl="0">
+              <a:buNone/>
+              <a:defRPr>
+                <a:solidFill>
+                  <a:schemeClr val="dk1"/>
+                </a:solidFill>
+              </a:defRPr>
+            </a:lvl3pPr>
+            <a:lvl4pPr lvl="3" rtl="0">
+              <a:buNone/>
+              <a:defRPr>
+                <a:solidFill>
+                  <a:schemeClr val="dk1"/>
+                </a:solidFill>
+              </a:defRPr>
+            </a:lvl4pPr>
+            <a:lvl5pPr lvl="4" rtl="0">
+              <a:buNone/>
+              <a:defRPr>
+                <a:solidFill>
+                  <a:schemeClr val="dk1"/>
+                </a:solidFill>
+              </a:defRPr>
+            </a:lvl5pPr>
+            <a:lvl6pPr lvl="5" rtl="0">
+              <a:buNone/>
+              <a:defRPr>
+                <a:solidFill>
+                  <a:schemeClr val="dk1"/>
+                </a:solidFill>
+              </a:defRPr>
+            </a:lvl6pPr>
+            <a:lvl7pPr lvl="6" rtl="0">
+              <a:buNone/>
+              <a:defRPr>
+                <a:solidFill>
+                  <a:schemeClr val="dk1"/>
+                </a:solidFill>
+              </a:defRPr>
+            </a:lvl7pPr>
+            <a:lvl8pPr lvl="7" rtl="0">
+              <a:buNone/>
+              <a:defRPr>
+                <a:solidFill>
+                  <a:schemeClr val="dk1"/>
+                </a:solidFill>
+              </a:defRPr>
+            </a:lvl8pPr>
+            <a:lvl9pPr lvl="8" rtl="0">
+              <a:buNone/>
+              <a:defRPr>
+                <a:solidFill>
+                  <a:schemeClr val="dk1"/>
+                </a:solidFill>
+              </a:defRPr>
+            </a:lvl9pPr>
+          </a:lstStyle>
+          <a:p>
+            <a:pPr indent="0" lvl="0" marL="0" rtl="0" algn="r">
+              <a:spcBef>
+                <a:spcPts val="0"/>
+              </a:spcBef>
+              <a:spcAft>
+                <a:spcPts val="0"/>
+              </a:spcAft>
+              <a:buNone/>
+            </a:pPr>
+            <a:fld id="{00000000-1234-1234-1234-123412341234}" type="slidenum">
+              <a:rPr lang="en"/>
+              <a:t>‹#›</a:t>
+            </a:fld>
+            <a:endParaRPr/>
+          </a:p>
+          <a:p>
+            <a:pPr indent="0" lvl="0" marL="0" rtl="0" algn="r">
+              <a:spcBef>
+                <a:spcPts val="0"/>
+              </a:spcBef>
+              <a:spcAft>
+                <a:spcPts val="0"/>
+              </a:spcAft>
+              <a:buNone/>
+            </a:pPr>
+            <a:r>
+              <a:rPr b="0" lang="en" sz="900" u="sng">
+                <a:solidFill>
+                  <a:schemeClr val="hlink"/>
+                </a:solidFill>
+                <a:hlinkClick r:id="rId2"/>
+              </a:rPr>
+              <a:t>https://uni1.de/amos</a:t>
+            </a:r>
+            <a:r>
+              <a:rPr b="0" lang="en" sz="900">
+                <a:solidFill>
+                  <a:schemeClr val="dk2"/>
+                </a:solidFill>
+              </a:rPr>
+              <a:t> </a:t>
+            </a:r>
+            <a:endParaRPr b="0" sz="900">
+              <a:solidFill>
+                <a:schemeClr val="dk2"/>
+              </a:solidFill>
+            </a:endParaRPr>
+          </a:p>
+        </p:txBody>
+      </p:sp>
+      <p:grpSp>
+        <p:nvGrpSpPr>
+          <p:cNvPr id="68" name="Google Shape;68;p11"/>
+          <p:cNvGrpSpPr/>
+          <p:nvPr/>
+        </p:nvGrpSpPr>
+        <p:grpSpPr>
+          <a:xfrm>
+            <a:off x="0" y="685800"/>
+            <a:ext cx="9144000" cy="91500"/>
+            <a:chOff x="0" y="2386584"/>
+            <a:chExt cx="9144000" cy="91500"/>
+          </a:xfrm>
+        </p:grpSpPr>
+        <p:sp>
+          <p:nvSpPr>
+            <p:cNvPr id="69" name="Google Shape;69;p11"/>
+            <p:cNvSpPr/>
+            <p:nvPr/>
+          </p:nvSpPr>
+          <p:spPr>
+            <a:xfrm>
+              <a:off x="0" y="2386584"/>
+              <a:ext cx="914400" cy="91500"/>
+            </a:xfrm>
+            <a:prstGeom prst="rect">
+              <a:avLst/>
+            </a:prstGeom>
+            <a:solidFill>
+              <a:schemeClr val="accent2"/>
+            </a:solidFill>
+            <a:ln>
+              <a:noFill/>
+            </a:ln>
+          </p:spPr>
+          <p:txBody>
+            <a:bodyPr anchorCtr="0" anchor="ctr" bIns="91425" lIns="91425" spcFirstLastPara="1" rIns="91425" wrap="square" tIns="91425">
+              <a:noAutofit/>
+            </a:bodyPr>
+            <a:lstStyle/>
+            <a:p>
+              <a:pPr indent="0" lvl="0" marL="0" rtl="0" algn="l">
+                <a:spcBef>
+                  <a:spcPts val="0"/>
+                </a:spcBef>
+                <a:spcAft>
+                  <a:spcPts val="0"/>
+                </a:spcAft>
+                <a:buNone/>
+              </a:pPr>
+              <a:r>
+                <a:t/>
+              </a:r>
+              <a:endParaRPr/>
+            </a:p>
+          </p:txBody>
+        </p:sp>
+        <p:sp>
+          <p:nvSpPr>
+            <p:cNvPr id="70" name="Google Shape;70;p11"/>
+            <p:cNvSpPr/>
+            <p:nvPr/>
+          </p:nvSpPr>
+          <p:spPr>
+            <a:xfrm>
+              <a:off x="914400" y="2386584"/>
+              <a:ext cx="1828800" cy="91500"/>
+            </a:xfrm>
+            <a:prstGeom prst="rect">
+              <a:avLst/>
+            </a:prstGeom>
+            <a:solidFill>
+              <a:schemeClr val="accent3"/>
+            </a:solidFill>
+            <a:ln>
+              <a:noFill/>
+            </a:ln>
+          </p:spPr>
+          <p:txBody>
+            <a:bodyPr anchorCtr="0" anchor="ctr" bIns="91425" lIns="91425" spcFirstLastPara="1" rIns="91425" wrap="square" tIns="91425">
+              <a:noAutofit/>
+            </a:bodyPr>
+            <a:lstStyle/>
+            <a:p>
+              <a:pPr indent="0" lvl="0" marL="0" rtl="0" algn="l">
+                <a:spcBef>
+                  <a:spcPts val="0"/>
+                </a:spcBef>
+                <a:spcAft>
+                  <a:spcPts val="0"/>
+                </a:spcAft>
+                <a:buNone/>
+              </a:pPr>
+              <a:r>
+                <a:t/>
+              </a:r>
+              <a:endParaRPr/>
+            </a:p>
+          </p:txBody>
+        </p:sp>
+        <p:sp>
+          <p:nvSpPr>
+            <p:cNvPr id="71" name="Google Shape;71;p11"/>
+            <p:cNvSpPr/>
+            <p:nvPr/>
+          </p:nvSpPr>
+          <p:spPr>
+            <a:xfrm>
+              <a:off x="2743200" y="2386584"/>
+              <a:ext cx="6400800" cy="91500"/>
+            </a:xfrm>
+            <a:prstGeom prst="rect">
+              <a:avLst/>
+            </a:prstGeom>
+            <a:solidFill>
+              <a:schemeClr val="accent4"/>
+            </a:solidFill>
+            <a:ln>
+              <a:noFill/>
+            </a:ln>
+          </p:spPr>
+          <p:txBody>
+            <a:bodyPr anchorCtr="0" anchor="ctr" bIns="91425" lIns="91425" spcFirstLastPara="1" rIns="91425" wrap="square" tIns="91425">
+              <a:noAutofit/>
+            </a:bodyPr>
+            <a:lstStyle/>
+            <a:p>
+              <a:pPr indent="0" lvl="0" marL="0" rtl="0" algn="l">
+                <a:spcBef>
+                  <a:spcPts val="0"/>
+                </a:spcBef>
+                <a:spcAft>
+                  <a:spcPts val="0"/>
+                </a:spcAft>
+                <a:buNone/>
+              </a:pPr>
+              <a:r>
+                <a:t/>
+              </a:r>
+              <a:endParaRPr/>
+            </a:p>
+          </p:txBody>
+        </p:sp>
+      </p:grpSp>
     </p:spTree>
   </p:cSld>
   <p:clrMapOvr>
@@ -8834,12 +11311,19 @@
 </p:sldMaster>
 </file>
 
-<file path=ppt/slides/slide1.xml><?xml version="1.0" encoding="utf-8"?>
-<p:sld xmlns:a="http://schemas.openxmlformats.org/drawingml/2006/main" xmlns:r="http://schemas.openxmlformats.org/officeDocument/2006/relationships" xmlns:mc="http://schemas.openxmlformats.org/markup-compatibility/2006" xmlns:mv="urn:schemas-microsoft-com:mac:vml" xmlns:p="http://schemas.openxmlformats.org/presentationml/2006/main" xmlns:c="http://schemas.openxmlformats.org/drawingml/2006/chart" xmlns:dgm="http://schemas.openxmlformats.org/drawingml/2006/diagram" xmlns:o="urn:schemas-microsoft-com:office:office" xmlns:v="urn:schemas-microsoft-com:vml" xmlns:pvml="urn:schemas-microsoft-com:office:powerpoint" xmlns:com="http://schemas.openxmlformats.org/drawingml/2006/compatibility" xmlns:p14="http://schemas.microsoft.com/office/powerpoint/2010/main" xmlns:p15="http://schemas.microsoft.com/office/powerpoint/2012/main" xmlns:ahyp="http://schemas.microsoft.com/office/drawing/2018/hyperlinkcolor">
-  <p:cSld>
+<file path=ppt/slideMasters/slideMaster2.xml><?xml version="1.0" encoding="utf-8"?>
+<p:sldMaster xmlns:a="http://schemas.openxmlformats.org/drawingml/2006/main" xmlns:r="http://schemas.openxmlformats.org/officeDocument/2006/relationships" xmlns:mc="http://schemas.openxmlformats.org/markup-compatibility/2006" xmlns:mv="urn:schemas-microsoft-com:mac:vml" xmlns:p="http://schemas.openxmlformats.org/presentationml/2006/main" xmlns:c="http://schemas.openxmlformats.org/drawingml/2006/chart" xmlns:dgm="http://schemas.openxmlformats.org/drawingml/2006/diagram" xmlns:o="urn:schemas-microsoft-com:office:office" xmlns:v="urn:schemas-microsoft-com:vml" xmlns:pvml="urn:schemas-microsoft-com:office:powerpoint" xmlns:com="http://schemas.openxmlformats.org/drawingml/2006/compatibility" xmlns:p14="http://schemas.microsoft.com/office/powerpoint/2010/main" xmlns:p15="http://schemas.microsoft.com/office/powerpoint/2012/main" xmlns:ahyp="http://schemas.microsoft.com/office/drawing/2018/hyperlinkcolor">
+  <p:cSld name="simple-light-2">
+    <p:bg>
+      <p:bgPr>
+        <a:solidFill>
+          <a:schemeClr val="lt1"/>
+        </a:solidFill>
+      </p:bgPr>
+    </p:bg>
     <p:spTree>
       <p:nvGrpSpPr>
-        <p:cNvPr id="50" name="Shape 50"/>
+        <p:cNvPr id="47" name="Shape 47"/>
         <p:cNvGrpSpPr/>
         <p:nvPr/>
       </p:nvGrpSpPr>
@@ -8853,7 +11337,1281 @@
       </p:grpSpPr>
       <p:sp>
         <p:nvSpPr>
-          <p:cNvPr id="51" name="Google Shape;51;p8"/>
+          <p:cNvPr id="48" name="Google Shape;48;p8"/>
+          <p:cNvSpPr txBox="1"/>
+          <p:nvPr>
+            <p:ph type="title"/>
+          </p:nvPr>
+        </p:nvSpPr>
+        <p:spPr>
+          <a:xfrm>
+            <a:off x="0" y="0"/>
+            <a:ext cx="9144000" cy="685800"/>
+          </a:xfrm>
+          <a:prstGeom prst="rect">
+            <a:avLst/>
+          </a:prstGeom>
+          <a:noFill/>
+          <a:ln>
+            <a:noFill/>
+          </a:ln>
+        </p:spPr>
+        <p:txBody>
+          <a:bodyPr anchorCtr="0" anchor="ctr" bIns="0" lIns="274300" spcFirstLastPara="1" rIns="0" wrap="square" tIns="0">
+            <a:noAutofit/>
+          </a:bodyPr>
+          <a:lstStyle>
+            <a:lvl1pPr lvl="0">
+              <a:spcBef>
+                <a:spcPts val="0"/>
+              </a:spcBef>
+              <a:spcAft>
+                <a:spcPts val="0"/>
+              </a:spcAft>
+              <a:buClr>
+                <a:schemeClr val="dk1"/>
+              </a:buClr>
+              <a:buSzPts val="2400"/>
+              <a:buNone/>
+              <a:defRPr b="1" sz="2400">
+                <a:solidFill>
+                  <a:schemeClr val="dk1"/>
+                </a:solidFill>
+              </a:defRPr>
+            </a:lvl1pPr>
+            <a:lvl2pPr lvl="1">
+              <a:spcBef>
+                <a:spcPts val="0"/>
+              </a:spcBef>
+              <a:spcAft>
+                <a:spcPts val="0"/>
+              </a:spcAft>
+              <a:buClr>
+                <a:schemeClr val="dk1"/>
+              </a:buClr>
+              <a:buSzPts val="2800"/>
+              <a:buNone/>
+              <a:defRPr sz="2800">
+                <a:solidFill>
+                  <a:schemeClr val="dk1"/>
+                </a:solidFill>
+              </a:defRPr>
+            </a:lvl2pPr>
+            <a:lvl3pPr lvl="2">
+              <a:spcBef>
+                <a:spcPts val="0"/>
+              </a:spcBef>
+              <a:spcAft>
+                <a:spcPts val="0"/>
+              </a:spcAft>
+              <a:buClr>
+                <a:schemeClr val="dk1"/>
+              </a:buClr>
+              <a:buSzPts val="2800"/>
+              <a:buNone/>
+              <a:defRPr sz="2800">
+                <a:solidFill>
+                  <a:schemeClr val="dk1"/>
+                </a:solidFill>
+              </a:defRPr>
+            </a:lvl3pPr>
+            <a:lvl4pPr lvl="3">
+              <a:spcBef>
+                <a:spcPts val="0"/>
+              </a:spcBef>
+              <a:spcAft>
+                <a:spcPts val="0"/>
+              </a:spcAft>
+              <a:buClr>
+                <a:schemeClr val="dk1"/>
+              </a:buClr>
+              <a:buSzPts val="2800"/>
+              <a:buNone/>
+              <a:defRPr sz="2800">
+                <a:solidFill>
+                  <a:schemeClr val="dk1"/>
+                </a:solidFill>
+              </a:defRPr>
+            </a:lvl4pPr>
+            <a:lvl5pPr lvl="4">
+              <a:spcBef>
+                <a:spcPts val="0"/>
+              </a:spcBef>
+              <a:spcAft>
+                <a:spcPts val="0"/>
+              </a:spcAft>
+              <a:buClr>
+                <a:schemeClr val="dk1"/>
+              </a:buClr>
+              <a:buSzPts val="2800"/>
+              <a:buNone/>
+              <a:defRPr sz="2800">
+                <a:solidFill>
+                  <a:schemeClr val="dk1"/>
+                </a:solidFill>
+              </a:defRPr>
+            </a:lvl5pPr>
+            <a:lvl6pPr lvl="5">
+              <a:spcBef>
+                <a:spcPts val="0"/>
+              </a:spcBef>
+              <a:spcAft>
+                <a:spcPts val="0"/>
+              </a:spcAft>
+              <a:buClr>
+                <a:schemeClr val="dk1"/>
+              </a:buClr>
+              <a:buSzPts val="2800"/>
+              <a:buNone/>
+              <a:defRPr sz="2800">
+                <a:solidFill>
+                  <a:schemeClr val="dk1"/>
+                </a:solidFill>
+              </a:defRPr>
+            </a:lvl6pPr>
+            <a:lvl7pPr lvl="6">
+              <a:spcBef>
+                <a:spcPts val="0"/>
+              </a:spcBef>
+              <a:spcAft>
+                <a:spcPts val="0"/>
+              </a:spcAft>
+              <a:buClr>
+                <a:schemeClr val="dk1"/>
+              </a:buClr>
+              <a:buSzPts val="2800"/>
+              <a:buNone/>
+              <a:defRPr sz="2800">
+                <a:solidFill>
+                  <a:schemeClr val="dk1"/>
+                </a:solidFill>
+              </a:defRPr>
+            </a:lvl7pPr>
+            <a:lvl8pPr lvl="7">
+              <a:spcBef>
+                <a:spcPts val="0"/>
+              </a:spcBef>
+              <a:spcAft>
+                <a:spcPts val="0"/>
+              </a:spcAft>
+              <a:buClr>
+                <a:schemeClr val="dk1"/>
+              </a:buClr>
+              <a:buSzPts val="2800"/>
+              <a:buNone/>
+              <a:defRPr sz="2800">
+                <a:solidFill>
+                  <a:schemeClr val="dk1"/>
+                </a:solidFill>
+              </a:defRPr>
+            </a:lvl8pPr>
+            <a:lvl9pPr lvl="8">
+              <a:spcBef>
+                <a:spcPts val="0"/>
+              </a:spcBef>
+              <a:spcAft>
+                <a:spcPts val="0"/>
+              </a:spcAft>
+              <a:buClr>
+                <a:schemeClr val="dk1"/>
+              </a:buClr>
+              <a:buSzPts val="2800"/>
+              <a:buNone/>
+              <a:defRPr sz="2800">
+                <a:solidFill>
+                  <a:schemeClr val="dk1"/>
+                </a:solidFill>
+              </a:defRPr>
+            </a:lvl9pPr>
+          </a:lstStyle>
+          <a:p/>
+        </p:txBody>
+      </p:sp>
+      <p:sp>
+        <p:nvSpPr>
+          <p:cNvPr id="49" name="Google Shape;49;p8"/>
+          <p:cNvSpPr txBox="1"/>
+          <p:nvPr>
+            <p:ph idx="1" type="body"/>
+          </p:nvPr>
+        </p:nvSpPr>
+        <p:spPr>
+          <a:xfrm>
+            <a:off x="274320" y="914400"/>
+            <a:ext cx="8595300" cy="4114800"/>
+          </a:xfrm>
+          <a:prstGeom prst="rect">
+            <a:avLst/>
+          </a:prstGeom>
+          <a:noFill/>
+          <a:ln>
+            <a:noFill/>
+          </a:ln>
+        </p:spPr>
+        <p:txBody>
+          <a:bodyPr anchorCtr="0" anchor="t" bIns="0" lIns="0" spcFirstLastPara="1" rIns="0" wrap="square" tIns="0">
+            <a:noAutofit/>
+          </a:bodyPr>
+          <a:lstStyle>
+            <a:lvl1pPr indent="-342900" lvl="0" marL="457200">
+              <a:lnSpc>
+                <a:spcPct val="115000"/>
+              </a:lnSpc>
+              <a:spcBef>
+                <a:spcPts val="0"/>
+              </a:spcBef>
+              <a:spcAft>
+                <a:spcPts val="0"/>
+              </a:spcAft>
+              <a:buClr>
+                <a:schemeClr val="dk1"/>
+              </a:buClr>
+              <a:buSzPts val="1800"/>
+              <a:buChar char="●"/>
+              <a:defRPr sz="1800">
+                <a:solidFill>
+                  <a:schemeClr val="dk1"/>
+                </a:solidFill>
+              </a:defRPr>
+            </a:lvl1pPr>
+            <a:lvl2pPr indent="-317500" lvl="1" marL="914400">
+              <a:lnSpc>
+                <a:spcPct val="115000"/>
+              </a:lnSpc>
+              <a:spcBef>
+                <a:spcPts val="0"/>
+              </a:spcBef>
+              <a:spcAft>
+                <a:spcPts val="0"/>
+              </a:spcAft>
+              <a:buClr>
+                <a:schemeClr val="dk1"/>
+              </a:buClr>
+              <a:buSzPts val="1400"/>
+              <a:buChar char="○"/>
+              <a:defRPr>
+                <a:solidFill>
+                  <a:schemeClr val="dk1"/>
+                </a:solidFill>
+              </a:defRPr>
+            </a:lvl2pPr>
+            <a:lvl3pPr indent="-317500" lvl="2" marL="1371600">
+              <a:lnSpc>
+                <a:spcPct val="115000"/>
+              </a:lnSpc>
+              <a:spcBef>
+                <a:spcPts val="0"/>
+              </a:spcBef>
+              <a:spcAft>
+                <a:spcPts val="0"/>
+              </a:spcAft>
+              <a:buClr>
+                <a:schemeClr val="dk1"/>
+              </a:buClr>
+              <a:buSzPts val="1400"/>
+              <a:buChar char="■"/>
+              <a:defRPr>
+                <a:solidFill>
+                  <a:schemeClr val="dk1"/>
+                </a:solidFill>
+              </a:defRPr>
+            </a:lvl3pPr>
+            <a:lvl4pPr indent="-317500" lvl="3" marL="1828800">
+              <a:lnSpc>
+                <a:spcPct val="115000"/>
+              </a:lnSpc>
+              <a:spcBef>
+                <a:spcPts val="0"/>
+              </a:spcBef>
+              <a:spcAft>
+                <a:spcPts val="0"/>
+              </a:spcAft>
+              <a:buClr>
+                <a:schemeClr val="dk1"/>
+              </a:buClr>
+              <a:buSzPts val="1400"/>
+              <a:buChar char="●"/>
+              <a:defRPr>
+                <a:solidFill>
+                  <a:schemeClr val="dk1"/>
+                </a:solidFill>
+              </a:defRPr>
+            </a:lvl4pPr>
+            <a:lvl5pPr indent="-317500" lvl="4" marL="2286000">
+              <a:lnSpc>
+                <a:spcPct val="115000"/>
+              </a:lnSpc>
+              <a:spcBef>
+                <a:spcPts val="0"/>
+              </a:spcBef>
+              <a:spcAft>
+                <a:spcPts val="0"/>
+              </a:spcAft>
+              <a:buClr>
+                <a:schemeClr val="dk1"/>
+              </a:buClr>
+              <a:buSzPts val="1400"/>
+              <a:buChar char="○"/>
+              <a:defRPr>
+                <a:solidFill>
+                  <a:schemeClr val="dk1"/>
+                </a:solidFill>
+              </a:defRPr>
+            </a:lvl5pPr>
+            <a:lvl6pPr indent="-317500" lvl="5" marL="2743200">
+              <a:lnSpc>
+                <a:spcPct val="115000"/>
+              </a:lnSpc>
+              <a:spcBef>
+                <a:spcPts val="0"/>
+              </a:spcBef>
+              <a:spcAft>
+                <a:spcPts val="0"/>
+              </a:spcAft>
+              <a:buClr>
+                <a:schemeClr val="dk1"/>
+              </a:buClr>
+              <a:buSzPts val="1400"/>
+              <a:buChar char="■"/>
+              <a:defRPr>
+                <a:solidFill>
+                  <a:schemeClr val="dk1"/>
+                </a:solidFill>
+              </a:defRPr>
+            </a:lvl6pPr>
+            <a:lvl7pPr indent="-317500" lvl="6" marL="3200400">
+              <a:lnSpc>
+                <a:spcPct val="115000"/>
+              </a:lnSpc>
+              <a:spcBef>
+                <a:spcPts val="0"/>
+              </a:spcBef>
+              <a:spcAft>
+                <a:spcPts val="0"/>
+              </a:spcAft>
+              <a:buClr>
+                <a:schemeClr val="dk1"/>
+              </a:buClr>
+              <a:buSzPts val="1400"/>
+              <a:buChar char="●"/>
+              <a:defRPr>
+                <a:solidFill>
+                  <a:schemeClr val="dk1"/>
+                </a:solidFill>
+              </a:defRPr>
+            </a:lvl7pPr>
+            <a:lvl8pPr indent="-317500" lvl="7" marL="3657600">
+              <a:lnSpc>
+                <a:spcPct val="115000"/>
+              </a:lnSpc>
+              <a:spcBef>
+                <a:spcPts val="0"/>
+              </a:spcBef>
+              <a:spcAft>
+                <a:spcPts val="0"/>
+              </a:spcAft>
+              <a:buClr>
+                <a:schemeClr val="dk1"/>
+              </a:buClr>
+              <a:buSzPts val="1400"/>
+              <a:buChar char="○"/>
+              <a:defRPr>
+                <a:solidFill>
+                  <a:schemeClr val="dk1"/>
+                </a:solidFill>
+              </a:defRPr>
+            </a:lvl8pPr>
+            <a:lvl9pPr indent="-317500" lvl="8" marL="4114800">
+              <a:lnSpc>
+                <a:spcPct val="115000"/>
+              </a:lnSpc>
+              <a:spcBef>
+                <a:spcPts val="0"/>
+              </a:spcBef>
+              <a:spcAft>
+                <a:spcPts val="0"/>
+              </a:spcAft>
+              <a:buClr>
+                <a:schemeClr val="dk1"/>
+              </a:buClr>
+              <a:buSzPts val="1400"/>
+              <a:buChar char="■"/>
+              <a:defRPr>
+                <a:solidFill>
+                  <a:schemeClr val="dk1"/>
+                </a:solidFill>
+              </a:defRPr>
+            </a:lvl9pPr>
+          </a:lstStyle>
+          <a:p/>
+        </p:txBody>
+      </p:sp>
+      <p:sp>
+        <p:nvSpPr>
+          <p:cNvPr id="50" name="Google Shape;50;p8"/>
+          <p:cNvSpPr txBox="1"/>
+          <p:nvPr>
+            <p:ph idx="12" type="sldNum"/>
+          </p:nvPr>
+        </p:nvSpPr>
+        <p:spPr>
+          <a:xfrm>
+            <a:off x="7315202" y="4416550"/>
+            <a:ext cx="1828800" cy="731400"/>
+          </a:xfrm>
+          <a:prstGeom prst="rect">
+            <a:avLst/>
+          </a:prstGeom>
+          <a:noFill/>
+          <a:ln>
+            <a:noFill/>
+          </a:ln>
+        </p:spPr>
+        <p:txBody>
+          <a:bodyPr anchorCtr="0" anchor="b" bIns="91425" lIns="91425" spcFirstLastPara="1" rIns="91425" wrap="square" tIns="91425">
+            <a:noAutofit/>
+          </a:bodyPr>
+          <a:lstStyle>
+            <a:lvl1pPr lvl="0" rtl="0" algn="r">
+              <a:buNone/>
+              <a:defRPr b="1" sz="2400">
+                <a:solidFill>
+                  <a:schemeClr val="dk2"/>
+                </a:solidFill>
+              </a:defRPr>
+            </a:lvl1pPr>
+            <a:lvl2pPr lvl="1" rtl="0" algn="r">
+              <a:buNone/>
+              <a:defRPr b="1" sz="2400">
+                <a:solidFill>
+                  <a:schemeClr val="dk2"/>
+                </a:solidFill>
+              </a:defRPr>
+            </a:lvl2pPr>
+            <a:lvl3pPr lvl="2" rtl="0" algn="r">
+              <a:buNone/>
+              <a:defRPr b="1" sz="2400">
+                <a:solidFill>
+                  <a:schemeClr val="dk2"/>
+                </a:solidFill>
+              </a:defRPr>
+            </a:lvl3pPr>
+            <a:lvl4pPr lvl="3" rtl="0" algn="r">
+              <a:buNone/>
+              <a:defRPr b="1" sz="2400">
+                <a:solidFill>
+                  <a:schemeClr val="dk2"/>
+                </a:solidFill>
+              </a:defRPr>
+            </a:lvl4pPr>
+            <a:lvl5pPr lvl="4" rtl="0" algn="r">
+              <a:buNone/>
+              <a:defRPr b="1" sz="2400">
+                <a:solidFill>
+                  <a:schemeClr val="dk2"/>
+                </a:solidFill>
+              </a:defRPr>
+            </a:lvl5pPr>
+            <a:lvl6pPr lvl="5" rtl="0" algn="r">
+              <a:buNone/>
+              <a:defRPr b="1" sz="2400">
+                <a:solidFill>
+                  <a:schemeClr val="dk2"/>
+                </a:solidFill>
+              </a:defRPr>
+            </a:lvl6pPr>
+            <a:lvl7pPr lvl="6" rtl="0" algn="r">
+              <a:buNone/>
+              <a:defRPr b="1" sz="2400">
+                <a:solidFill>
+                  <a:schemeClr val="dk2"/>
+                </a:solidFill>
+              </a:defRPr>
+            </a:lvl7pPr>
+            <a:lvl8pPr lvl="7" rtl="0" algn="r">
+              <a:buNone/>
+              <a:defRPr b="1" sz="2400">
+                <a:solidFill>
+                  <a:schemeClr val="dk2"/>
+                </a:solidFill>
+              </a:defRPr>
+            </a:lvl8pPr>
+            <a:lvl9pPr lvl="8" rtl="0" algn="r">
+              <a:buNone/>
+              <a:defRPr b="1" sz="2400">
+                <a:solidFill>
+                  <a:schemeClr val="dk2"/>
+                </a:solidFill>
+              </a:defRPr>
+            </a:lvl9pPr>
+          </a:lstStyle>
+          <a:p>
+            <a:pPr indent="0" lvl="0" marL="0" rtl="0" algn="r">
+              <a:spcBef>
+                <a:spcPts val="0"/>
+              </a:spcBef>
+              <a:spcAft>
+                <a:spcPts val="0"/>
+              </a:spcAft>
+              <a:buNone/>
+            </a:pPr>
+            <a:fld id="{00000000-1234-1234-1234-123412341234}" type="slidenum">
+              <a:rPr lang="en"/>
+              <a:t>‹#›</a:t>
+            </a:fld>
+            <a:endParaRPr/>
+          </a:p>
+          <a:p>
+            <a:pPr indent="0" lvl="0" marL="0" rtl="0" algn="r">
+              <a:spcBef>
+                <a:spcPts val="0"/>
+              </a:spcBef>
+              <a:spcAft>
+                <a:spcPts val="0"/>
+              </a:spcAft>
+              <a:buNone/>
+            </a:pPr>
+            <a:r>
+              <a:rPr b="0" lang="en" sz="900" u="sng">
+                <a:solidFill>
+                  <a:schemeClr val="hlink"/>
+                </a:solidFill>
+                <a:hlinkClick r:id="rId1"/>
+              </a:rPr>
+              <a:t>https://uni1.de/amos</a:t>
+            </a:r>
+            <a:r>
+              <a:rPr b="0" lang="en" sz="900"/>
+              <a:t> </a:t>
+            </a:r>
+            <a:endParaRPr b="0" sz="900"/>
+          </a:p>
+        </p:txBody>
+      </p:sp>
+    </p:spTree>
+  </p:cSld>
+  <p:clrMap accent1="accent1" accent2="accent2" accent3="accent3" accent4="accent4" accent5="accent5" accent6="accent6" bg1="lt1" bg2="dk2" tx1="dk1" tx2="lt2" folHlink="folHlink" hlink="hlink"/>
+  <p:sldLayoutIdLst>
+    <p:sldLayoutId id="2147483654" r:id="rId2"/>
+    <p:sldLayoutId id="2147483655" r:id="rId3"/>
+    <p:sldLayoutId id="2147483656" r:id="rId4"/>
+    <p:sldLayoutId id="2147483657" r:id="rId5"/>
+    <p:sldLayoutId id="2147483658" r:id="rId6"/>
+    <p:sldLayoutId id="2147483659" r:id="rId7"/>
+  </p:sldLayoutIdLst>
+  <p:hf dt="0" ftr="0" hdr="0"/>
+  <p:txStyles>
+    <p:titleStyle>
+      <a:defPPr lvl="0" marR="0" rtl="0" algn="l">
+        <a:lnSpc>
+          <a:spcPct val="100000"/>
+        </a:lnSpc>
+        <a:spcBef>
+          <a:spcPts val="0"/>
+        </a:spcBef>
+        <a:spcAft>
+          <a:spcPts val="0"/>
+        </a:spcAft>
+      </a:defPPr>
+      <a:lvl1pPr lvl="0" marR="0" rtl="0" algn="l">
+        <a:lnSpc>
+          <a:spcPct val="100000"/>
+        </a:lnSpc>
+        <a:spcBef>
+          <a:spcPts val="0"/>
+        </a:spcBef>
+        <a:spcAft>
+          <a:spcPts val="0"/>
+        </a:spcAft>
+        <a:buClr>
+          <a:srgbClr val="000000"/>
+        </a:buClr>
+        <a:buFont typeface="Arial"/>
+        <a:defRPr b="0" i="0" sz="1400" u="none" cap="none" strike="noStrike">
+          <a:solidFill>
+            <a:srgbClr val="000000"/>
+          </a:solidFill>
+          <a:latin typeface="Arial"/>
+          <a:ea typeface="Arial"/>
+          <a:cs typeface="Arial"/>
+          <a:sym typeface="Arial"/>
+        </a:defRPr>
+      </a:lvl1pPr>
+      <a:lvl2pPr lvl="1" marR="0" rtl="0" algn="l">
+        <a:lnSpc>
+          <a:spcPct val="100000"/>
+        </a:lnSpc>
+        <a:spcBef>
+          <a:spcPts val="0"/>
+        </a:spcBef>
+        <a:spcAft>
+          <a:spcPts val="0"/>
+        </a:spcAft>
+        <a:buClr>
+          <a:srgbClr val="000000"/>
+        </a:buClr>
+        <a:buFont typeface="Arial"/>
+        <a:defRPr b="0" i="0" sz="1400" u="none" cap="none" strike="noStrike">
+          <a:solidFill>
+            <a:srgbClr val="000000"/>
+          </a:solidFill>
+          <a:latin typeface="Arial"/>
+          <a:ea typeface="Arial"/>
+          <a:cs typeface="Arial"/>
+          <a:sym typeface="Arial"/>
+        </a:defRPr>
+      </a:lvl2pPr>
+      <a:lvl3pPr lvl="2" marR="0" rtl="0" algn="l">
+        <a:lnSpc>
+          <a:spcPct val="100000"/>
+        </a:lnSpc>
+        <a:spcBef>
+          <a:spcPts val="0"/>
+        </a:spcBef>
+        <a:spcAft>
+          <a:spcPts val="0"/>
+        </a:spcAft>
+        <a:buClr>
+          <a:srgbClr val="000000"/>
+        </a:buClr>
+        <a:buFont typeface="Arial"/>
+        <a:defRPr b="0" i="0" sz="1400" u="none" cap="none" strike="noStrike">
+          <a:solidFill>
+            <a:srgbClr val="000000"/>
+          </a:solidFill>
+          <a:latin typeface="Arial"/>
+          <a:ea typeface="Arial"/>
+          <a:cs typeface="Arial"/>
+          <a:sym typeface="Arial"/>
+        </a:defRPr>
+      </a:lvl3pPr>
+      <a:lvl4pPr lvl="3" marR="0" rtl="0" algn="l">
+        <a:lnSpc>
+          <a:spcPct val="100000"/>
+        </a:lnSpc>
+        <a:spcBef>
+          <a:spcPts val="0"/>
+        </a:spcBef>
+        <a:spcAft>
+          <a:spcPts val="0"/>
+        </a:spcAft>
+        <a:buClr>
+          <a:srgbClr val="000000"/>
+        </a:buClr>
+        <a:buFont typeface="Arial"/>
+        <a:defRPr b="0" i="0" sz="1400" u="none" cap="none" strike="noStrike">
+          <a:solidFill>
+            <a:srgbClr val="000000"/>
+          </a:solidFill>
+          <a:latin typeface="Arial"/>
+          <a:ea typeface="Arial"/>
+          <a:cs typeface="Arial"/>
+          <a:sym typeface="Arial"/>
+        </a:defRPr>
+      </a:lvl4pPr>
+      <a:lvl5pPr lvl="4" marR="0" rtl="0" algn="l">
+        <a:lnSpc>
+          <a:spcPct val="100000"/>
+        </a:lnSpc>
+        <a:spcBef>
+          <a:spcPts val="0"/>
+        </a:spcBef>
+        <a:spcAft>
+          <a:spcPts val="0"/>
+        </a:spcAft>
+        <a:buClr>
+          <a:srgbClr val="000000"/>
+        </a:buClr>
+        <a:buFont typeface="Arial"/>
+        <a:defRPr b="0" i="0" sz="1400" u="none" cap="none" strike="noStrike">
+          <a:solidFill>
+            <a:srgbClr val="000000"/>
+          </a:solidFill>
+          <a:latin typeface="Arial"/>
+          <a:ea typeface="Arial"/>
+          <a:cs typeface="Arial"/>
+          <a:sym typeface="Arial"/>
+        </a:defRPr>
+      </a:lvl5pPr>
+      <a:lvl6pPr lvl="5" marR="0" rtl="0" algn="l">
+        <a:lnSpc>
+          <a:spcPct val="100000"/>
+        </a:lnSpc>
+        <a:spcBef>
+          <a:spcPts val="0"/>
+        </a:spcBef>
+        <a:spcAft>
+          <a:spcPts val="0"/>
+        </a:spcAft>
+        <a:buClr>
+          <a:srgbClr val="000000"/>
+        </a:buClr>
+        <a:buFont typeface="Arial"/>
+        <a:defRPr b="0" i="0" sz="1400" u="none" cap="none" strike="noStrike">
+          <a:solidFill>
+            <a:srgbClr val="000000"/>
+          </a:solidFill>
+          <a:latin typeface="Arial"/>
+          <a:ea typeface="Arial"/>
+          <a:cs typeface="Arial"/>
+          <a:sym typeface="Arial"/>
+        </a:defRPr>
+      </a:lvl6pPr>
+      <a:lvl7pPr lvl="6" marR="0" rtl="0" algn="l">
+        <a:lnSpc>
+          <a:spcPct val="100000"/>
+        </a:lnSpc>
+        <a:spcBef>
+          <a:spcPts val="0"/>
+        </a:spcBef>
+        <a:spcAft>
+          <a:spcPts val="0"/>
+        </a:spcAft>
+        <a:buClr>
+          <a:srgbClr val="000000"/>
+        </a:buClr>
+        <a:buFont typeface="Arial"/>
+        <a:defRPr b="0" i="0" sz="1400" u="none" cap="none" strike="noStrike">
+          <a:solidFill>
+            <a:srgbClr val="000000"/>
+          </a:solidFill>
+          <a:latin typeface="Arial"/>
+          <a:ea typeface="Arial"/>
+          <a:cs typeface="Arial"/>
+          <a:sym typeface="Arial"/>
+        </a:defRPr>
+      </a:lvl7pPr>
+      <a:lvl8pPr lvl="7" marR="0" rtl="0" algn="l">
+        <a:lnSpc>
+          <a:spcPct val="100000"/>
+        </a:lnSpc>
+        <a:spcBef>
+          <a:spcPts val="0"/>
+        </a:spcBef>
+        <a:spcAft>
+          <a:spcPts val="0"/>
+        </a:spcAft>
+        <a:buClr>
+          <a:srgbClr val="000000"/>
+        </a:buClr>
+        <a:buFont typeface="Arial"/>
+        <a:defRPr b="0" i="0" sz="1400" u="none" cap="none" strike="noStrike">
+          <a:solidFill>
+            <a:srgbClr val="000000"/>
+          </a:solidFill>
+          <a:latin typeface="Arial"/>
+          <a:ea typeface="Arial"/>
+          <a:cs typeface="Arial"/>
+          <a:sym typeface="Arial"/>
+        </a:defRPr>
+      </a:lvl8pPr>
+      <a:lvl9pPr lvl="8" marR="0" rtl="0" algn="l">
+        <a:lnSpc>
+          <a:spcPct val="100000"/>
+        </a:lnSpc>
+        <a:spcBef>
+          <a:spcPts val="0"/>
+        </a:spcBef>
+        <a:spcAft>
+          <a:spcPts val="0"/>
+        </a:spcAft>
+        <a:buClr>
+          <a:srgbClr val="000000"/>
+        </a:buClr>
+        <a:buFont typeface="Arial"/>
+        <a:defRPr b="0" i="0" sz="1400" u="none" cap="none" strike="noStrike">
+          <a:solidFill>
+            <a:srgbClr val="000000"/>
+          </a:solidFill>
+          <a:latin typeface="Arial"/>
+          <a:ea typeface="Arial"/>
+          <a:cs typeface="Arial"/>
+          <a:sym typeface="Arial"/>
+        </a:defRPr>
+      </a:lvl9pPr>
+    </p:titleStyle>
+    <p:bodyStyle>
+      <a:defPPr lvl="0" marR="0" rtl="0" algn="l">
+        <a:lnSpc>
+          <a:spcPct val="100000"/>
+        </a:lnSpc>
+        <a:spcBef>
+          <a:spcPts val="0"/>
+        </a:spcBef>
+        <a:spcAft>
+          <a:spcPts val="0"/>
+        </a:spcAft>
+      </a:defPPr>
+      <a:lvl1pPr lvl="0" marR="0" rtl="0" algn="l">
+        <a:lnSpc>
+          <a:spcPct val="100000"/>
+        </a:lnSpc>
+        <a:spcBef>
+          <a:spcPts val="0"/>
+        </a:spcBef>
+        <a:spcAft>
+          <a:spcPts val="0"/>
+        </a:spcAft>
+        <a:buClr>
+          <a:srgbClr val="000000"/>
+        </a:buClr>
+        <a:buFont typeface="Arial"/>
+        <a:defRPr b="0" i="0" sz="1400" u="none" cap="none" strike="noStrike">
+          <a:solidFill>
+            <a:srgbClr val="000000"/>
+          </a:solidFill>
+          <a:latin typeface="Arial"/>
+          <a:ea typeface="Arial"/>
+          <a:cs typeface="Arial"/>
+          <a:sym typeface="Arial"/>
+        </a:defRPr>
+      </a:lvl1pPr>
+      <a:lvl2pPr lvl="1" marR="0" rtl="0" algn="l">
+        <a:lnSpc>
+          <a:spcPct val="100000"/>
+        </a:lnSpc>
+        <a:spcBef>
+          <a:spcPts val="0"/>
+        </a:spcBef>
+        <a:spcAft>
+          <a:spcPts val="0"/>
+        </a:spcAft>
+        <a:buClr>
+          <a:srgbClr val="000000"/>
+        </a:buClr>
+        <a:buFont typeface="Arial"/>
+        <a:defRPr b="0" i="0" sz="1400" u="none" cap="none" strike="noStrike">
+          <a:solidFill>
+            <a:srgbClr val="000000"/>
+          </a:solidFill>
+          <a:latin typeface="Arial"/>
+          <a:ea typeface="Arial"/>
+          <a:cs typeface="Arial"/>
+          <a:sym typeface="Arial"/>
+        </a:defRPr>
+      </a:lvl2pPr>
+      <a:lvl3pPr lvl="2" marR="0" rtl="0" algn="l">
+        <a:lnSpc>
+          <a:spcPct val="100000"/>
+        </a:lnSpc>
+        <a:spcBef>
+          <a:spcPts val="0"/>
+        </a:spcBef>
+        <a:spcAft>
+          <a:spcPts val="0"/>
+        </a:spcAft>
+        <a:buClr>
+          <a:srgbClr val="000000"/>
+        </a:buClr>
+        <a:buFont typeface="Arial"/>
+        <a:defRPr b="0" i="0" sz="1400" u="none" cap="none" strike="noStrike">
+          <a:solidFill>
+            <a:srgbClr val="000000"/>
+          </a:solidFill>
+          <a:latin typeface="Arial"/>
+          <a:ea typeface="Arial"/>
+          <a:cs typeface="Arial"/>
+          <a:sym typeface="Arial"/>
+        </a:defRPr>
+      </a:lvl3pPr>
+      <a:lvl4pPr lvl="3" marR="0" rtl="0" algn="l">
+        <a:lnSpc>
+          <a:spcPct val="100000"/>
+        </a:lnSpc>
+        <a:spcBef>
+          <a:spcPts val="0"/>
+        </a:spcBef>
+        <a:spcAft>
+          <a:spcPts val="0"/>
+        </a:spcAft>
+        <a:buClr>
+          <a:srgbClr val="000000"/>
+        </a:buClr>
+        <a:buFont typeface="Arial"/>
+        <a:defRPr b="0" i="0" sz="1400" u="none" cap="none" strike="noStrike">
+          <a:solidFill>
+            <a:srgbClr val="000000"/>
+          </a:solidFill>
+          <a:latin typeface="Arial"/>
+          <a:ea typeface="Arial"/>
+          <a:cs typeface="Arial"/>
+          <a:sym typeface="Arial"/>
+        </a:defRPr>
+      </a:lvl4pPr>
+      <a:lvl5pPr lvl="4" marR="0" rtl="0" algn="l">
+        <a:lnSpc>
+          <a:spcPct val="100000"/>
+        </a:lnSpc>
+        <a:spcBef>
+          <a:spcPts val="0"/>
+        </a:spcBef>
+        <a:spcAft>
+          <a:spcPts val="0"/>
+        </a:spcAft>
+        <a:buClr>
+          <a:srgbClr val="000000"/>
+        </a:buClr>
+        <a:buFont typeface="Arial"/>
+        <a:defRPr b="0" i="0" sz="1400" u="none" cap="none" strike="noStrike">
+          <a:solidFill>
+            <a:srgbClr val="000000"/>
+          </a:solidFill>
+          <a:latin typeface="Arial"/>
+          <a:ea typeface="Arial"/>
+          <a:cs typeface="Arial"/>
+          <a:sym typeface="Arial"/>
+        </a:defRPr>
+      </a:lvl5pPr>
+      <a:lvl6pPr lvl="5" marR="0" rtl="0" algn="l">
+        <a:lnSpc>
+          <a:spcPct val="100000"/>
+        </a:lnSpc>
+        <a:spcBef>
+          <a:spcPts val="0"/>
+        </a:spcBef>
+        <a:spcAft>
+          <a:spcPts val="0"/>
+        </a:spcAft>
+        <a:buClr>
+          <a:srgbClr val="000000"/>
+        </a:buClr>
+        <a:buFont typeface="Arial"/>
+        <a:defRPr b="0" i="0" sz="1400" u="none" cap="none" strike="noStrike">
+          <a:solidFill>
+            <a:srgbClr val="000000"/>
+          </a:solidFill>
+          <a:latin typeface="Arial"/>
+          <a:ea typeface="Arial"/>
+          <a:cs typeface="Arial"/>
+          <a:sym typeface="Arial"/>
+        </a:defRPr>
+      </a:lvl6pPr>
+      <a:lvl7pPr lvl="6" marR="0" rtl="0" algn="l">
+        <a:lnSpc>
+          <a:spcPct val="100000"/>
+        </a:lnSpc>
+        <a:spcBef>
+          <a:spcPts val="0"/>
+        </a:spcBef>
+        <a:spcAft>
+          <a:spcPts val="0"/>
+        </a:spcAft>
+        <a:buClr>
+          <a:srgbClr val="000000"/>
+        </a:buClr>
+        <a:buFont typeface="Arial"/>
+        <a:defRPr b="0" i="0" sz="1400" u="none" cap="none" strike="noStrike">
+          <a:solidFill>
+            <a:srgbClr val="000000"/>
+          </a:solidFill>
+          <a:latin typeface="Arial"/>
+          <a:ea typeface="Arial"/>
+          <a:cs typeface="Arial"/>
+          <a:sym typeface="Arial"/>
+        </a:defRPr>
+      </a:lvl7pPr>
+      <a:lvl8pPr lvl="7" marR="0" rtl="0" algn="l">
+        <a:lnSpc>
+          <a:spcPct val="100000"/>
+        </a:lnSpc>
+        <a:spcBef>
+          <a:spcPts val="0"/>
+        </a:spcBef>
+        <a:spcAft>
+          <a:spcPts val="0"/>
+        </a:spcAft>
+        <a:buClr>
+          <a:srgbClr val="000000"/>
+        </a:buClr>
+        <a:buFont typeface="Arial"/>
+        <a:defRPr b="0" i="0" sz="1400" u="none" cap="none" strike="noStrike">
+          <a:solidFill>
+            <a:srgbClr val="000000"/>
+          </a:solidFill>
+          <a:latin typeface="Arial"/>
+          <a:ea typeface="Arial"/>
+          <a:cs typeface="Arial"/>
+          <a:sym typeface="Arial"/>
+        </a:defRPr>
+      </a:lvl8pPr>
+      <a:lvl9pPr lvl="8" marR="0" rtl="0" algn="l">
+        <a:lnSpc>
+          <a:spcPct val="100000"/>
+        </a:lnSpc>
+        <a:spcBef>
+          <a:spcPts val="0"/>
+        </a:spcBef>
+        <a:spcAft>
+          <a:spcPts val="0"/>
+        </a:spcAft>
+        <a:buClr>
+          <a:srgbClr val="000000"/>
+        </a:buClr>
+        <a:buFont typeface="Arial"/>
+        <a:defRPr b="0" i="0" sz="1400" u="none" cap="none" strike="noStrike">
+          <a:solidFill>
+            <a:srgbClr val="000000"/>
+          </a:solidFill>
+          <a:latin typeface="Arial"/>
+          <a:ea typeface="Arial"/>
+          <a:cs typeface="Arial"/>
+          <a:sym typeface="Arial"/>
+        </a:defRPr>
+      </a:lvl9pPr>
+    </p:bodyStyle>
+    <p:otherStyle>
+      <a:defPPr lvl="0" marR="0" rtl="0" algn="l">
+        <a:lnSpc>
+          <a:spcPct val="100000"/>
+        </a:lnSpc>
+        <a:spcBef>
+          <a:spcPts val="0"/>
+        </a:spcBef>
+        <a:spcAft>
+          <a:spcPts val="0"/>
+        </a:spcAft>
+      </a:defPPr>
+      <a:lvl1pPr lvl="0" marR="0" rtl="0" algn="l">
+        <a:lnSpc>
+          <a:spcPct val="100000"/>
+        </a:lnSpc>
+        <a:spcBef>
+          <a:spcPts val="0"/>
+        </a:spcBef>
+        <a:spcAft>
+          <a:spcPts val="0"/>
+        </a:spcAft>
+        <a:buClr>
+          <a:srgbClr val="000000"/>
+        </a:buClr>
+        <a:buFont typeface="Arial"/>
+        <a:defRPr b="0" i="0" sz="1400" u="none" cap="none" strike="noStrike">
+          <a:solidFill>
+            <a:srgbClr val="000000"/>
+          </a:solidFill>
+          <a:latin typeface="Arial"/>
+          <a:ea typeface="Arial"/>
+          <a:cs typeface="Arial"/>
+          <a:sym typeface="Arial"/>
+        </a:defRPr>
+      </a:lvl1pPr>
+      <a:lvl2pPr lvl="1" marR="0" rtl="0" algn="l">
+        <a:lnSpc>
+          <a:spcPct val="100000"/>
+        </a:lnSpc>
+        <a:spcBef>
+          <a:spcPts val="0"/>
+        </a:spcBef>
+        <a:spcAft>
+          <a:spcPts val="0"/>
+        </a:spcAft>
+        <a:buClr>
+          <a:srgbClr val="000000"/>
+        </a:buClr>
+        <a:buFont typeface="Arial"/>
+        <a:defRPr b="0" i="0" sz="1400" u="none" cap="none" strike="noStrike">
+          <a:solidFill>
+            <a:srgbClr val="000000"/>
+          </a:solidFill>
+          <a:latin typeface="Arial"/>
+          <a:ea typeface="Arial"/>
+          <a:cs typeface="Arial"/>
+          <a:sym typeface="Arial"/>
+        </a:defRPr>
+      </a:lvl2pPr>
+      <a:lvl3pPr lvl="2" marR="0" rtl="0" algn="l">
+        <a:lnSpc>
+          <a:spcPct val="100000"/>
+        </a:lnSpc>
+        <a:spcBef>
+          <a:spcPts val="0"/>
+        </a:spcBef>
+        <a:spcAft>
+          <a:spcPts val="0"/>
+        </a:spcAft>
+        <a:buClr>
+          <a:srgbClr val="000000"/>
+        </a:buClr>
+        <a:buFont typeface="Arial"/>
+        <a:defRPr b="0" i="0" sz="1400" u="none" cap="none" strike="noStrike">
+          <a:solidFill>
+            <a:srgbClr val="000000"/>
+          </a:solidFill>
+          <a:latin typeface="Arial"/>
+          <a:ea typeface="Arial"/>
+          <a:cs typeface="Arial"/>
+          <a:sym typeface="Arial"/>
+        </a:defRPr>
+      </a:lvl3pPr>
+      <a:lvl4pPr lvl="3" marR="0" rtl="0" algn="l">
+        <a:lnSpc>
+          <a:spcPct val="100000"/>
+        </a:lnSpc>
+        <a:spcBef>
+          <a:spcPts val="0"/>
+        </a:spcBef>
+        <a:spcAft>
+          <a:spcPts val="0"/>
+        </a:spcAft>
+        <a:buClr>
+          <a:srgbClr val="000000"/>
+        </a:buClr>
+        <a:buFont typeface="Arial"/>
+        <a:defRPr b="0" i="0" sz="1400" u="none" cap="none" strike="noStrike">
+          <a:solidFill>
+            <a:srgbClr val="000000"/>
+          </a:solidFill>
+          <a:latin typeface="Arial"/>
+          <a:ea typeface="Arial"/>
+          <a:cs typeface="Arial"/>
+          <a:sym typeface="Arial"/>
+        </a:defRPr>
+      </a:lvl4pPr>
+      <a:lvl5pPr lvl="4" marR="0" rtl="0" algn="l">
+        <a:lnSpc>
+          <a:spcPct val="100000"/>
+        </a:lnSpc>
+        <a:spcBef>
+          <a:spcPts val="0"/>
+        </a:spcBef>
+        <a:spcAft>
+          <a:spcPts val="0"/>
+        </a:spcAft>
+        <a:buClr>
+          <a:srgbClr val="000000"/>
+        </a:buClr>
+        <a:buFont typeface="Arial"/>
+        <a:defRPr b="0" i="0" sz="1400" u="none" cap="none" strike="noStrike">
+          <a:solidFill>
+            <a:srgbClr val="000000"/>
+          </a:solidFill>
+          <a:latin typeface="Arial"/>
+          <a:ea typeface="Arial"/>
+          <a:cs typeface="Arial"/>
+          <a:sym typeface="Arial"/>
+        </a:defRPr>
+      </a:lvl5pPr>
+      <a:lvl6pPr lvl="5" marR="0" rtl="0" algn="l">
+        <a:lnSpc>
+          <a:spcPct val="100000"/>
+        </a:lnSpc>
+        <a:spcBef>
+          <a:spcPts val="0"/>
+        </a:spcBef>
+        <a:spcAft>
+          <a:spcPts val="0"/>
+        </a:spcAft>
+        <a:buClr>
+          <a:srgbClr val="000000"/>
+        </a:buClr>
+        <a:buFont typeface="Arial"/>
+        <a:defRPr b="0" i="0" sz="1400" u="none" cap="none" strike="noStrike">
+          <a:solidFill>
+            <a:srgbClr val="000000"/>
+          </a:solidFill>
+          <a:latin typeface="Arial"/>
+          <a:ea typeface="Arial"/>
+          <a:cs typeface="Arial"/>
+          <a:sym typeface="Arial"/>
+        </a:defRPr>
+      </a:lvl6pPr>
+      <a:lvl7pPr lvl="6" marR="0" rtl="0" algn="l">
+        <a:lnSpc>
+          <a:spcPct val="100000"/>
+        </a:lnSpc>
+        <a:spcBef>
+          <a:spcPts val="0"/>
+        </a:spcBef>
+        <a:spcAft>
+          <a:spcPts val="0"/>
+        </a:spcAft>
+        <a:buClr>
+          <a:srgbClr val="000000"/>
+        </a:buClr>
+        <a:buFont typeface="Arial"/>
+        <a:defRPr b="0" i="0" sz="1400" u="none" cap="none" strike="noStrike">
+          <a:solidFill>
+            <a:srgbClr val="000000"/>
+          </a:solidFill>
+          <a:latin typeface="Arial"/>
+          <a:ea typeface="Arial"/>
+          <a:cs typeface="Arial"/>
+          <a:sym typeface="Arial"/>
+        </a:defRPr>
+      </a:lvl7pPr>
+      <a:lvl8pPr lvl="7" marR="0" rtl="0" algn="l">
+        <a:lnSpc>
+          <a:spcPct val="100000"/>
+        </a:lnSpc>
+        <a:spcBef>
+          <a:spcPts val="0"/>
+        </a:spcBef>
+        <a:spcAft>
+          <a:spcPts val="0"/>
+        </a:spcAft>
+        <a:buClr>
+          <a:srgbClr val="000000"/>
+        </a:buClr>
+        <a:buFont typeface="Arial"/>
+        <a:defRPr b="0" i="0" sz="1400" u="none" cap="none" strike="noStrike">
+          <a:solidFill>
+            <a:srgbClr val="000000"/>
+          </a:solidFill>
+          <a:latin typeface="Arial"/>
+          <a:ea typeface="Arial"/>
+          <a:cs typeface="Arial"/>
+          <a:sym typeface="Arial"/>
+        </a:defRPr>
+      </a:lvl8pPr>
+      <a:lvl9pPr lvl="8" marR="0" rtl="0" algn="l">
+        <a:lnSpc>
+          <a:spcPct val="100000"/>
+        </a:lnSpc>
+        <a:spcBef>
+          <a:spcPts val="0"/>
+        </a:spcBef>
+        <a:spcAft>
+          <a:spcPts val="0"/>
+        </a:spcAft>
+        <a:buClr>
+          <a:srgbClr val="000000"/>
+        </a:buClr>
+        <a:buFont typeface="Arial"/>
+        <a:defRPr b="0" i="0" sz="1400" u="none" cap="none" strike="noStrike">
+          <a:solidFill>
+            <a:srgbClr val="000000"/>
+          </a:solidFill>
+          <a:latin typeface="Arial"/>
+          <a:ea typeface="Arial"/>
+          <a:cs typeface="Arial"/>
+          <a:sym typeface="Arial"/>
+        </a:defRPr>
+      </a:lvl9pPr>
+    </p:otherStyle>
+  </p:txStyles>
+</p:sldMaster>
+</file>
+
+<file path=ppt/slides/slide1.xml><?xml version="1.0" encoding="utf-8"?>
+<p:sld xmlns:a="http://schemas.openxmlformats.org/drawingml/2006/main" xmlns:r="http://schemas.openxmlformats.org/officeDocument/2006/relationships" xmlns:mc="http://schemas.openxmlformats.org/markup-compatibility/2006" xmlns:mv="urn:schemas-microsoft-com:mac:vml" xmlns:p="http://schemas.openxmlformats.org/presentationml/2006/main" xmlns:c="http://schemas.openxmlformats.org/drawingml/2006/chart" xmlns:dgm="http://schemas.openxmlformats.org/drawingml/2006/diagram" xmlns:o="urn:schemas-microsoft-com:office:office" xmlns:v="urn:schemas-microsoft-com:vml" xmlns:pvml="urn:schemas-microsoft-com:office:powerpoint" xmlns:com="http://schemas.openxmlformats.org/drawingml/2006/compatibility" xmlns:p14="http://schemas.microsoft.com/office/powerpoint/2010/main" xmlns:p15="http://schemas.microsoft.com/office/powerpoint/2012/main" xmlns:ahyp="http://schemas.microsoft.com/office/drawing/2018/hyperlinkcolor">
+  <p:cSld>
+    <p:spTree>
+      <p:nvGrpSpPr>
+        <p:cNvPr id="92" name="Shape 92"/>
+        <p:cNvGrpSpPr/>
+        <p:nvPr/>
+      </p:nvGrpSpPr>
+      <p:grpSpPr>
+        <a:xfrm>
+          <a:off x="0" y="0"/>
+          <a:ext cx="0" cy="0"/>
+          <a:chOff x="0" y="0"/>
+          <a:chExt cx="0" cy="0"/>
+        </a:xfrm>
+      </p:grpSpPr>
+      <p:sp>
+        <p:nvSpPr>
+          <p:cNvPr id="93" name="Google Shape;93;p15"/>
           <p:cNvSpPr txBox="1"/>
           <p:nvPr>
             <p:ph type="ctrTitle"/>
@@ -8893,7 +12651,7 @@
       </p:sp>
       <p:sp>
         <p:nvSpPr>
-          <p:cNvPr id="52" name="Google Shape;52;p8"/>
+          <p:cNvPr id="94" name="Google Shape;94;p15"/>
           <p:cNvSpPr txBox="1"/>
           <p:nvPr>
             <p:ph idx="1" type="subTitle"/>
@@ -9000,7 +12758,7 @@
   <p:cSld>
     <p:spTree>
       <p:nvGrpSpPr>
-        <p:cNvPr id="110" name="Shape 110"/>
+        <p:cNvPr id="152" name="Shape 152"/>
         <p:cNvGrpSpPr/>
         <p:nvPr/>
       </p:nvGrpSpPr>
@@ -9014,7 +12772,7 @@
       </p:grpSpPr>
       <p:sp>
         <p:nvSpPr>
-          <p:cNvPr id="111" name="Google Shape;111;p17"/>
+          <p:cNvPr id="153" name="Google Shape;153;p24"/>
           <p:cNvSpPr txBox="1"/>
           <p:nvPr>
             <p:ph type="title"/>
@@ -9054,7 +12812,7 @@
       </p:sp>
       <p:sp>
         <p:nvSpPr>
-          <p:cNvPr id="112" name="Google Shape;112;p17"/>
+          <p:cNvPr id="154" name="Google Shape;154;p24"/>
           <p:cNvSpPr txBox="1"/>
           <p:nvPr>
             <p:ph idx="12" type="sldNum"/>
@@ -9127,7 +12885,7 @@
       </p:sp>
       <p:pic>
         <p:nvPicPr>
-          <p:cNvPr id="113" name="Google Shape;113;p17"/>
+          <p:cNvPr id="155" name="Google Shape;155;p24"/>
           <p:cNvPicPr preferRelativeResize="0"/>
           <p:nvPr/>
         </p:nvPicPr>
@@ -9141,8 +12899,8 @@
         </p:blipFill>
         <p:spPr>
           <a:xfrm>
-            <a:off x="274320" y="914400"/>
-            <a:ext cx="8595360" cy="3495446"/>
+            <a:off x="0" y="731520"/>
+            <a:ext cx="9144001" cy="3931920"/>
           </a:xfrm>
           <a:prstGeom prst="rect">
             <a:avLst/>
@@ -9166,7 +12924,7 @@
   <p:cSld>
     <p:spTree>
       <p:nvGrpSpPr>
-        <p:cNvPr id="117" name="Shape 117"/>
+        <p:cNvPr id="159" name="Shape 159"/>
         <p:cNvGrpSpPr/>
         <p:nvPr/>
       </p:nvGrpSpPr>
@@ -9180,7 +12938,7 @@
       </p:grpSpPr>
       <p:sp>
         <p:nvSpPr>
-          <p:cNvPr id="118" name="Google Shape;118;p18"/>
+          <p:cNvPr id="160" name="Google Shape;160;p25"/>
           <p:cNvSpPr txBox="1"/>
           <p:nvPr>
             <p:ph type="title"/>
@@ -9220,7 +12978,7 @@
       </p:sp>
       <p:sp>
         <p:nvSpPr>
-          <p:cNvPr id="119" name="Google Shape;119;p18"/>
+          <p:cNvPr id="161" name="Google Shape;161;p25"/>
           <p:cNvSpPr txBox="1"/>
           <p:nvPr>
             <p:ph idx="12" type="sldNum"/>
@@ -9293,7 +13051,7 @@
       </p:sp>
       <p:pic>
         <p:nvPicPr>
-          <p:cNvPr id="120" name="Google Shape;120;p18"/>
+          <p:cNvPr id="162" name="Google Shape;162;p25"/>
           <p:cNvPicPr preferRelativeResize="0"/>
           <p:nvPr/>
         </p:nvPicPr>
@@ -9307,8 +13065,8 @@
         </p:blipFill>
         <p:spPr>
           <a:xfrm>
-            <a:off x="274320" y="914400"/>
-            <a:ext cx="8595360" cy="3495446"/>
+            <a:off x="0" y="731520"/>
+            <a:ext cx="9144001" cy="3931920"/>
           </a:xfrm>
           <a:prstGeom prst="rect">
             <a:avLst/>
@@ -9332,7 +13090,7 @@
   <p:cSld>
     <p:spTree>
       <p:nvGrpSpPr>
-        <p:cNvPr id="124" name="Shape 124"/>
+        <p:cNvPr id="166" name="Shape 166"/>
         <p:cNvGrpSpPr/>
         <p:nvPr/>
       </p:nvGrpSpPr>
@@ -9346,7 +13104,7 @@
       </p:grpSpPr>
       <p:sp>
         <p:nvSpPr>
-          <p:cNvPr id="125" name="Google Shape;125;p19"/>
+          <p:cNvPr id="167" name="Google Shape;167;p26"/>
           <p:cNvSpPr txBox="1"/>
           <p:nvPr>
             <p:ph type="title"/>
@@ -9386,7 +13144,7 @@
       </p:sp>
       <p:sp>
         <p:nvSpPr>
-          <p:cNvPr id="126" name="Google Shape;126;p19"/>
+          <p:cNvPr id="168" name="Google Shape;168;p26"/>
           <p:cNvSpPr txBox="1"/>
           <p:nvPr>
             <p:ph idx="12" type="sldNum"/>
@@ -9459,7 +13217,7 @@
       </p:sp>
       <p:pic>
         <p:nvPicPr>
-          <p:cNvPr id="127" name="Google Shape;127;p19"/>
+          <p:cNvPr id="169" name="Google Shape;169;p26"/>
           <p:cNvPicPr preferRelativeResize="0"/>
           <p:nvPr/>
         </p:nvPicPr>
@@ -9473,8 +13231,8 @@
         </p:blipFill>
         <p:spPr>
           <a:xfrm>
-            <a:off x="274320" y="914400"/>
-            <a:ext cx="8595360" cy="3495446"/>
+            <a:off x="0" y="731520"/>
+            <a:ext cx="9144001" cy="3931920"/>
           </a:xfrm>
           <a:prstGeom prst="rect">
             <a:avLst/>
@@ -9498,7 +13256,7 @@
   <p:cSld>
     <p:spTree>
       <p:nvGrpSpPr>
-        <p:cNvPr id="131" name="Shape 131"/>
+        <p:cNvPr id="173" name="Shape 173"/>
         <p:cNvGrpSpPr/>
         <p:nvPr/>
       </p:nvGrpSpPr>
@@ -9512,7 +13270,7 @@
       </p:grpSpPr>
       <p:sp>
         <p:nvSpPr>
-          <p:cNvPr id="132" name="Google Shape;132;p20"/>
+          <p:cNvPr id="174" name="Google Shape;174;p27"/>
           <p:cNvSpPr txBox="1"/>
           <p:nvPr>
             <p:ph type="title"/>
@@ -9552,7 +13310,7 @@
       </p:sp>
       <p:sp>
         <p:nvSpPr>
-          <p:cNvPr id="133" name="Google Shape;133;p20"/>
+          <p:cNvPr id="175" name="Google Shape;175;p27"/>
           <p:cNvSpPr txBox="1"/>
           <p:nvPr>
             <p:ph idx="1" type="body"/>
@@ -9738,7 +13496,7 @@
       </p:sp>
       <p:sp>
         <p:nvSpPr>
-          <p:cNvPr id="134" name="Google Shape;134;p20"/>
+          <p:cNvPr id="176" name="Google Shape;176;p27"/>
           <p:cNvSpPr txBox="1"/>
           <p:nvPr>
             <p:ph idx="12" type="sldNum"/>
@@ -9811,7 +13569,7 @@
       </p:sp>
       <p:sp>
         <p:nvSpPr>
-          <p:cNvPr id="135" name="Google Shape;135;p20"/>
+          <p:cNvPr id="177" name="Google Shape;177;p27"/>
           <p:cNvSpPr txBox="1"/>
           <p:nvPr/>
         </p:nvSpPr>
@@ -9869,7 +13627,7 @@
       </p:sp>
       <p:pic>
         <p:nvPicPr>
-          <p:cNvPr id="136" name="Google Shape;136;p20"/>
+          <p:cNvPr id="178" name="Google Shape;178;p27"/>
           <p:cNvPicPr preferRelativeResize="0"/>
           <p:nvPr/>
         </p:nvPicPr>
@@ -9908,7 +13666,7 @@
   <p:cSld>
     <p:spTree>
       <p:nvGrpSpPr>
-        <p:cNvPr id="140" name="Shape 140"/>
+        <p:cNvPr id="182" name="Shape 182"/>
         <p:cNvGrpSpPr/>
         <p:nvPr/>
       </p:nvGrpSpPr>
@@ -9922,7 +13680,7 @@
       </p:grpSpPr>
       <p:sp>
         <p:nvSpPr>
-          <p:cNvPr id="141" name="Google Shape;141;p21"/>
+          <p:cNvPr id="183" name="Google Shape;183;p28"/>
           <p:cNvSpPr txBox="1"/>
           <p:nvPr>
             <p:ph type="title"/>
@@ -9962,7 +13720,7 @@
       </p:sp>
       <p:sp>
         <p:nvSpPr>
-          <p:cNvPr id="142" name="Google Shape;142;p21"/>
+          <p:cNvPr id="184" name="Google Shape;184;p28"/>
           <p:cNvSpPr txBox="1"/>
           <p:nvPr>
             <p:ph idx="1" type="body"/>
@@ -10072,7 +13830,7 @@
       </p:sp>
       <p:sp>
         <p:nvSpPr>
-          <p:cNvPr id="143" name="Google Shape;143;p21"/>
+          <p:cNvPr id="185" name="Google Shape;185;p28"/>
           <p:cNvSpPr txBox="1"/>
           <p:nvPr>
             <p:ph idx="12" type="sldNum"/>
@@ -10156,7 +13914,7 @@
   <p:cSld>
     <p:spTree>
       <p:nvGrpSpPr>
-        <p:cNvPr id="147" name="Shape 147"/>
+        <p:cNvPr id="189" name="Shape 189"/>
         <p:cNvGrpSpPr/>
         <p:nvPr/>
       </p:nvGrpSpPr>
@@ -10170,7 +13928,7 @@
       </p:grpSpPr>
       <p:pic>
         <p:nvPicPr>
-          <p:cNvPr id="148" name="Google Shape;148;p22"/>
+          <p:cNvPr id="190" name="Google Shape;190;p29"/>
           <p:cNvPicPr preferRelativeResize="0"/>
           <p:nvPr/>
         </p:nvPicPr>
@@ -10198,7 +13956,7 @@
       </p:pic>
       <p:sp>
         <p:nvSpPr>
-          <p:cNvPr id="149" name="Google Shape;149;p22"/>
+          <p:cNvPr id="191" name="Google Shape;191;p29"/>
           <p:cNvSpPr txBox="1"/>
           <p:nvPr>
             <p:ph type="title"/>
@@ -10238,7 +13996,7 @@
       </p:sp>
       <p:sp>
         <p:nvSpPr>
-          <p:cNvPr id="150" name="Google Shape;150;p22"/>
+          <p:cNvPr id="192" name="Google Shape;192;p29"/>
           <p:cNvSpPr txBox="1"/>
           <p:nvPr>
             <p:ph idx="1" type="body"/>
@@ -10278,7 +14036,7 @@
       </p:sp>
       <p:sp>
         <p:nvSpPr>
-          <p:cNvPr id="151" name="Google Shape;151;p22"/>
+          <p:cNvPr id="193" name="Google Shape;193;p29"/>
           <p:cNvSpPr txBox="1"/>
           <p:nvPr>
             <p:ph idx="2" type="body"/>
@@ -10318,7 +14076,7 @@
       </p:sp>
       <p:pic>
         <p:nvPicPr>
-          <p:cNvPr id="152" name="Google Shape;152;p22"/>
+          <p:cNvPr id="194" name="Google Shape;194;p29"/>
           <p:cNvPicPr preferRelativeResize="0"/>
           <p:nvPr/>
         </p:nvPicPr>
@@ -10346,7 +14104,7 @@
       </p:pic>
       <p:sp>
         <p:nvSpPr>
-          <p:cNvPr id="153" name="Google Shape;153;p22"/>
+          <p:cNvPr id="195" name="Google Shape;195;p29"/>
           <p:cNvSpPr txBox="1"/>
           <p:nvPr/>
         </p:nvSpPr>
@@ -10388,7 +14146,7 @@
       </p:sp>
       <p:sp>
         <p:nvSpPr>
-          <p:cNvPr id="154" name="Google Shape;154;p22"/>
+          <p:cNvPr id="196" name="Google Shape;196;p29"/>
           <p:cNvSpPr/>
           <p:nvPr/>
         </p:nvSpPr>
@@ -10437,7 +14195,7 @@
       </p:sp>
       <p:sp>
         <p:nvSpPr>
-          <p:cNvPr id="155" name="Google Shape;155;p22"/>
+          <p:cNvPr id="197" name="Google Shape;197;p29"/>
           <p:cNvSpPr/>
           <p:nvPr/>
         </p:nvSpPr>
@@ -10486,7 +14244,7 @@
       </p:sp>
       <p:sp>
         <p:nvSpPr>
-          <p:cNvPr id="156" name="Google Shape;156;p22"/>
+          <p:cNvPr id="198" name="Google Shape;198;p29"/>
           <p:cNvSpPr txBox="1"/>
           <p:nvPr>
             <p:ph idx="12" type="sldNum"/>
@@ -10571,7 +14329,7 @@
   <p:cSld>
     <p:spTree>
       <p:nvGrpSpPr>
-        <p:cNvPr id="160" name="Shape 160"/>
+        <p:cNvPr id="202" name="Shape 202"/>
         <p:cNvGrpSpPr/>
         <p:nvPr/>
       </p:nvGrpSpPr>
@@ -10585,7 +14343,7 @@
       </p:grpSpPr>
       <p:sp>
         <p:nvSpPr>
-          <p:cNvPr id="161" name="Google Shape;161;p23"/>
+          <p:cNvPr id="203" name="Google Shape;203;p30"/>
           <p:cNvSpPr txBox="1"/>
           <p:nvPr>
             <p:ph type="title"/>
@@ -10625,7 +14383,7 @@
       </p:sp>
       <p:sp>
         <p:nvSpPr>
-          <p:cNvPr id="162" name="Google Shape;162;p23"/>
+          <p:cNvPr id="204" name="Google Shape;204;p30"/>
           <p:cNvSpPr txBox="1"/>
           <p:nvPr>
             <p:ph idx="1" type="body"/>
@@ -10747,7 +14505,7 @@
       </p:sp>
       <p:sp>
         <p:nvSpPr>
-          <p:cNvPr id="163" name="Google Shape;163;p23"/>
+          <p:cNvPr id="205" name="Google Shape;205;p30"/>
           <p:cNvSpPr txBox="1"/>
           <p:nvPr>
             <p:ph idx="12" type="sldNum"/>
@@ -10820,7 +14578,7 @@
       </p:sp>
       <p:pic>
         <p:nvPicPr>
-          <p:cNvPr id="164" name="Google Shape;164;p23"/>
+          <p:cNvPr id="206" name="Google Shape;206;p30"/>
           <p:cNvPicPr preferRelativeResize="0"/>
           <p:nvPr/>
         </p:nvPicPr>
@@ -10859,7 +14617,7 @@
   <p:cSld>
     <p:spTree>
       <p:nvGrpSpPr>
-        <p:cNvPr id="168" name="Shape 168"/>
+        <p:cNvPr id="210" name="Shape 210"/>
         <p:cNvGrpSpPr/>
         <p:nvPr/>
       </p:nvGrpSpPr>
@@ -10873,7 +14631,7 @@
       </p:grpSpPr>
       <p:sp>
         <p:nvSpPr>
-          <p:cNvPr id="169" name="Google Shape;169;p24"/>
+          <p:cNvPr id="211" name="Google Shape;211;p31"/>
           <p:cNvSpPr txBox="1"/>
           <p:nvPr>
             <p:ph type="title"/>
@@ -10913,7 +14671,7 @@
       </p:sp>
       <p:sp>
         <p:nvSpPr>
-          <p:cNvPr id="170" name="Google Shape;170;p24"/>
+          <p:cNvPr id="212" name="Google Shape;212;p31"/>
           <p:cNvSpPr txBox="1"/>
           <p:nvPr>
             <p:ph idx="12" type="sldNum"/>
@@ -10986,7 +14744,7 @@
       </p:sp>
       <p:pic>
         <p:nvPicPr>
-          <p:cNvPr id="171" name="Google Shape;171;p24"/>
+          <p:cNvPr id="213" name="Google Shape;213;p31"/>
           <p:cNvPicPr preferRelativeResize="0"/>
           <p:nvPr/>
         </p:nvPicPr>
@@ -11000,8 +14758,8 @@
         </p:blipFill>
         <p:spPr>
           <a:xfrm>
-            <a:off x="274320" y="914400"/>
-            <a:ext cx="8595360" cy="3495446"/>
+            <a:off x="0" y="731520"/>
+            <a:ext cx="9144001" cy="3931920"/>
           </a:xfrm>
           <a:prstGeom prst="rect">
             <a:avLst/>
@@ -11025,7 +14783,7 @@
   <p:cSld>
     <p:spTree>
       <p:nvGrpSpPr>
-        <p:cNvPr id="175" name="Shape 175"/>
+        <p:cNvPr id="217" name="Shape 217"/>
         <p:cNvGrpSpPr/>
         <p:nvPr/>
       </p:nvGrpSpPr>
@@ -11039,7 +14797,7 @@
       </p:grpSpPr>
       <p:sp>
         <p:nvSpPr>
-          <p:cNvPr id="176" name="Google Shape;176;p25"/>
+          <p:cNvPr id="218" name="Google Shape;218;p32"/>
           <p:cNvSpPr txBox="1"/>
           <p:nvPr>
             <p:ph type="title"/>
@@ -11079,7 +14837,7 @@
       </p:sp>
       <p:sp>
         <p:nvSpPr>
-          <p:cNvPr id="177" name="Google Shape;177;p25"/>
+          <p:cNvPr id="219" name="Google Shape;219;p32"/>
           <p:cNvSpPr txBox="1"/>
           <p:nvPr>
             <p:ph idx="12" type="sldNum"/>
@@ -11152,7 +14910,7 @@
       </p:sp>
       <p:sp>
         <p:nvSpPr>
-          <p:cNvPr id="178" name="Google Shape;178;p25"/>
+          <p:cNvPr id="220" name="Google Shape;220;p32"/>
           <p:cNvSpPr txBox="1"/>
           <p:nvPr>
             <p:ph idx="1" type="body"/>
@@ -11379,7 +15137,7 @@
       </p:sp>
       <p:sp>
         <p:nvSpPr>
-          <p:cNvPr id="179" name="Google Shape;179;p25"/>
+          <p:cNvPr id="221" name="Google Shape;221;p32"/>
           <p:cNvSpPr txBox="1"/>
           <p:nvPr/>
         </p:nvSpPr>
@@ -11432,7 +15190,7 @@
   <p:cSld>
     <p:spTree>
       <p:nvGrpSpPr>
-        <p:cNvPr id="183" name="Shape 183"/>
+        <p:cNvPr id="225" name="Shape 225"/>
         <p:cNvGrpSpPr/>
         <p:nvPr/>
       </p:nvGrpSpPr>
@@ -11446,7 +15204,7 @@
       </p:grpSpPr>
       <p:sp>
         <p:nvSpPr>
-          <p:cNvPr id="184" name="Google Shape;184;p26"/>
+          <p:cNvPr id="226" name="Google Shape;226;p33"/>
           <p:cNvSpPr txBox="1"/>
           <p:nvPr>
             <p:ph type="title"/>
@@ -11486,7 +15244,7 @@
       </p:sp>
       <p:sp>
         <p:nvSpPr>
-          <p:cNvPr id="185" name="Google Shape;185;p26"/>
+          <p:cNvPr id="227" name="Google Shape;227;p33"/>
           <p:cNvSpPr txBox="1"/>
           <p:nvPr>
             <p:ph idx="12" type="sldNum"/>
@@ -11559,7 +15317,7 @@
       </p:sp>
       <p:sp>
         <p:nvSpPr>
-          <p:cNvPr id="186" name="Google Shape;186;p26"/>
+          <p:cNvPr id="228" name="Google Shape;228;p33"/>
           <p:cNvSpPr txBox="1"/>
           <p:nvPr>
             <p:ph idx="1" type="body"/>
@@ -11728,7 +15486,7 @@
   <p:cSld>
     <p:spTree>
       <p:nvGrpSpPr>
-        <p:cNvPr id="56" name="Shape 56"/>
+        <p:cNvPr id="98" name="Shape 98"/>
         <p:cNvGrpSpPr/>
         <p:nvPr/>
       </p:nvGrpSpPr>
@@ -11742,7 +15500,7 @@
       </p:grpSpPr>
       <p:sp>
         <p:nvSpPr>
-          <p:cNvPr id="57" name="Google Shape;57;p9"/>
+          <p:cNvPr id="99" name="Google Shape;99;p16"/>
           <p:cNvSpPr txBox="1"/>
           <p:nvPr>
             <p:ph type="title"/>
@@ -11782,7 +15540,7 @@
       </p:sp>
       <p:sp>
         <p:nvSpPr>
-          <p:cNvPr id="58" name="Google Shape;58;p9"/>
+          <p:cNvPr id="100" name="Google Shape;100;p16"/>
           <p:cNvSpPr txBox="1"/>
           <p:nvPr>
             <p:ph idx="1" type="body"/>
@@ -11830,7 +15588,7 @@
       </p:sp>
       <p:sp>
         <p:nvSpPr>
-          <p:cNvPr id="59" name="Google Shape;59;p9"/>
+          <p:cNvPr id="101" name="Google Shape;101;p16"/>
           <p:cNvSpPr txBox="1"/>
           <p:nvPr>
             <p:ph idx="12" type="sldNum"/>
@@ -11903,7 +15661,7 @@
       </p:sp>
       <p:sp>
         <p:nvSpPr>
-          <p:cNvPr id="60" name="Google Shape;60;p9"/>
+          <p:cNvPr id="102" name="Google Shape;102;p16"/>
           <p:cNvSpPr txBox="1"/>
           <p:nvPr/>
         </p:nvSpPr>
@@ -12111,7 +15869,7 @@
       </p:sp>
       <p:sp>
         <p:nvSpPr>
-          <p:cNvPr id="61" name="Google Shape;61;p9"/>
+          <p:cNvPr id="103" name="Google Shape;103;p16"/>
           <p:cNvSpPr txBox="1"/>
           <p:nvPr/>
         </p:nvSpPr>
@@ -12176,7 +15934,7 @@
   <p:cSld>
     <p:spTree>
       <p:nvGrpSpPr>
-        <p:cNvPr id="190" name="Shape 190"/>
+        <p:cNvPr id="232" name="Shape 232"/>
         <p:cNvGrpSpPr/>
         <p:nvPr/>
       </p:nvGrpSpPr>
@@ -12190,7 +15948,7 @@
       </p:grpSpPr>
       <p:sp>
         <p:nvSpPr>
-          <p:cNvPr id="191" name="Google Shape;191;p27"/>
+          <p:cNvPr id="233" name="Google Shape;233;p34"/>
           <p:cNvSpPr txBox="1"/>
           <p:nvPr>
             <p:ph type="title"/>
@@ -12230,7 +15988,7 @@
       </p:sp>
       <p:sp>
         <p:nvSpPr>
-          <p:cNvPr id="192" name="Google Shape;192;p27"/>
+          <p:cNvPr id="234" name="Google Shape;234;p34"/>
           <p:cNvSpPr txBox="1"/>
           <p:nvPr>
             <p:ph idx="1" type="body"/>
@@ -12370,7 +16128,7 @@
       </p:sp>
       <p:sp>
         <p:nvSpPr>
-          <p:cNvPr id="193" name="Google Shape;193;p27"/>
+          <p:cNvPr id="235" name="Google Shape;235;p34"/>
           <p:cNvSpPr txBox="1"/>
           <p:nvPr>
             <p:ph idx="12" type="sldNum"/>
@@ -12443,7 +16201,7 @@
       </p:sp>
       <p:pic>
         <p:nvPicPr>
-          <p:cNvPr id="194" name="Google Shape;194;p27"/>
+          <p:cNvPr id="236" name="Google Shape;236;p34"/>
           <p:cNvPicPr preferRelativeResize="0"/>
           <p:nvPr/>
         </p:nvPicPr>
@@ -12482,7 +16240,7 @@
   <p:cSld>
     <p:spTree>
       <p:nvGrpSpPr>
-        <p:cNvPr id="198" name="Shape 198"/>
+        <p:cNvPr id="240" name="Shape 240"/>
         <p:cNvGrpSpPr/>
         <p:nvPr/>
       </p:nvGrpSpPr>
@@ -12496,7 +16254,7 @@
       </p:grpSpPr>
       <p:sp>
         <p:nvSpPr>
-          <p:cNvPr id="199" name="Google Shape;199;p28"/>
+          <p:cNvPr id="241" name="Google Shape;241;p35"/>
           <p:cNvSpPr txBox="1"/>
           <p:nvPr>
             <p:ph type="title"/>
@@ -12536,7 +16294,7 @@
       </p:sp>
       <p:sp>
         <p:nvSpPr>
-          <p:cNvPr id="200" name="Google Shape;200;p28"/>
+          <p:cNvPr id="242" name="Google Shape;242;p35"/>
           <p:cNvSpPr txBox="1"/>
           <p:nvPr>
             <p:ph idx="1" type="body"/>
@@ -12669,7 +16427,7 @@
       </p:sp>
       <p:sp>
         <p:nvSpPr>
-          <p:cNvPr id="201" name="Google Shape;201;p28"/>
+          <p:cNvPr id="243" name="Google Shape;243;p35"/>
           <p:cNvSpPr txBox="1"/>
           <p:nvPr>
             <p:ph idx="12" type="sldNum"/>
@@ -12753,7 +16511,7 @@
   <p:cSld>
     <p:spTree>
       <p:nvGrpSpPr>
-        <p:cNvPr id="205" name="Shape 205"/>
+        <p:cNvPr id="247" name="Shape 247"/>
         <p:cNvGrpSpPr/>
         <p:nvPr/>
       </p:nvGrpSpPr>
@@ -12767,7 +16525,7 @@
       </p:grpSpPr>
       <p:sp>
         <p:nvSpPr>
-          <p:cNvPr id="206" name="Google Shape;206;p29"/>
+          <p:cNvPr id="248" name="Google Shape;248;p36"/>
           <p:cNvSpPr txBox="1"/>
           <p:nvPr>
             <p:ph type="title"/>
@@ -12807,7 +16565,7 @@
       </p:sp>
       <p:sp>
         <p:nvSpPr>
-          <p:cNvPr id="207" name="Google Shape;207;p29"/>
+          <p:cNvPr id="249" name="Google Shape;249;p36"/>
           <p:cNvSpPr txBox="1"/>
           <p:nvPr>
             <p:ph idx="1" type="body"/>
@@ -12998,7 +16756,7 @@
       </p:sp>
       <p:sp>
         <p:nvSpPr>
-          <p:cNvPr id="208" name="Google Shape;208;p29"/>
+          <p:cNvPr id="250" name="Google Shape;250;p36"/>
           <p:cNvSpPr txBox="1"/>
           <p:nvPr>
             <p:ph idx="12" type="sldNum"/>
@@ -13071,7 +16829,7 @@
       </p:sp>
       <p:pic>
         <p:nvPicPr>
-          <p:cNvPr id="209" name="Google Shape;209;p29"/>
+          <p:cNvPr id="251" name="Google Shape;251;p36"/>
           <p:cNvPicPr preferRelativeResize="0"/>
           <p:nvPr/>
         </p:nvPicPr>
@@ -13110,7 +16868,7 @@
   <p:cSld>
     <p:spTree>
       <p:nvGrpSpPr>
-        <p:cNvPr id="213" name="Shape 213"/>
+        <p:cNvPr id="255" name="Shape 255"/>
         <p:cNvGrpSpPr/>
         <p:nvPr/>
       </p:nvGrpSpPr>
@@ -13124,7 +16882,7 @@
       </p:grpSpPr>
       <p:sp>
         <p:nvSpPr>
-          <p:cNvPr id="214" name="Google Shape;214;p30"/>
+          <p:cNvPr id="256" name="Google Shape;256;p37"/>
           <p:cNvSpPr txBox="1"/>
           <p:nvPr>
             <p:ph type="title"/>
@@ -13164,7 +16922,7 @@
       </p:sp>
       <p:sp>
         <p:nvSpPr>
-          <p:cNvPr id="215" name="Google Shape;215;p30"/>
+          <p:cNvPr id="257" name="Google Shape;257;p37"/>
           <p:cNvSpPr txBox="1"/>
           <p:nvPr>
             <p:ph idx="1" type="body"/>
@@ -13221,7 +16979,7 @@
       </p:sp>
       <p:sp>
         <p:nvSpPr>
-          <p:cNvPr id="216" name="Google Shape;216;p30"/>
+          <p:cNvPr id="258" name="Google Shape;258;p37"/>
           <p:cNvSpPr txBox="1"/>
           <p:nvPr>
             <p:ph idx="12" type="sldNum"/>
@@ -13305,7 +17063,7 @@
   <p:cSld>
     <p:spTree>
       <p:nvGrpSpPr>
-        <p:cNvPr id="220" name="Shape 220"/>
+        <p:cNvPr id="262" name="Shape 262"/>
         <p:cNvGrpSpPr/>
         <p:nvPr/>
       </p:nvGrpSpPr>
@@ -13319,7 +17077,7 @@
       </p:grpSpPr>
       <p:sp>
         <p:nvSpPr>
-          <p:cNvPr id="221" name="Google Shape;221;p31"/>
+          <p:cNvPr id="263" name="Google Shape;263;p38"/>
           <p:cNvSpPr txBox="1"/>
           <p:nvPr>
             <p:ph type="title"/>
@@ -13359,7 +17117,7 @@
       </p:sp>
       <p:sp>
         <p:nvSpPr>
-          <p:cNvPr id="222" name="Google Shape;222;p31"/>
+          <p:cNvPr id="264" name="Google Shape;264;p38"/>
           <p:cNvSpPr txBox="1"/>
           <p:nvPr>
             <p:ph idx="12" type="sldNum"/>
@@ -13432,7 +17190,7 @@
       </p:sp>
       <p:sp>
         <p:nvSpPr>
-          <p:cNvPr id="223" name="Google Shape;223;p31"/>
+          <p:cNvPr id="265" name="Google Shape;265;p38"/>
           <p:cNvSpPr txBox="1"/>
           <p:nvPr>
             <p:ph idx="1" type="body"/>
@@ -13579,7 +17337,7 @@
       </p:sp>
       <p:pic>
         <p:nvPicPr>
-          <p:cNvPr id="224" name="Google Shape;224;p31"/>
+          <p:cNvPr id="266" name="Google Shape;266;p38"/>
           <p:cNvPicPr preferRelativeResize="0"/>
           <p:nvPr/>
         </p:nvPicPr>
@@ -13618,7 +17376,7 @@
   <p:cSld>
     <p:spTree>
       <p:nvGrpSpPr>
-        <p:cNvPr id="228" name="Shape 228"/>
+        <p:cNvPr id="270" name="Shape 270"/>
         <p:cNvGrpSpPr/>
         <p:nvPr/>
       </p:nvGrpSpPr>
@@ -13632,7 +17390,7 @@
       </p:grpSpPr>
       <p:sp>
         <p:nvSpPr>
-          <p:cNvPr id="229" name="Google Shape;229;p32"/>
+          <p:cNvPr id="271" name="Google Shape;271;p39"/>
           <p:cNvSpPr txBox="1"/>
           <p:nvPr>
             <p:ph type="title"/>
@@ -13672,7 +17430,7 @@
       </p:sp>
       <p:sp>
         <p:nvSpPr>
-          <p:cNvPr id="230" name="Google Shape;230;p32"/>
+          <p:cNvPr id="272" name="Google Shape;272;p39"/>
           <p:cNvSpPr txBox="1"/>
           <p:nvPr>
             <p:ph idx="12" type="sldNum"/>
@@ -13745,7 +17503,7 @@
       </p:sp>
       <p:sp>
         <p:nvSpPr>
-          <p:cNvPr id="231" name="Google Shape;231;p32"/>
+          <p:cNvPr id="273" name="Google Shape;273;p39"/>
           <p:cNvSpPr txBox="1"/>
           <p:nvPr>
             <p:ph idx="1" type="body"/>
@@ -13850,7 +17608,7 @@
   <p:cSld>
     <p:spTree>
       <p:nvGrpSpPr>
-        <p:cNvPr id="235" name="Shape 235"/>
+        <p:cNvPr id="277" name="Shape 277"/>
         <p:cNvGrpSpPr/>
         <p:nvPr/>
       </p:nvGrpSpPr>
@@ -13864,7 +17622,7 @@
       </p:grpSpPr>
       <p:sp>
         <p:nvSpPr>
-          <p:cNvPr id="236" name="Google Shape;236;p33"/>
+          <p:cNvPr id="278" name="Google Shape;278;p40"/>
           <p:cNvSpPr txBox="1"/>
           <p:nvPr>
             <p:ph type="title"/>
@@ -13904,7 +17662,7 @@
       </p:sp>
       <p:sp>
         <p:nvSpPr>
-          <p:cNvPr id="237" name="Google Shape;237;p33"/>
+          <p:cNvPr id="279" name="Google Shape;279;p40"/>
           <p:cNvSpPr txBox="1"/>
           <p:nvPr>
             <p:ph idx="1" type="body"/>
@@ -14087,7 +17845,7 @@
       </p:sp>
       <p:sp>
         <p:nvSpPr>
-          <p:cNvPr id="238" name="Google Shape;238;p33"/>
+          <p:cNvPr id="280" name="Google Shape;280;p40"/>
           <p:cNvSpPr txBox="1"/>
           <p:nvPr>
             <p:ph idx="12" type="sldNum"/>
@@ -14161,7 +17919,7 @@
       </p:sp>
       <p:graphicFrame>
         <p:nvGraphicFramePr>
-          <p:cNvPr id="239" name="Google Shape;239;p33"/>
+          <p:cNvPr id="281" name="Google Shape;281;p40"/>
           <p:cNvGraphicFramePr/>
           <p:nvPr/>
         </p:nvGraphicFramePr>
@@ -14174,7 +17932,7 @@
             <a:tbl>
               <a:tblPr>
                 <a:noFill/>
-                <a:tableStyleId>{ACD05F4B-F717-41A4-BDE8-8485AB1F8521}</a:tableStyleId>
+                <a:tableStyleId>{28F49017-D488-4D14-BD19-3D1265C67C6A}</a:tableStyleId>
               </a:tblPr>
               <a:tblGrid>
                 <a:gridCol w="2103125"/>
@@ -15225,7 +18983,7 @@
   <p:cSld>
     <p:spTree>
       <p:nvGrpSpPr>
-        <p:cNvPr id="243" name="Shape 243"/>
+        <p:cNvPr id="285" name="Shape 285"/>
         <p:cNvGrpSpPr/>
         <p:nvPr/>
       </p:nvGrpSpPr>
@@ -15239,7 +18997,7 @@
       </p:grpSpPr>
       <p:sp>
         <p:nvSpPr>
-          <p:cNvPr id="244" name="Google Shape;244;p34"/>
+          <p:cNvPr id="286" name="Google Shape;286;p41"/>
           <p:cNvSpPr txBox="1"/>
           <p:nvPr>
             <p:ph type="title"/>
@@ -15279,7 +19037,7 @@
       </p:sp>
       <p:sp>
         <p:nvSpPr>
-          <p:cNvPr id="245" name="Google Shape;245;p34"/>
+          <p:cNvPr id="287" name="Google Shape;287;p41"/>
           <p:cNvSpPr txBox="1"/>
           <p:nvPr>
             <p:ph idx="12" type="sldNum"/>
@@ -15350,37 +19108,9 @@
           </a:p>
         </p:txBody>
       </p:sp>
-      <p:pic>
-        <p:nvPicPr>
-          <p:cNvPr id="246" name="Google Shape;246;p34"/>
-          <p:cNvPicPr preferRelativeResize="0"/>
-          <p:nvPr/>
-        </p:nvPicPr>
-        <p:blipFill>
-          <a:blip r:embed="rId4">
-            <a:alphaModFix/>
-          </a:blip>
-          <a:stretch>
-            <a:fillRect/>
-          </a:stretch>
-        </p:blipFill>
-        <p:spPr>
-          <a:xfrm>
-            <a:off x="274320" y="914400"/>
-            <a:ext cx="8595359" cy="3504997"/>
-          </a:xfrm>
-          <a:prstGeom prst="rect">
-            <a:avLst/>
-          </a:prstGeom>
-          <a:noFill/>
-          <a:ln>
-            <a:noFill/>
-          </a:ln>
-        </p:spPr>
-      </p:pic>
       <p:sp>
         <p:nvSpPr>
-          <p:cNvPr id="247" name="Google Shape;247;p34"/>
+          <p:cNvPr id="288" name="Google Shape;288;p41"/>
           <p:cNvSpPr txBox="1"/>
           <p:nvPr/>
         </p:nvSpPr>
@@ -15420,6 +19150,34 @@
           </a:p>
         </p:txBody>
       </p:sp>
+      <p:pic>
+        <p:nvPicPr>
+          <p:cNvPr id="289" name="Google Shape;289;p41"/>
+          <p:cNvPicPr preferRelativeResize="0"/>
+          <p:nvPr/>
+        </p:nvPicPr>
+        <p:blipFill>
+          <a:blip r:embed="rId4">
+            <a:alphaModFix/>
+          </a:blip>
+          <a:stretch>
+            <a:fillRect/>
+          </a:stretch>
+        </p:blipFill>
+        <p:spPr>
+          <a:xfrm>
+            <a:off x="0" y="731520"/>
+            <a:ext cx="9144001" cy="3931920"/>
+          </a:xfrm>
+          <a:prstGeom prst="rect">
+            <a:avLst/>
+          </a:prstGeom>
+          <a:noFill/>
+          <a:ln>
+            <a:noFill/>
+          </a:ln>
+        </p:spPr>
+      </p:pic>
     </p:spTree>
   </p:cSld>
   <p:clrMapOvr>
@@ -15433,7 +19191,7 @@
   <p:cSld>
     <p:spTree>
       <p:nvGrpSpPr>
-        <p:cNvPr id="251" name="Shape 251"/>
+        <p:cNvPr id="293" name="Shape 293"/>
         <p:cNvGrpSpPr/>
         <p:nvPr/>
       </p:nvGrpSpPr>
@@ -15447,7 +19205,7 @@
       </p:grpSpPr>
       <p:sp>
         <p:nvSpPr>
-          <p:cNvPr id="252" name="Google Shape;252;p35"/>
+          <p:cNvPr id="294" name="Google Shape;294;p42"/>
           <p:cNvSpPr txBox="1"/>
           <p:nvPr>
             <p:ph type="title"/>
@@ -15487,7 +19245,7 @@
       </p:sp>
       <p:sp>
         <p:nvSpPr>
-          <p:cNvPr id="253" name="Google Shape;253;p35"/>
+          <p:cNvPr id="295" name="Google Shape;295;p42"/>
           <p:cNvSpPr txBox="1"/>
           <p:nvPr>
             <p:ph idx="1" type="body"/>
@@ -15593,7 +19351,7 @@
       </p:sp>
       <p:sp>
         <p:nvSpPr>
-          <p:cNvPr id="254" name="Google Shape;254;p35"/>
+          <p:cNvPr id="296" name="Google Shape;296;p42"/>
           <p:cNvSpPr txBox="1"/>
           <p:nvPr>
             <p:ph idx="12" type="sldNum"/>
@@ -15666,7 +19424,7 @@
       </p:sp>
       <p:pic>
         <p:nvPicPr>
-          <p:cNvPr id="255" name="Google Shape;255;p35"/>
+          <p:cNvPr id="297" name="Google Shape;297;p42"/>
           <p:cNvPicPr preferRelativeResize="0"/>
           <p:nvPr/>
         </p:nvPicPr>
@@ -15705,7 +19463,7 @@
   <p:cSld>
     <p:spTree>
       <p:nvGrpSpPr>
-        <p:cNvPr id="259" name="Shape 259"/>
+        <p:cNvPr id="301" name="Shape 301"/>
         <p:cNvGrpSpPr/>
         <p:nvPr/>
       </p:nvGrpSpPr>
@@ -15719,7 +19477,7 @@
       </p:grpSpPr>
       <p:sp>
         <p:nvSpPr>
-          <p:cNvPr id="260" name="Google Shape;260;p36"/>
+          <p:cNvPr id="302" name="Google Shape;302;p43"/>
           <p:cNvSpPr txBox="1"/>
           <p:nvPr>
             <p:ph type="title"/>
@@ -15759,7 +19517,7 @@
       </p:sp>
       <p:sp>
         <p:nvSpPr>
-          <p:cNvPr id="261" name="Google Shape;261;p36"/>
+          <p:cNvPr id="303" name="Google Shape;303;p43"/>
           <p:cNvSpPr txBox="1"/>
           <p:nvPr>
             <p:ph idx="1" type="body"/>
@@ -15850,7 +19608,7 @@
       </p:sp>
       <p:sp>
         <p:nvSpPr>
-          <p:cNvPr id="262" name="Google Shape;262;p36"/>
+          <p:cNvPr id="304" name="Google Shape;304;p43"/>
           <p:cNvSpPr txBox="1"/>
           <p:nvPr>
             <p:ph idx="12" type="sldNum"/>
@@ -15934,7 +19692,7 @@
   <p:cSld>
     <p:spTree>
       <p:nvGrpSpPr>
-        <p:cNvPr id="65" name="Shape 65"/>
+        <p:cNvPr id="107" name="Shape 107"/>
         <p:cNvGrpSpPr/>
         <p:nvPr/>
       </p:nvGrpSpPr>
@@ -15948,7 +19706,7 @@
       </p:grpSpPr>
       <p:sp>
         <p:nvSpPr>
-          <p:cNvPr id="66" name="Google Shape;66;p10"/>
+          <p:cNvPr id="108" name="Google Shape;108;p17"/>
           <p:cNvSpPr txBox="1"/>
           <p:nvPr>
             <p:ph type="title"/>
@@ -15988,7 +19746,7 @@
       </p:sp>
       <p:sp>
         <p:nvSpPr>
-          <p:cNvPr id="67" name="Google Shape;67;p10"/>
+          <p:cNvPr id="109" name="Google Shape;109;p17"/>
           <p:cNvSpPr txBox="1"/>
           <p:nvPr>
             <p:ph idx="1" type="body"/>
@@ -16165,7 +19923,7 @@
       </p:sp>
       <p:sp>
         <p:nvSpPr>
-          <p:cNvPr id="68" name="Google Shape;68;p10"/>
+          <p:cNvPr id="110" name="Google Shape;110;p17"/>
           <p:cNvSpPr txBox="1"/>
           <p:nvPr>
             <p:ph idx="12" type="sldNum"/>
@@ -16249,7 +20007,7 @@
   <p:cSld>
     <p:spTree>
       <p:nvGrpSpPr>
-        <p:cNvPr id="266" name="Shape 266"/>
+        <p:cNvPr id="308" name="Shape 308"/>
         <p:cNvGrpSpPr/>
         <p:nvPr/>
       </p:nvGrpSpPr>
@@ -16263,7 +20021,7 @@
       </p:grpSpPr>
       <p:sp>
         <p:nvSpPr>
-          <p:cNvPr id="267" name="Google Shape;267;p37"/>
+          <p:cNvPr id="309" name="Google Shape;309;p44"/>
           <p:cNvSpPr txBox="1"/>
           <p:nvPr>
             <p:ph type="title"/>
@@ -16303,7 +20061,7 @@
       </p:sp>
       <p:sp>
         <p:nvSpPr>
-          <p:cNvPr id="268" name="Google Shape;268;p37"/>
+          <p:cNvPr id="310" name="Google Shape;310;p44"/>
           <p:cNvSpPr txBox="1"/>
           <p:nvPr>
             <p:ph idx="1" type="body"/>
@@ -16377,7 +20135,7 @@
       </p:sp>
       <p:sp>
         <p:nvSpPr>
-          <p:cNvPr id="269" name="Google Shape;269;p37"/>
+          <p:cNvPr id="311" name="Google Shape;311;p44"/>
           <p:cNvSpPr txBox="1"/>
           <p:nvPr>
             <p:ph idx="12" type="sldNum"/>
@@ -16461,7 +20219,7 @@
   <p:cSld>
     <p:spTree>
       <p:nvGrpSpPr>
-        <p:cNvPr id="273" name="Shape 273"/>
+        <p:cNvPr id="315" name="Shape 315"/>
         <p:cNvGrpSpPr/>
         <p:nvPr/>
       </p:nvGrpSpPr>
@@ -16475,7 +20233,7 @@
       </p:grpSpPr>
       <p:sp>
         <p:nvSpPr>
-          <p:cNvPr id="274" name="Google Shape;274;p38"/>
+          <p:cNvPr id="316" name="Google Shape;316;p45"/>
           <p:cNvSpPr txBox="1"/>
           <p:nvPr>
             <p:ph type="title"/>
@@ -16515,7 +20273,7 @@
       </p:sp>
       <p:sp>
         <p:nvSpPr>
-          <p:cNvPr id="275" name="Google Shape;275;p38"/>
+          <p:cNvPr id="317" name="Google Shape;317;p45"/>
           <p:cNvSpPr txBox="1"/>
           <p:nvPr>
             <p:ph idx="12" type="sldNum"/>
@@ -16588,7 +20346,7 @@
       </p:sp>
       <p:graphicFrame>
         <p:nvGraphicFramePr>
-          <p:cNvPr id="276" name="Google Shape;276;p38"/>
+          <p:cNvPr id="318" name="Google Shape;318;p45"/>
           <p:cNvGraphicFramePr/>
           <p:nvPr/>
         </p:nvGraphicFramePr>
@@ -16601,7 +20359,7 @@
             <a:tbl>
               <a:tblPr>
                 <a:noFill/>
-                <a:tableStyleId>{ACD05F4B-F717-41A4-BDE8-8485AB1F8521}</a:tableStyleId>
+                <a:tableStyleId>{28F49017-D488-4D14-BD19-3D1265C67C6A}</a:tableStyleId>
               </a:tblPr>
               <a:tblGrid>
                 <a:gridCol w="638675"/>
@@ -17977,7 +21735,7 @@
   <p:cSld>
     <p:spTree>
       <p:nvGrpSpPr>
-        <p:cNvPr id="280" name="Shape 280"/>
+        <p:cNvPr id="322" name="Shape 322"/>
         <p:cNvGrpSpPr/>
         <p:nvPr/>
       </p:nvGrpSpPr>
@@ -17991,7 +21749,7 @@
       </p:grpSpPr>
       <p:sp>
         <p:nvSpPr>
-          <p:cNvPr id="281" name="Google Shape;281;p39"/>
+          <p:cNvPr id="323" name="Google Shape;323;p46"/>
           <p:cNvSpPr txBox="1"/>
           <p:nvPr>
             <p:ph type="title"/>
@@ -18046,7 +21804,7 @@
   <p:cSld>
     <p:spTree>
       <p:nvGrpSpPr>
-        <p:cNvPr id="285" name="Shape 285"/>
+        <p:cNvPr id="327" name="Shape 327"/>
         <p:cNvGrpSpPr/>
         <p:nvPr/>
       </p:nvGrpSpPr>
@@ -18060,7 +21818,7 @@
       </p:grpSpPr>
       <p:sp>
         <p:nvSpPr>
-          <p:cNvPr id="286" name="Google Shape;286;p40"/>
+          <p:cNvPr id="328" name="Google Shape;328;p47"/>
           <p:cNvSpPr txBox="1"/>
           <p:nvPr>
             <p:ph type="title"/>
@@ -18100,7 +21858,7 @@
       </p:sp>
       <p:sp>
         <p:nvSpPr>
-          <p:cNvPr id="287" name="Google Shape;287;p40"/>
+          <p:cNvPr id="329" name="Google Shape;329;p47"/>
           <p:cNvSpPr txBox="1"/>
           <p:nvPr>
             <p:ph idx="1" type="body"/>
@@ -18246,7 +22004,7 @@
       </p:sp>
       <p:sp>
         <p:nvSpPr>
-          <p:cNvPr id="288" name="Google Shape;288;p40"/>
+          <p:cNvPr id="330" name="Google Shape;330;p47"/>
           <p:cNvSpPr txBox="1"/>
           <p:nvPr>
             <p:ph idx="12" type="sldNum"/>
@@ -18319,7 +22077,7 @@
       </p:sp>
       <p:sp>
         <p:nvSpPr>
-          <p:cNvPr id="289" name="Google Shape;289;p40"/>
+          <p:cNvPr id="331" name="Google Shape;331;p47"/>
           <p:cNvSpPr txBox="1"/>
           <p:nvPr/>
         </p:nvSpPr>
@@ -18372,7 +22130,7 @@
   <p:cSld>
     <p:spTree>
       <p:nvGrpSpPr>
-        <p:cNvPr id="293" name="Shape 293"/>
+        <p:cNvPr id="335" name="Shape 335"/>
         <p:cNvGrpSpPr/>
         <p:nvPr/>
       </p:nvGrpSpPr>
@@ -18386,7 +22144,7 @@
       </p:grpSpPr>
       <p:sp>
         <p:nvSpPr>
-          <p:cNvPr id="294" name="Google Shape;294;p41"/>
+          <p:cNvPr id="336" name="Google Shape;336;p48"/>
           <p:cNvSpPr txBox="1"/>
           <p:nvPr>
             <p:ph type="title"/>
@@ -18426,7 +22184,7 @@
       </p:sp>
       <p:sp>
         <p:nvSpPr>
-          <p:cNvPr id="295" name="Google Shape;295;p41"/>
+          <p:cNvPr id="337" name="Google Shape;337;p48"/>
           <p:cNvSpPr txBox="1"/>
           <p:nvPr>
             <p:ph idx="1" type="body"/>
@@ -18466,7 +22224,7 @@
       </p:sp>
       <p:sp>
         <p:nvSpPr>
-          <p:cNvPr id="296" name="Google Shape;296;p41"/>
+          <p:cNvPr id="338" name="Google Shape;338;p48"/>
           <p:cNvSpPr txBox="1"/>
           <p:nvPr>
             <p:ph idx="12" type="sldNum"/>
@@ -18539,7 +22297,7 @@
       </p:sp>
       <p:graphicFrame>
         <p:nvGraphicFramePr>
-          <p:cNvPr id="297" name="Google Shape;297;p41"/>
+          <p:cNvPr id="339" name="Google Shape;339;p48"/>
           <p:cNvGraphicFramePr/>
           <p:nvPr/>
         </p:nvGraphicFramePr>
@@ -18552,7 +22310,7 @@
             <a:tbl>
               <a:tblPr>
                 <a:noFill/>
-                <a:tableStyleId>{ACD05F4B-F717-41A4-BDE8-8485AB1F8521}</a:tableStyleId>
+                <a:tableStyleId>{28F49017-D488-4D14-BD19-3D1265C67C6A}</a:tableStyleId>
               </a:tblPr>
               <a:tblGrid>
                 <a:gridCol w="1280725"/>
@@ -19746,7 +23504,7 @@
   <p:cSld>
     <p:spTree>
       <p:nvGrpSpPr>
-        <p:cNvPr id="301" name="Shape 301"/>
+        <p:cNvPr id="343" name="Shape 343"/>
         <p:cNvGrpSpPr/>
         <p:nvPr/>
       </p:nvGrpSpPr>
@@ -19760,7 +23518,7 @@
       </p:grpSpPr>
       <p:sp>
         <p:nvSpPr>
-          <p:cNvPr id="302" name="Google Shape;302;p42"/>
+          <p:cNvPr id="344" name="Google Shape;344;p49"/>
           <p:cNvSpPr txBox="1"/>
           <p:nvPr>
             <p:ph type="title"/>
@@ -19800,7 +23558,7 @@
       </p:sp>
       <p:sp>
         <p:nvSpPr>
-          <p:cNvPr id="303" name="Google Shape;303;p42"/>
+          <p:cNvPr id="345" name="Google Shape;345;p49"/>
           <p:cNvSpPr txBox="1"/>
           <p:nvPr>
             <p:ph idx="1" type="body"/>
@@ -19889,7 +23647,7 @@
       </p:sp>
       <p:sp>
         <p:nvSpPr>
-          <p:cNvPr id="304" name="Google Shape;304;p42"/>
+          <p:cNvPr id="346" name="Google Shape;346;p49"/>
           <p:cNvSpPr txBox="1"/>
           <p:nvPr>
             <p:ph idx="12" type="sldNum"/>
@@ -19973,7 +23731,7 @@
   <p:cSld>
     <p:spTree>
       <p:nvGrpSpPr>
-        <p:cNvPr id="308" name="Shape 308"/>
+        <p:cNvPr id="350" name="Shape 350"/>
         <p:cNvGrpSpPr/>
         <p:nvPr/>
       </p:nvGrpSpPr>
@@ -19987,7 +23745,7 @@
       </p:grpSpPr>
       <p:sp>
         <p:nvSpPr>
-          <p:cNvPr id="309" name="Google Shape;309;p43"/>
+          <p:cNvPr id="351" name="Google Shape;351;p50"/>
           <p:cNvSpPr txBox="1"/>
           <p:nvPr>
             <p:ph type="title"/>
@@ -20038,7 +23796,7 @@
   <p:cSld>
     <p:spTree>
       <p:nvGrpSpPr>
-        <p:cNvPr id="313" name="Shape 313"/>
+        <p:cNvPr id="355" name="Shape 355"/>
         <p:cNvGrpSpPr/>
         <p:nvPr/>
       </p:nvGrpSpPr>
@@ -20052,7 +23810,7 @@
       </p:grpSpPr>
       <p:sp>
         <p:nvSpPr>
-          <p:cNvPr id="314" name="Google Shape;314;p44"/>
+          <p:cNvPr id="356" name="Google Shape;356;p51"/>
           <p:cNvSpPr txBox="1"/>
           <p:nvPr>
             <p:ph type="title"/>
@@ -20092,7 +23850,7 @@
       </p:sp>
       <p:sp>
         <p:nvSpPr>
-          <p:cNvPr id="315" name="Google Shape;315;p44"/>
+          <p:cNvPr id="357" name="Google Shape;357;p51"/>
           <p:cNvSpPr txBox="1"/>
           <p:nvPr>
             <p:ph idx="1" type="body"/>
@@ -20266,7 +24024,7 @@
       </p:sp>
       <p:sp>
         <p:nvSpPr>
-          <p:cNvPr id="316" name="Google Shape;316;p44"/>
+          <p:cNvPr id="358" name="Google Shape;358;p51"/>
           <p:cNvSpPr txBox="1"/>
           <p:nvPr>
             <p:ph idx="12" type="sldNum"/>
@@ -20350,7 +24108,7 @@
   <p:cSld>
     <p:spTree>
       <p:nvGrpSpPr>
-        <p:cNvPr id="320" name="Shape 320"/>
+        <p:cNvPr id="362" name="Shape 362"/>
         <p:cNvGrpSpPr/>
         <p:nvPr/>
       </p:nvGrpSpPr>
@@ -20364,7 +24122,7 @@
       </p:grpSpPr>
       <p:sp>
         <p:nvSpPr>
-          <p:cNvPr id="321" name="Google Shape;321;p45"/>
+          <p:cNvPr id="363" name="Google Shape;363;p52"/>
           <p:cNvSpPr txBox="1"/>
           <p:nvPr>
             <p:ph type="title"/>
@@ -20404,7 +24162,7 @@
       </p:sp>
       <p:sp>
         <p:nvSpPr>
-          <p:cNvPr id="322" name="Google Shape;322;p45"/>
+          <p:cNvPr id="364" name="Google Shape;364;p52"/>
           <p:cNvSpPr txBox="1"/>
           <p:nvPr>
             <p:ph idx="12" type="sldNum"/>
@@ -20477,7 +24235,7 @@
       </p:sp>
       <p:pic>
         <p:nvPicPr>
-          <p:cNvPr id="323" name="Google Shape;323;p45"/>
+          <p:cNvPr id="365" name="Google Shape;365;p52"/>
           <p:cNvPicPr preferRelativeResize="0"/>
           <p:nvPr/>
         </p:nvPicPr>
@@ -20491,8 +24249,8 @@
         </p:blipFill>
         <p:spPr>
           <a:xfrm>
-            <a:off x="274320" y="914400"/>
-            <a:ext cx="8595360" cy="3495446"/>
+            <a:off x="0" y="731520"/>
+            <a:ext cx="9144001" cy="3931920"/>
           </a:xfrm>
           <a:prstGeom prst="rect">
             <a:avLst/>
@@ -20516,7 +24274,7 @@
   <p:cSld>
     <p:spTree>
       <p:nvGrpSpPr>
-        <p:cNvPr id="327" name="Shape 327"/>
+        <p:cNvPr id="369" name="Shape 369"/>
         <p:cNvGrpSpPr/>
         <p:nvPr/>
       </p:nvGrpSpPr>
@@ -20530,7 +24288,7 @@
       </p:grpSpPr>
       <p:sp>
         <p:nvSpPr>
-          <p:cNvPr id="328" name="Google Shape;328;p46"/>
+          <p:cNvPr id="370" name="Google Shape;370;p53"/>
           <p:cNvSpPr txBox="1"/>
           <p:nvPr>
             <p:ph type="title"/>
@@ -20570,7 +24328,7 @@
       </p:sp>
       <p:sp>
         <p:nvSpPr>
-          <p:cNvPr id="329" name="Google Shape;329;p46"/>
+          <p:cNvPr id="371" name="Google Shape;371;p53"/>
           <p:cNvSpPr txBox="1"/>
           <p:nvPr>
             <p:ph idx="12" type="sldNum"/>
@@ -20643,7 +24401,7 @@
       </p:sp>
       <p:pic>
         <p:nvPicPr>
-          <p:cNvPr id="330" name="Google Shape;330;p46"/>
+          <p:cNvPr id="372" name="Google Shape;372;p53"/>
           <p:cNvPicPr preferRelativeResize="0"/>
           <p:nvPr/>
         </p:nvPicPr>
@@ -20657,8 +24415,8 @@
         </p:blipFill>
         <p:spPr>
           <a:xfrm>
-            <a:off x="274320" y="914400"/>
-            <a:ext cx="8595360" cy="3495446"/>
+            <a:off x="0" y="731520"/>
+            <a:ext cx="9144001" cy="3931920"/>
           </a:xfrm>
           <a:prstGeom prst="rect">
             <a:avLst/>
@@ -20682,7 +24440,7 @@
   <p:cSld>
     <p:spTree>
       <p:nvGrpSpPr>
-        <p:cNvPr id="72" name="Shape 72"/>
+        <p:cNvPr id="114" name="Shape 114"/>
         <p:cNvGrpSpPr/>
         <p:nvPr/>
       </p:nvGrpSpPr>
@@ -20696,7 +24454,7 @@
       </p:grpSpPr>
       <p:sp>
         <p:nvSpPr>
-          <p:cNvPr id="73" name="Google Shape;73;p11"/>
+          <p:cNvPr id="115" name="Google Shape;115;p18"/>
           <p:cNvSpPr txBox="1"/>
           <p:nvPr>
             <p:ph type="title"/>
@@ -20747,7 +24505,7 @@
   <p:cSld>
     <p:spTree>
       <p:nvGrpSpPr>
-        <p:cNvPr id="334" name="Shape 334"/>
+        <p:cNvPr id="376" name="Shape 376"/>
         <p:cNvGrpSpPr/>
         <p:nvPr/>
       </p:nvGrpSpPr>
@@ -20761,7 +24519,7 @@
       </p:grpSpPr>
       <p:sp>
         <p:nvSpPr>
-          <p:cNvPr id="335" name="Google Shape;335;p47"/>
+          <p:cNvPr id="377" name="Google Shape;377;p54"/>
           <p:cNvSpPr txBox="1"/>
           <p:nvPr>
             <p:ph type="title"/>
@@ -20801,7 +24559,7 @@
       </p:sp>
       <p:sp>
         <p:nvSpPr>
-          <p:cNvPr id="336" name="Google Shape;336;p47"/>
+          <p:cNvPr id="378" name="Google Shape;378;p54"/>
           <p:cNvSpPr txBox="1"/>
           <p:nvPr>
             <p:ph idx="12" type="sldNum"/>
@@ -20874,7 +24632,7 @@
       </p:sp>
       <p:pic>
         <p:nvPicPr>
-          <p:cNvPr id="337" name="Google Shape;337;p47"/>
+          <p:cNvPr id="379" name="Google Shape;379;p54"/>
           <p:cNvPicPr preferRelativeResize="0"/>
           <p:nvPr/>
         </p:nvPicPr>
@@ -20888,8 +24646,8 @@
         </p:blipFill>
         <p:spPr>
           <a:xfrm>
-            <a:off x="274320" y="914400"/>
-            <a:ext cx="8595360" cy="3495446"/>
+            <a:off x="0" y="731520"/>
+            <a:ext cx="9144001" cy="3931920"/>
           </a:xfrm>
           <a:prstGeom prst="rect">
             <a:avLst/>
@@ -20913,7 +24671,7 @@
   <p:cSld>
     <p:spTree>
       <p:nvGrpSpPr>
-        <p:cNvPr id="341" name="Shape 341"/>
+        <p:cNvPr id="383" name="Shape 383"/>
         <p:cNvGrpSpPr/>
         <p:nvPr/>
       </p:nvGrpSpPr>
@@ -20927,7 +24685,7 @@
       </p:grpSpPr>
       <p:sp>
         <p:nvSpPr>
-          <p:cNvPr id="342" name="Google Shape;342;p48"/>
+          <p:cNvPr id="384" name="Google Shape;384;p55"/>
           <p:cNvSpPr txBox="1"/>
           <p:nvPr>
             <p:ph type="title"/>
@@ -20967,7 +24725,7 @@
       </p:sp>
       <p:sp>
         <p:nvSpPr>
-          <p:cNvPr id="343" name="Google Shape;343;p48"/>
+          <p:cNvPr id="385" name="Google Shape;385;p55"/>
           <p:cNvSpPr txBox="1"/>
           <p:nvPr>
             <p:ph idx="1" type="body"/>
@@ -21089,7 +24847,7 @@
       </p:sp>
       <p:sp>
         <p:nvSpPr>
-          <p:cNvPr id="344" name="Google Shape;344;p48"/>
+          <p:cNvPr id="386" name="Google Shape;386;p55"/>
           <p:cNvSpPr txBox="1"/>
           <p:nvPr>
             <p:ph idx="12" type="sldNum"/>
@@ -21173,7 +24931,7 @@
   <p:cSld>
     <p:spTree>
       <p:nvGrpSpPr>
-        <p:cNvPr id="348" name="Shape 348"/>
+        <p:cNvPr id="390" name="Shape 390"/>
         <p:cNvGrpSpPr/>
         <p:nvPr/>
       </p:nvGrpSpPr>
@@ -21187,7 +24945,7 @@
       </p:grpSpPr>
       <p:sp>
         <p:nvSpPr>
-          <p:cNvPr id="349" name="Google Shape;349;p49"/>
+          <p:cNvPr id="391" name="Google Shape;391;p56"/>
           <p:cNvSpPr txBox="1"/>
           <p:nvPr>
             <p:ph type="title"/>
@@ -21227,7 +24985,7 @@
       </p:sp>
       <p:sp>
         <p:nvSpPr>
-          <p:cNvPr id="350" name="Google Shape;350;p49"/>
+          <p:cNvPr id="392" name="Google Shape;392;p56"/>
           <p:cNvSpPr txBox="1"/>
           <p:nvPr>
             <p:ph idx="1" type="body"/>
@@ -21404,7 +25162,7 @@
       </p:sp>
       <p:sp>
         <p:nvSpPr>
-          <p:cNvPr id="351" name="Google Shape;351;p49"/>
+          <p:cNvPr id="393" name="Google Shape;393;p56"/>
           <p:cNvSpPr txBox="1"/>
           <p:nvPr>
             <p:ph idx="12" type="sldNum"/>
@@ -21488,7 +25246,7 @@
   <p:cSld>
     <p:spTree>
       <p:nvGrpSpPr>
-        <p:cNvPr id="355" name="Shape 355"/>
+        <p:cNvPr id="397" name="Shape 397"/>
         <p:cNvGrpSpPr/>
         <p:nvPr/>
       </p:nvGrpSpPr>
@@ -21502,7 +25260,7 @@
       </p:grpSpPr>
       <p:sp>
         <p:nvSpPr>
-          <p:cNvPr id="356" name="Google Shape;356;p50"/>
+          <p:cNvPr id="398" name="Google Shape;398;p57"/>
           <p:cNvSpPr txBox="1"/>
           <p:nvPr>
             <p:ph type="ctrTitle"/>
@@ -21542,7 +25300,7 @@
       </p:sp>
       <p:sp>
         <p:nvSpPr>
-          <p:cNvPr id="357" name="Google Shape;357;p50"/>
+          <p:cNvPr id="399" name="Google Shape;399;p57"/>
           <p:cNvSpPr txBox="1"/>
           <p:nvPr>
             <p:ph idx="1" type="subTitle"/>
@@ -21672,7 +25430,7 @@
   <p:cSld>
     <p:spTree>
       <p:nvGrpSpPr>
-        <p:cNvPr id="361" name="Shape 361"/>
+        <p:cNvPr id="403" name="Shape 403"/>
         <p:cNvGrpSpPr/>
         <p:nvPr/>
       </p:nvGrpSpPr>
@@ -21686,7 +25444,7 @@
       </p:grpSpPr>
       <p:sp>
         <p:nvSpPr>
-          <p:cNvPr id="362" name="Google Shape;362;p51"/>
+          <p:cNvPr id="404" name="Google Shape;404;p58"/>
           <p:cNvSpPr txBox="1"/>
           <p:nvPr>
             <p:ph type="title"/>
@@ -21726,7 +25484,7 @@
       </p:sp>
       <p:sp>
         <p:nvSpPr>
-          <p:cNvPr id="363" name="Google Shape;363;p51"/>
+          <p:cNvPr id="405" name="Google Shape;405;p58"/>
           <p:cNvSpPr txBox="1"/>
           <p:nvPr>
             <p:ph idx="12" type="sldNum"/>
@@ -21799,7 +25557,7 @@
       </p:sp>
       <p:sp>
         <p:nvSpPr>
-          <p:cNvPr id="364" name="Google Shape;364;p51"/>
+          <p:cNvPr id="406" name="Google Shape;406;p58"/>
           <p:cNvSpPr txBox="1"/>
           <p:nvPr>
             <p:ph idx="1" type="body"/>
@@ -21894,7 +25652,7 @@
             </a:pPr>
             <a:r>
               <a:rPr lang="en"/>
-              <a:t>© Copyright 2009-2025 Dirk Riehle, some rights reserved</a:t>
+              <a:t>© Copyright 2009-2026 Dirk Riehle, some rights reserved</a:t>
             </a:r>
             <a:endParaRPr/>
           </a:p>
@@ -21928,7 +25686,7 @@
   <p:cSld>
     <p:spTree>
       <p:nvGrpSpPr>
-        <p:cNvPr id="77" name="Shape 77"/>
+        <p:cNvPr id="119" name="Shape 119"/>
         <p:cNvGrpSpPr/>
         <p:nvPr/>
       </p:nvGrpSpPr>
@@ -21942,7 +25700,7 @@
       </p:grpSpPr>
       <p:sp>
         <p:nvSpPr>
-          <p:cNvPr id="78" name="Google Shape;78;p12"/>
+          <p:cNvPr id="120" name="Google Shape;120;p19"/>
           <p:cNvSpPr txBox="1"/>
           <p:nvPr>
             <p:ph type="title"/>
@@ -21982,7 +25740,7 @@
       </p:sp>
       <p:sp>
         <p:nvSpPr>
-          <p:cNvPr id="79" name="Google Shape;79;p12"/>
+          <p:cNvPr id="121" name="Google Shape;121;p19"/>
           <p:cNvSpPr txBox="1"/>
           <p:nvPr>
             <p:ph idx="1" type="body"/>
@@ -22157,7 +25915,7 @@
       </p:sp>
       <p:sp>
         <p:nvSpPr>
-          <p:cNvPr id="80" name="Google Shape;80;p12"/>
+          <p:cNvPr id="122" name="Google Shape;122;p19"/>
           <p:cNvSpPr txBox="1"/>
           <p:nvPr>
             <p:ph idx="12" type="sldNum"/>
@@ -22241,7 +25999,7 @@
   <p:cSld>
     <p:spTree>
       <p:nvGrpSpPr>
-        <p:cNvPr id="84" name="Shape 84"/>
+        <p:cNvPr id="126" name="Shape 126"/>
         <p:cNvGrpSpPr/>
         <p:nvPr/>
       </p:nvGrpSpPr>
@@ -22255,7 +26013,7 @@
       </p:grpSpPr>
       <p:sp>
         <p:nvSpPr>
-          <p:cNvPr id="85" name="Google Shape;85;p13"/>
+          <p:cNvPr id="127" name="Google Shape;127;p20"/>
           <p:cNvSpPr txBox="1"/>
           <p:nvPr>
             <p:ph type="title"/>
@@ -22295,7 +26053,7 @@
       </p:sp>
       <p:sp>
         <p:nvSpPr>
-          <p:cNvPr id="86" name="Google Shape;86;p13"/>
+          <p:cNvPr id="128" name="Google Shape;128;p20"/>
           <p:cNvSpPr txBox="1"/>
           <p:nvPr>
             <p:ph idx="12" type="sldNum"/>
@@ -22368,7 +26126,7 @@
       </p:sp>
       <p:pic>
         <p:nvPicPr>
-          <p:cNvPr id="87" name="Google Shape;87;p13"/>
+          <p:cNvPr id="129" name="Google Shape;129;p20"/>
           <p:cNvPicPr preferRelativeResize="0"/>
           <p:nvPr/>
         </p:nvPicPr>
@@ -22382,8 +26140,8 @@
         </p:blipFill>
         <p:spPr>
           <a:xfrm>
-            <a:off x="274320" y="914400"/>
-            <a:ext cx="8595360" cy="3495446"/>
+            <a:off x="0" y="731520"/>
+            <a:ext cx="9144001" cy="3931920"/>
           </a:xfrm>
           <a:prstGeom prst="rect">
             <a:avLst/>
@@ -22407,7 +26165,7 @@
   <p:cSld>
     <p:spTree>
       <p:nvGrpSpPr>
-        <p:cNvPr id="91" name="Shape 91"/>
+        <p:cNvPr id="133" name="Shape 133"/>
         <p:cNvGrpSpPr/>
         <p:nvPr/>
       </p:nvGrpSpPr>
@@ -22421,7 +26179,7 @@
       </p:grpSpPr>
       <p:sp>
         <p:nvSpPr>
-          <p:cNvPr id="92" name="Google Shape;92;p14"/>
+          <p:cNvPr id="134" name="Google Shape;134;p21"/>
           <p:cNvSpPr txBox="1"/>
           <p:nvPr>
             <p:ph type="title"/>
@@ -22461,7 +26219,7 @@
       </p:sp>
       <p:sp>
         <p:nvSpPr>
-          <p:cNvPr id="93" name="Google Shape;93;p14"/>
+          <p:cNvPr id="135" name="Google Shape;135;p21"/>
           <p:cNvSpPr txBox="1"/>
           <p:nvPr>
             <p:ph idx="1" type="body"/>
@@ -22624,7 +26382,7 @@
       </p:sp>
       <p:sp>
         <p:nvSpPr>
-          <p:cNvPr id="94" name="Google Shape;94;p14"/>
+          <p:cNvPr id="136" name="Google Shape;136;p21"/>
           <p:cNvSpPr txBox="1"/>
           <p:nvPr>
             <p:ph idx="12" type="sldNum"/>
@@ -22708,7 +26466,7 @@
   <p:cSld>
     <p:spTree>
       <p:nvGrpSpPr>
-        <p:cNvPr id="98" name="Shape 98"/>
+        <p:cNvPr id="140" name="Shape 140"/>
         <p:cNvGrpSpPr/>
         <p:nvPr/>
       </p:nvGrpSpPr>
@@ -22722,7 +26480,7 @@
       </p:grpSpPr>
       <p:sp>
         <p:nvSpPr>
-          <p:cNvPr id="99" name="Google Shape;99;p15"/>
+          <p:cNvPr id="141" name="Google Shape;141;p22"/>
           <p:cNvSpPr txBox="1"/>
           <p:nvPr>
             <p:ph type="title"/>
@@ -22762,7 +26520,7 @@
       </p:sp>
       <p:sp>
         <p:nvSpPr>
-          <p:cNvPr id="100" name="Google Shape;100;p15"/>
+          <p:cNvPr id="142" name="Google Shape;142;p22"/>
           <p:cNvSpPr txBox="1"/>
           <p:nvPr>
             <p:ph idx="1" type="body"/>
@@ -22830,7 +26588,7 @@
       </p:sp>
       <p:sp>
         <p:nvSpPr>
-          <p:cNvPr id="101" name="Google Shape;101;p15"/>
+          <p:cNvPr id="143" name="Google Shape;143;p22"/>
           <p:cNvSpPr txBox="1"/>
           <p:nvPr>
             <p:ph idx="12" type="sldNum"/>
@@ -22914,7 +26672,7 @@
   <p:cSld>
     <p:spTree>
       <p:nvGrpSpPr>
-        <p:cNvPr id="105" name="Shape 105"/>
+        <p:cNvPr id="147" name="Shape 147"/>
         <p:cNvGrpSpPr/>
         <p:nvPr/>
       </p:nvGrpSpPr>
@@ -22928,7 +26686,7 @@
       </p:grpSpPr>
       <p:sp>
         <p:nvSpPr>
-          <p:cNvPr id="106" name="Google Shape;106;p16"/>
+          <p:cNvPr id="148" name="Google Shape;148;p23"/>
           <p:cNvSpPr txBox="1"/>
           <p:nvPr>
             <p:ph type="title"/>
@@ -22975,7 +26733,286 @@
 </file>
 
 <file path=ppt/theme/theme1.xml><?xml version="1.0" encoding="utf-8"?>
-<a:theme xmlns:a="http://schemas.openxmlformats.org/drawingml/2006/main" xmlns:r="http://schemas.openxmlformats.org/officeDocument/2006/relationships" name="POSS Slides Template">
+<a:theme xmlns:a="http://schemas.openxmlformats.org/drawingml/2006/main" xmlns:r="http://schemas.openxmlformats.org/officeDocument/2006/relationships">
+  <a:themeElements>
+    <a:clrScheme name="Default">
+      <a:dk1>
+        <a:srgbClr val="000000"/>
+      </a:dk1>
+      <a:lt1>
+        <a:srgbClr val="FFFFFF"/>
+      </a:lt1>
+      <a:dk2>
+        <a:srgbClr val="158158"/>
+      </a:dk2>
+      <a:lt2>
+        <a:srgbClr val="F3F3F3"/>
+      </a:lt2>
+      <a:accent1>
+        <a:srgbClr val="058DC7"/>
+      </a:accent1>
+      <a:accent2>
+        <a:srgbClr val="50B432"/>
+      </a:accent2>
+      <a:accent3>
+        <a:srgbClr val="ED561B"/>
+      </a:accent3>
+      <a:accent4>
+        <a:srgbClr val="EDEF00"/>
+      </a:accent4>
+      <a:accent5>
+        <a:srgbClr val="24CBE5"/>
+      </a:accent5>
+      <a:accent6>
+        <a:srgbClr val="64E572"/>
+      </a:accent6>
+      <a:hlink>
+        <a:srgbClr val="2200CC"/>
+      </a:hlink>
+      <a:folHlink>
+        <a:srgbClr val="551A8B"/>
+      </a:folHlink>
+    </a:clrScheme>
+    <a:fontScheme name="Office">
+      <a:majorFont>
+        <a:latin typeface="Arial"/>
+        <a:ea typeface=""/>
+        <a:cs typeface=""/>
+        <a:font script="Jpan" typeface="ＭＳ Ｐゴシック"/>
+        <a:font script="Hang" typeface="맑은 고딕"/>
+        <a:font script="Hans" typeface="宋体"/>
+        <a:font script="Hant" typeface="新細明體"/>
+        <a:font script="Arab" typeface="Times New Roman"/>
+        <a:font script="Hebr" typeface="Times New Roman"/>
+        <a:font script="Thai" typeface="Angsana New"/>
+        <a:font script="Ethi" typeface="Nyala"/>
+        <a:font script="Beng" typeface="Vrinda"/>
+        <a:font script="Gujr" typeface="Shruti"/>
+        <a:font script="Khmr" typeface="MoolBoran"/>
+        <a:font script="Knda" typeface="Tunga"/>
+        <a:font script="Guru" typeface="Raavi"/>
+        <a:font script="Cans" typeface="Euphemia"/>
+        <a:font script="Cher" typeface="Plantagenet Cherokee"/>
+        <a:font script="Yiii" typeface="Microsoft Yi Baiti"/>
+        <a:font script="Tibt" typeface="Microsoft Himalaya"/>
+        <a:font script="Thaa" typeface="MV Boli"/>
+        <a:font script="Deva" typeface="Mangal"/>
+        <a:font script="Telu" typeface="Gautami"/>
+        <a:font script="Taml" typeface="Latha"/>
+        <a:font script="Syrc" typeface="Estrangelo Edessa"/>
+        <a:font script="Orya" typeface="Kalinga"/>
+        <a:font script="Mlym" typeface="Kartika"/>
+        <a:font script="Laoo" typeface="DokChampa"/>
+        <a:font script="Sinh" typeface="Iskoola Pota"/>
+        <a:font script="Mong" typeface="Mongolian Baiti"/>
+        <a:font script="Viet" typeface="Times New Roman"/>
+        <a:font script="Uigh" typeface="Microsoft Uighur"/>
+        <a:font script="Geor" typeface="Sylfaen"/>
+      </a:majorFont>
+      <a:minorFont>
+        <a:latin typeface="Arial"/>
+        <a:ea typeface=""/>
+        <a:cs typeface=""/>
+        <a:font script="Jpan" typeface="ＭＳ Ｐゴシック"/>
+        <a:font script="Hang" typeface="맑은 고딕"/>
+        <a:font script="Hans" typeface="宋体"/>
+        <a:font script="Hant" typeface="新細明體"/>
+        <a:font script="Arab" typeface="Arial"/>
+        <a:font script="Hebr" typeface="Arial"/>
+        <a:font script="Thai" typeface="Cordia New"/>
+        <a:font script="Ethi" typeface="Nyala"/>
+        <a:font script="Beng" typeface="Vrinda"/>
+        <a:font script="Gujr" typeface="Shruti"/>
+        <a:font script="Khmr" typeface="DaunPenh"/>
+        <a:font script="Knda" typeface="Tunga"/>
+        <a:font script="Guru" typeface="Raavi"/>
+        <a:font script="Cans" typeface="Euphemia"/>
+        <a:font script="Cher" typeface="Plantagenet Cherokee"/>
+        <a:font script="Yiii" typeface="Microsoft Yi Baiti"/>
+        <a:font script="Tibt" typeface="Microsoft Himalaya"/>
+        <a:font script="Thaa" typeface="MV Boli"/>
+        <a:font script="Deva" typeface="Mangal"/>
+        <a:font script="Telu" typeface="Gautami"/>
+        <a:font script="Taml" typeface="Latha"/>
+        <a:font script="Syrc" typeface="Estrangelo Edessa"/>
+        <a:font script="Orya" typeface="Kalinga"/>
+        <a:font script="Mlym" typeface="Kartika"/>
+        <a:font script="Laoo" typeface="DokChampa"/>
+        <a:font script="Sinh" typeface="Iskoola Pota"/>
+        <a:font script="Mong" typeface="Mongolian Baiti"/>
+        <a:font script="Viet" typeface="Arial"/>
+        <a:font script="Uigh" typeface="Microsoft Uighur"/>
+        <a:font script="Geor" typeface="Sylfaen"/>
+      </a:minorFont>
+    </a:fontScheme>
+    <a:fmtScheme name="Office">
+      <a:fillStyleLst>
+        <a:solidFill>
+          <a:schemeClr val="phClr"/>
+        </a:solidFill>
+        <a:gradFill rotWithShape="1">
+          <a:gsLst>
+            <a:gs pos="0">
+              <a:schemeClr val="phClr">
+                <a:tint val="50000"/>
+                <a:satMod val="300000"/>
+              </a:schemeClr>
+            </a:gs>
+            <a:gs pos="35000">
+              <a:schemeClr val="phClr">
+                <a:tint val="37000"/>
+                <a:satMod val="300000"/>
+              </a:schemeClr>
+            </a:gs>
+            <a:gs pos="100000">
+              <a:schemeClr val="phClr">
+                <a:tint val="15000"/>
+                <a:satMod val="350000"/>
+              </a:schemeClr>
+            </a:gs>
+          </a:gsLst>
+          <a:lin ang="16200000" scaled="1"/>
+        </a:gradFill>
+        <a:gradFill rotWithShape="1">
+          <a:gsLst>
+            <a:gs pos="0">
+              <a:schemeClr val="phClr">
+                <a:tint val="100000"/>
+                <a:shade val="100000"/>
+                <a:satMod val="130000"/>
+              </a:schemeClr>
+            </a:gs>
+            <a:gs pos="100000">
+              <a:schemeClr val="phClr">
+                <a:tint val="50000"/>
+                <a:shade val="100000"/>
+                <a:satMod val="350000"/>
+              </a:schemeClr>
+            </a:gs>
+          </a:gsLst>
+          <a:lin ang="16200000" scaled="0"/>
+        </a:gradFill>
+      </a:fillStyleLst>
+      <a:lnStyleLst>
+        <a:ln w="9525" cap="flat" cmpd="sng" algn="ctr">
+          <a:solidFill>
+            <a:schemeClr val="phClr">
+              <a:shade val="95000"/>
+              <a:satMod val="105000"/>
+            </a:schemeClr>
+          </a:solidFill>
+          <a:prstDash val="solid"/>
+        </a:ln>
+        <a:ln w="25400" cap="flat" cmpd="sng" algn="ctr">
+          <a:solidFill>
+            <a:schemeClr val="phClr"/>
+          </a:solidFill>
+          <a:prstDash val="solid"/>
+        </a:ln>
+        <a:ln w="38100" cap="flat" cmpd="sng" algn="ctr">
+          <a:solidFill>
+            <a:schemeClr val="phClr"/>
+          </a:solidFill>
+          <a:prstDash val="solid"/>
+        </a:ln>
+      </a:lnStyleLst>
+      <a:effectStyleLst>
+        <a:effectStyle>
+          <a:effectLst>
+            <a:outerShdw blurRad="40000" dist="20000" dir="5400000" rotWithShape="0">
+              <a:srgbClr val="000000">
+                <a:alpha val="38000"/>
+              </a:srgbClr>
+            </a:outerShdw>
+          </a:effectLst>
+        </a:effectStyle>
+        <a:effectStyle>
+          <a:effectLst>
+            <a:outerShdw blurRad="40000" dist="23000" dir="5400000" rotWithShape="0">
+              <a:srgbClr val="000000">
+                <a:alpha val="35000"/>
+              </a:srgbClr>
+            </a:outerShdw>
+          </a:effectLst>
+        </a:effectStyle>
+        <a:effectStyle>
+          <a:effectLst>
+            <a:outerShdw blurRad="40000" dist="23000" dir="5400000" rotWithShape="0">
+              <a:srgbClr val="000000">
+                <a:alpha val="35000"/>
+              </a:srgbClr>
+            </a:outerShdw>
+          </a:effectLst>
+          <a:scene3d>
+            <a:camera prst="orthographicFront">
+              <a:rot lat="0" lon="0" rev="0"/>
+            </a:camera>
+            <a:lightRig rig="threePt" dir="t">
+              <a:rot lat="0" lon="0" rev="1200000"/>
+            </a:lightRig>
+          </a:scene3d>
+          <a:sp3d>
+            <a:bevelT w="63500" h="25400"/>
+          </a:sp3d>
+        </a:effectStyle>
+      </a:effectStyleLst>
+      <a:bgFillStyleLst>
+        <a:solidFill>
+          <a:schemeClr val="phClr"/>
+        </a:solidFill>
+        <a:gradFill rotWithShape="1">
+          <a:gsLst>
+            <a:gs pos="0">
+              <a:schemeClr val="phClr">
+                <a:tint val="40000"/>
+                <a:satMod val="350000"/>
+              </a:schemeClr>
+            </a:gs>
+            <a:gs pos="40000">
+              <a:schemeClr val="phClr">
+                <a:tint val="45000"/>
+                <a:shade val="99000"/>
+                <a:satMod val="350000"/>
+              </a:schemeClr>
+            </a:gs>
+            <a:gs pos="100000">
+              <a:schemeClr val="phClr">
+                <a:shade val="20000"/>
+                <a:satMod val="255000"/>
+              </a:schemeClr>
+            </a:gs>
+          </a:gsLst>
+          <a:path path="circle">
+            <a:fillToRect l="50000" t="-80000" r="50000" b="180000"/>
+          </a:path>
+        </a:gradFill>
+        <a:gradFill rotWithShape="1">
+          <a:gsLst>
+            <a:gs pos="0">
+              <a:schemeClr val="phClr">
+                <a:tint val="80000"/>
+                <a:satMod val="300000"/>
+              </a:schemeClr>
+            </a:gs>
+            <a:gs pos="100000">
+              <a:schemeClr val="phClr">
+                <a:shade val="30000"/>
+                <a:satMod val="200000"/>
+              </a:schemeClr>
+            </a:gs>
+          </a:gsLst>
+          <a:path path="circle">
+            <a:fillToRect l="50000" t="50000" r="50000" b="50000"/>
+          </a:path>
+        </a:gradFill>
+      </a:bgFillStyleLst>
+    </a:fmtScheme>
+  </a:themeElements>
+</a:theme>
+</file>
+
+<file path=ppt/theme/theme2.xml><?xml version="1.0" encoding="utf-8"?>
+<a:theme xmlns:a="http://schemas.openxmlformats.org/drawingml/2006/main" xmlns:r="http://schemas.openxmlformats.org/officeDocument/2006/relationships" name="AMOS Slides Template">
   <a:themeElements>
     <a:clrScheme name="Simple Light">
       <a:dk1>
@@ -23253,10 +27290,10 @@
 </a:theme>
 </file>
 
-<file path=ppt/theme/theme2.xml><?xml version="1.0" encoding="utf-8"?>
-<a:theme xmlns:a="http://schemas.openxmlformats.org/drawingml/2006/main" xmlns:r="http://schemas.openxmlformats.org/officeDocument/2006/relationships">
+<file path=ppt/theme/theme3.xml><?xml version="1.0" encoding="utf-8"?>
+<a:theme xmlns:a="http://schemas.openxmlformats.org/drawingml/2006/main" xmlns:r="http://schemas.openxmlformats.org/officeDocument/2006/relationships" name="POSS Slides Template">
   <a:themeElements>
-    <a:clrScheme name="Default">
+    <a:clrScheme name="Simple Light">
       <a:dk1>
         <a:srgbClr val="000000"/>
       </a:dk1>
@@ -23264,34 +27301,34 @@
         <a:srgbClr val="FFFFFF"/>
       </a:lt1>
       <a:dk2>
-        <a:srgbClr val="158158"/>
+        <a:srgbClr val="404040"/>
       </a:dk2>
       <a:lt2>
-        <a:srgbClr val="F3F3F3"/>
+        <a:srgbClr val="808080"/>
       </a:lt2>
       <a:accent1>
-        <a:srgbClr val="058DC7"/>
+        <a:srgbClr val="D0D0D0"/>
       </a:accent1>
       <a:accent2>
-        <a:srgbClr val="50B432"/>
+        <a:srgbClr val="4169E1"/>
       </a:accent2>
       <a:accent3>
-        <a:srgbClr val="ED561B"/>
+        <a:srgbClr val="4CAF50"/>
       </a:accent3>
       <a:accent4>
-        <a:srgbClr val="EDEF00"/>
+        <a:srgbClr val="FEB612"/>
       </a:accent4>
       <a:accent5>
-        <a:srgbClr val="24CBE5"/>
+        <a:srgbClr val="F36838"/>
       </a:accent5>
       <a:accent6>
-        <a:srgbClr val="64E572"/>
+        <a:srgbClr val="8E44AD"/>
       </a:accent6>
       <a:hlink>
-        <a:srgbClr val="2200CC"/>
+        <a:srgbClr val="1E90FF"/>
       </a:hlink>
       <a:folHlink>
-        <a:srgbClr val="551A8B"/>
+        <a:srgbClr val="0097A7"/>
       </a:folHlink>
     </a:clrScheme>
     <a:fontScheme name="Office">

--- a/Lecture slides/AMOS B02 - Scrum and AMOS.pptx
+++ b/Lecture slides/AMOS B02 - Scrum and AMOS.pptx
@@ -15450,7 +15450,7 @@
             </a:pPr>
             <a:r>
               <a:rPr lang="en"/>
-              <a:t>The product manager needs to insist on showing not just talking</a:t>
+              <a:t>The product owner needs to insist on showing not just talking</a:t>
             </a:r>
             <a:endParaRPr/>
           </a:p>
@@ -17932,7 +17932,7 @@
             <a:tbl>
               <a:tblPr>
                 <a:noFill/>
-                <a:tableStyleId>{28F49017-D488-4D14-BD19-3D1265C67C6A}</a:tableStyleId>
+                <a:tableStyleId>{557111F9-E64D-40C2-AF79-A55EB1FDECA5}</a:tableStyleId>
               </a:tblPr>
               <a:tblGrid>
                 <a:gridCol w="2103125"/>
@@ -20359,7 +20359,7 @@
             <a:tbl>
               <a:tblPr>
                 <a:noFill/>
-                <a:tableStyleId>{28F49017-D488-4D14-BD19-3D1265C67C6A}</a:tableStyleId>
+                <a:tableStyleId>{557111F9-E64D-40C2-AF79-A55EB1FDECA5}</a:tableStyleId>
               </a:tblPr>
               <a:tblGrid>
                 <a:gridCol w="638675"/>
@@ -22310,7 +22310,7 @@
             <a:tbl>
               <a:tblPr>
                 <a:noFill/>
-                <a:tableStyleId>{28F49017-D488-4D14-BD19-3D1265C67C6A}</a:tableStyleId>
+                <a:tableStyleId>{557111F9-E64D-40C2-AF79-A55EB1FDECA5}</a:tableStyleId>
               </a:tblPr>
               <a:tblGrid>
                 <a:gridCol w="1280725"/>
@@ -27012,7 +27012,7 @@
 </file>
 
 <file path=ppt/theme/theme2.xml><?xml version="1.0" encoding="utf-8"?>
-<a:theme xmlns:a="http://schemas.openxmlformats.org/drawingml/2006/main" xmlns:r="http://schemas.openxmlformats.org/officeDocument/2006/relationships" name="AMOS Slides Template">
+<a:theme xmlns:a="http://schemas.openxmlformats.org/drawingml/2006/main" xmlns:r="http://schemas.openxmlformats.org/officeDocument/2006/relationships" name="POSS Slides Template">
   <a:themeElements>
     <a:clrScheme name="Simple Light">
       <a:dk1>
@@ -27291,7 +27291,7 @@
 </file>
 
 <file path=ppt/theme/theme3.xml><?xml version="1.0" encoding="utf-8"?>
-<a:theme xmlns:a="http://schemas.openxmlformats.org/drawingml/2006/main" xmlns:r="http://schemas.openxmlformats.org/officeDocument/2006/relationships" name="POSS Slides Template">
+<a:theme xmlns:a="http://schemas.openxmlformats.org/drawingml/2006/main" xmlns:r="http://schemas.openxmlformats.org/officeDocument/2006/relationships" name="AMOS Slides Template">
   <a:themeElements>
     <a:clrScheme name="Simple Light">
       <a:dk1>
